--- a/assets/template_lupita.pptx
+++ b/assets/template_lupita.pptx
@@ -1,31 +1,31 @@
 
 <file path=ppt/presentation.xml><?xml version="1.0" encoding="utf-8"?>
-<p:presentation xmlns:a="http://schemas.openxmlformats.org/drawingml/2006/main" xmlns:r="http://schemas.openxmlformats.org/officeDocument/2006/relationships" xmlns:mc="http://schemas.openxmlformats.org/markup-compatibility/2006" xmlns:mv="urn:schemas-microsoft-com:mac:vml" xmlns:p="http://schemas.openxmlformats.org/presentationml/2006/main" xmlns:c="http://schemas.openxmlformats.org/drawingml/2006/chart" xmlns:dgm="http://schemas.openxmlformats.org/drawingml/2006/diagram" xmlns:o="urn:schemas-microsoft-com:office:office" xmlns:v="urn:schemas-microsoft-com:vml" xmlns:pvml="urn:schemas-microsoft-com:office:powerpoint" xmlns:com="http://schemas.openxmlformats.org/drawingml/2006/compatibility" xmlns:p14="http://schemas.microsoft.com/office/powerpoint/2010/main" xmlns:p15="http://schemas.microsoft.com/office/powerpoint/2012/main" xmlns:ahyp="http://schemas.microsoft.com/office/drawing/2018/hyperlinkcolor" autoCompressPictures="0" embedTrueTypeFonts="1" strictFirstAndLastChars="0" saveSubsetFonts="1">
+<p:presentation xmlns:a="http://schemas.openxmlformats.org/drawingml/2006/main" xmlns:r="http://schemas.openxmlformats.org/officeDocument/2006/relationships" xmlns:p="http://schemas.openxmlformats.org/presentationml/2006/main" strictFirstAndLastChars="0" embedTrueTypeFonts="1" saveSubsetFonts="1" autoCompressPictures="0">
   <p:sldMasterIdLst>
-    <p:sldMasterId id="2147483659" r:id="rId4"/>
+    <p:sldMasterId id="2147483659" r:id="rId1"/>
   </p:sldMasterIdLst>
   <p:notesMasterIdLst>
-    <p:notesMasterId r:id="rId5"/>
+    <p:notesMasterId r:id="rId6"/>
   </p:notesMasterIdLst>
   <p:sldIdLst>
-    <p:sldId id="256" r:id="rId6"/>
-    <p:sldId id="257" r:id="rId7"/>
-    <p:sldId id="258" r:id="rId8"/>
-    <p:sldId id="259" r:id="rId9"/>
+    <p:sldId id="256" r:id="rId2"/>
+    <p:sldId id="257" r:id="rId3"/>
+    <p:sldId id="258" r:id="rId4"/>
+    <p:sldId id="259" r:id="rId5"/>
   </p:sldIdLst>
-  <p:sldSz cy="18288000" cx="10287000"/>
+  <p:sldSz cx="10287000" cy="18288000"/>
   <p:notesSz cx="6858000" cy="9144000"/>
   <p:embeddedFontLst>
     <p:embeddedFont>
-      <p:font typeface="Archivo"/>
-      <p:regular r:id="rId10"/>
-      <p:bold r:id="rId11"/>
-      <p:italic r:id="rId12"/>
-      <p:boldItalic r:id="rId13"/>
+      <p:font typeface="Archivo" panose="020B0604020202020204" charset="0"/>
+      <p:regular r:id="rId7"/>
+      <p:bold r:id="rId8"/>
+      <p:italic r:id="rId9"/>
+      <p:boldItalic r:id="rId10"/>
     </p:embeddedFont>
   </p:embeddedFontLst>
   <p:defaultTextStyle>
-    <a:defPPr lvl="0" marR="0" rtl="0" algn="l">
+    <a:defPPr marR="0" lvl="0" algn="l" rtl="0">
       <a:lnSpc>
         <a:spcPct val="100000"/>
       </a:lnSpc>
@@ -36,7 +36,7 @@
         <a:spcPts val="0"/>
       </a:spcAft>
     </a:defPPr>
-    <a:lvl1pPr lvl="0" marR="0" rtl="0" algn="l">
+    <a:lvl1pPr marR="0" lvl="0" algn="l" rtl="0">
       <a:lnSpc>
         <a:spcPct val="100000"/>
       </a:lnSpc>
@@ -50,7 +50,7 @@
         <a:srgbClr val="000000"/>
       </a:buClr>
       <a:buFont typeface="Arial"/>
-      <a:defRPr b="0" i="0" spc="0" sz="1400" u="none" cap="none" strike="noStrike">
+      <a:defRPr sz="1400" b="0" i="0" u="none" strike="noStrike" cap="none" spc="0">
         <a:solidFill>
           <a:srgbClr val="000000"/>
         </a:solidFill>
@@ -60,7 +60,7 @@
         <a:sym typeface="Arial"/>
       </a:defRPr>
     </a:lvl1pPr>
-    <a:lvl2pPr lvl="1" marR="0" rtl="0" algn="l">
+    <a:lvl2pPr marR="0" lvl="1" algn="l" rtl="0">
       <a:lnSpc>
         <a:spcPct val="100000"/>
       </a:lnSpc>
@@ -74,7 +74,7 @@
         <a:srgbClr val="000000"/>
       </a:buClr>
       <a:buFont typeface="Arial"/>
-      <a:defRPr b="0" i="0" spc="0" sz="1400" u="none" cap="none" strike="noStrike">
+      <a:defRPr sz="1400" b="0" i="0" u="none" strike="noStrike" cap="none" spc="0">
         <a:solidFill>
           <a:srgbClr val="000000"/>
         </a:solidFill>
@@ -84,7 +84,7 @@
         <a:sym typeface="Arial"/>
       </a:defRPr>
     </a:lvl2pPr>
-    <a:lvl3pPr lvl="2" marR="0" rtl="0" algn="l">
+    <a:lvl3pPr marR="0" lvl="2" algn="l" rtl="0">
       <a:lnSpc>
         <a:spcPct val="100000"/>
       </a:lnSpc>
@@ -98,7 +98,7 @@
         <a:srgbClr val="000000"/>
       </a:buClr>
       <a:buFont typeface="Arial"/>
-      <a:defRPr b="0" i="0" spc="0" sz="1400" u="none" cap="none" strike="noStrike">
+      <a:defRPr sz="1400" b="0" i="0" u="none" strike="noStrike" cap="none" spc="0">
         <a:solidFill>
           <a:srgbClr val="000000"/>
         </a:solidFill>
@@ -108,7 +108,7 @@
         <a:sym typeface="Arial"/>
       </a:defRPr>
     </a:lvl3pPr>
-    <a:lvl4pPr lvl="3" marR="0" rtl="0" algn="l">
+    <a:lvl4pPr marR="0" lvl="3" algn="l" rtl="0">
       <a:lnSpc>
         <a:spcPct val="100000"/>
       </a:lnSpc>
@@ -122,7 +122,7 @@
         <a:srgbClr val="000000"/>
       </a:buClr>
       <a:buFont typeface="Arial"/>
-      <a:defRPr b="0" i="0" spc="0" sz="1400" u="none" cap="none" strike="noStrike">
+      <a:defRPr sz="1400" b="0" i="0" u="none" strike="noStrike" cap="none" spc="0">
         <a:solidFill>
           <a:srgbClr val="000000"/>
         </a:solidFill>
@@ -132,7 +132,7 @@
         <a:sym typeface="Arial"/>
       </a:defRPr>
     </a:lvl4pPr>
-    <a:lvl5pPr lvl="4" marR="0" rtl="0" algn="l">
+    <a:lvl5pPr marR="0" lvl="4" algn="l" rtl="0">
       <a:lnSpc>
         <a:spcPct val="100000"/>
       </a:lnSpc>
@@ -146,7 +146,7 @@
         <a:srgbClr val="000000"/>
       </a:buClr>
       <a:buFont typeface="Arial"/>
-      <a:defRPr b="0" i="0" spc="0" sz="1400" u="none" cap="none" strike="noStrike">
+      <a:defRPr sz="1400" b="0" i="0" u="none" strike="noStrike" cap="none" spc="0">
         <a:solidFill>
           <a:srgbClr val="000000"/>
         </a:solidFill>
@@ -156,7 +156,7 @@
         <a:sym typeface="Arial"/>
       </a:defRPr>
     </a:lvl5pPr>
-    <a:lvl6pPr lvl="5" marR="0" rtl="0" algn="l">
+    <a:lvl6pPr marR="0" lvl="5" algn="l" rtl="0">
       <a:lnSpc>
         <a:spcPct val="100000"/>
       </a:lnSpc>
@@ -170,7 +170,7 @@
         <a:srgbClr val="000000"/>
       </a:buClr>
       <a:buFont typeface="Arial"/>
-      <a:defRPr b="0" i="0" spc="0" sz="1400" u="none" cap="none" strike="noStrike">
+      <a:defRPr sz="1400" b="0" i="0" u="none" strike="noStrike" cap="none" spc="0">
         <a:solidFill>
           <a:srgbClr val="000000"/>
         </a:solidFill>
@@ -180,7 +180,7 @@
         <a:sym typeface="Arial"/>
       </a:defRPr>
     </a:lvl6pPr>
-    <a:lvl7pPr lvl="6" marR="0" rtl="0" algn="l">
+    <a:lvl7pPr marR="0" lvl="6" algn="l" rtl="0">
       <a:lnSpc>
         <a:spcPct val="100000"/>
       </a:lnSpc>
@@ -194,7 +194,7 @@
         <a:srgbClr val="000000"/>
       </a:buClr>
       <a:buFont typeface="Arial"/>
-      <a:defRPr b="0" i="0" spc="0" sz="1400" u="none" cap="none" strike="noStrike">
+      <a:defRPr sz="1400" b="0" i="0" u="none" strike="noStrike" cap="none" spc="0">
         <a:solidFill>
           <a:srgbClr val="000000"/>
         </a:solidFill>
@@ -204,7 +204,7 @@
         <a:sym typeface="Arial"/>
       </a:defRPr>
     </a:lvl7pPr>
-    <a:lvl8pPr lvl="7" marR="0" rtl="0" algn="l">
+    <a:lvl8pPr marR="0" lvl="7" algn="l" rtl="0">
       <a:lnSpc>
         <a:spcPct val="100000"/>
       </a:lnSpc>
@@ -218,7 +218,7 @@
         <a:srgbClr val="000000"/>
       </a:buClr>
       <a:buFont typeface="Arial"/>
-      <a:defRPr b="0" i="0" spc="0" sz="1400" u="none" cap="none" strike="noStrike">
+      <a:defRPr sz="1400" b="0" i="0" u="none" strike="noStrike" cap="none" spc="0">
         <a:solidFill>
           <a:srgbClr val="000000"/>
         </a:solidFill>
@@ -228,7 +228,7 @@
         <a:sym typeface="Arial"/>
       </a:defRPr>
     </a:lvl8pPr>
-    <a:lvl9pPr lvl="8" marR="0" rtl="0" algn="l">
+    <a:lvl9pPr marR="0" lvl="8" algn="l" rtl="0">
       <a:lnSpc>
         <a:spcPct val="100000"/>
       </a:lnSpc>
@@ -242,7 +242,7 @@
         <a:srgbClr val="000000"/>
       </a:buClr>
       <a:buFont typeface="Arial"/>
-      <a:defRPr b="0" i="0" spc="0" sz="1400" u="none" cap="none" strike="noStrike">
+      <a:defRPr sz="1400" b="0" i="0" u="none" strike="noStrike" cap="none" spc="0">
         <a:solidFill>
           <a:srgbClr val="000000"/>
         </a:solidFill>
@@ -255,7 +255,7 @@
   </p:defaultTextStyle>
   <p:extLst>
     <p:ext uri="{EFAFB233-063F-42B5-8137-9DF3F51BA10A}">
-      <p15:sldGuideLst>
+      <p15:sldGuideLst xmlns:p15="http://schemas.microsoft.com/office/powerpoint/2012/main">
         <p15:guide id="1" orient="horz" pos="5760">
           <p15:clr>
             <a:srgbClr val="A4A3A4"/>
@@ -283,11 +283,16 @@
 </file>
 
 <file path=ppt/notesMasters/notesMaster1.xml><?xml version="1.0" encoding="utf-8"?>
-<p:notesMaster xmlns:a="http://schemas.openxmlformats.org/drawingml/2006/main" xmlns:r="http://schemas.openxmlformats.org/officeDocument/2006/relationships" xmlns:mc="http://schemas.openxmlformats.org/markup-compatibility/2006" xmlns:mv="urn:schemas-microsoft-com:mac:vml" xmlns:p="http://schemas.openxmlformats.org/presentationml/2006/main" xmlns:c="http://schemas.openxmlformats.org/drawingml/2006/chart" xmlns:dgm="http://schemas.openxmlformats.org/drawingml/2006/diagram" xmlns:o="urn:schemas-microsoft-com:office:office" xmlns:v="urn:schemas-microsoft-com:vml" xmlns:pvml="urn:schemas-microsoft-com:office:powerpoint" xmlns:com="http://schemas.openxmlformats.org/drawingml/2006/compatibility" xmlns:p14="http://schemas.microsoft.com/office/powerpoint/2010/main" xmlns:p15="http://schemas.microsoft.com/office/powerpoint/2012/main" xmlns:ahyp="http://schemas.microsoft.com/office/drawing/2018/hyperlinkcolor">
+<p:notesMaster xmlns:a="http://schemas.openxmlformats.org/drawingml/2006/main" xmlns:r="http://schemas.openxmlformats.org/officeDocument/2006/relationships" xmlns:p="http://schemas.openxmlformats.org/presentationml/2006/main">
   <p:cSld>
+    <p:bg>
+      <p:bgRef idx="1001">
+        <a:schemeClr val="bg1"/>
+      </p:bgRef>
+    </p:bg>
     <p:spTree>
       <p:nvGrpSpPr>
-        <p:cNvPr id="2" name="Shape 2"/>
+        <p:cNvPr id="1" name="Shape 2"/>
         <p:cNvGrpSpPr/>
         <p:nvPr/>
       </p:nvGrpSpPr>
@@ -302,9 +307,11 @@
       <p:sp>
         <p:nvSpPr>
           <p:cNvPr id="3" name="Google Shape;3;n"/>
-          <p:cNvSpPr/>
+          <p:cNvSpPr>
+            <a:spLocks noGrp="1" noRot="1" noChangeAspect="1"/>
+          </p:cNvSpPr>
           <p:nvPr>
-            <p:ph idx="2" type="sldImg"/>
+            <p:ph type="sldImg" idx="2"/>
           </p:nvPr>
         </p:nvSpPr>
         <p:spPr>
@@ -313,9 +320,13 @@
             <a:ext cx="1928700" cy="3429000"/>
           </a:xfrm>
           <a:custGeom>
-            <a:rect b="b" l="l" r="r" t="t"/>
+            <a:avLst/>
+            <a:gdLst/>
+            <a:ahLst/>
+            <a:cxnLst/>
+            <a:rect l="l" t="t" r="r" b="b"/>
             <a:pathLst>
-              <a:path extrusionOk="0" h="120000" w="120000">
+              <a:path w="120000" h="120000" extrusionOk="0">
                 <a:moveTo>
                   <a:pt x="0" y="0"/>
                 </a:moveTo>
@@ -333,23 +344,25 @@
             </a:pathLst>
           </a:custGeom>
           <a:noFill/>
-          <a:ln cap="flat" cmpd="sng" w="9525">
+          <a:ln w="9525" cap="flat" cmpd="sng">
             <a:solidFill>
               <a:srgbClr val="000000"/>
             </a:solidFill>
             <a:prstDash val="solid"/>
             <a:round/>
-            <a:headEnd len="sm" w="sm" type="none"/>
-            <a:tailEnd len="sm" w="sm" type="none"/>
+            <a:headEnd type="none" w="sm" len="sm"/>
+            <a:tailEnd type="none" w="sm" len="sm"/>
           </a:ln>
         </p:spPr>
       </p:sp>
       <p:sp>
         <p:nvSpPr>
           <p:cNvPr id="4" name="Google Shape;4;n"/>
-          <p:cNvSpPr txBox="1"/>
+          <p:cNvSpPr txBox="1">
+            <a:spLocks noGrp="1"/>
+          </p:cNvSpPr>
           <p:nvPr>
-            <p:ph idx="1" type="body"/>
+            <p:ph type="body" idx="1"/>
           </p:nvPr>
         </p:nvSpPr>
         <p:spPr>
@@ -366,11 +379,11 @@
           </a:ln>
         </p:spPr>
         <p:txBody>
-          <a:bodyPr anchorCtr="0" anchor="t" bIns="91425" lIns="91425" spcFirstLastPara="1" rIns="91425" wrap="square" tIns="91425">
+          <a:bodyPr spcFirstLastPara="1" wrap="square" lIns="91425" tIns="91425" rIns="91425" bIns="91425" anchor="t" anchorCtr="0">
             <a:noAutofit/>
           </a:bodyPr>
           <a:lstStyle>
-            <a:lvl1pPr indent="-298450" lvl="0" marL="457200" marR="0" rtl="0" algn="l">
+            <a:lvl1pPr marL="457200" marR="0" lvl="0" indent="-298450" algn="l" rtl="0">
               <a:lnSpc>
                 <a:spcPct val="100000"/>
               </a:lnSpc>
@@ -386,7 +399,7 @@
               <a:buSzPts val="1100"/>
               <a:buFont typeface="Arial"/>
               <a:buChar char="●"/>
-              <a:defRPr b="0" i="0" sz="1100" u="none" cap="none" strike="noStrike">
+              <a:defRPr sz="1100" b="0" i="0" u="none" strike="noStrike" cap="none">
                 <a:solidFill>
                   <a:srgbClr val="000000"/>
                 </a:solidFill>
@@ -396,7 +409,7 @@
                 <a:sym typeface="Arial"/>
               </a:defRPr>
             </a:lvl1pPr>
-            <a:lvl2pPr indent="-298450" lvl="1" marL="914400" marR="0" rtl="0" algn="l">
+            <a:lvl2pPr marL="914400" marR="0" lvl="1" indent="-298450" algn="l" rtl="0">
               <a:lnSpc>
                 <a:spcPct val="100000"/>
               </a:lnSpc>
@@ -412,7 +425,7 @@
               <a:buSzPts val="1100"/>
               <a:buFont typeface="Arial"/>
               <a:buChar char="○"/>
-              <a:defRPr b="0" i="0" sz="1100" u="none" cap="none" strike="noStrike">
+              <a:defRPr sz="1100" b="0" i="0" u="none" strike="noStrike" cap="none">
                 <a:solidFill>
                   <a:srgbClr val="000000"/>
                 </a:solidFill>
@@ -422,7 +435,7 @@
                 <a:sym typeface="Arial"/>
               </a:defRPr>
             </a:lvl2pPr>
-            <a:lvl3pPr indent="-298450" lvl="2" marL="1371600" marR="0" rtl="0" algn="l">
+            <a:lvl3pPr marL="1371600" marR="0" lvl="2" indent="-298450" algn="l" rtl="0">
               <a:lnSpc>
                 <a:spcPct val="100000"/>
               </a:lnSpc>
@@ -438,7 +451,7 @@
               <a:buSzPts val="1100"/>
               <a:buFont typeface="Arial"/>
               <a:buChar char="■"/>
-              <a:defRPr b="0" i="0" sz="1100" u="none" cap="none" strike="noStrike">
+              <a:defRPr sz="1100" b="0" i="0" u="none" strike="noStrike" cap="none">
                 <a:solidFill>
                   <a:srgbClr val="000000"/>
                 </a:solidFill>
@@ -448,7 +461,7 @@
                 <a:sym typeface="Arial"/>
               </a:defRPr>
             </a:lvl3pPr>
-            <a:lvl4pPr indent="-298450" lvl="3" marL="1828800" marR="0" rtl="0" algn="l">
+            <a:lvl4pPr marL="1828800" marR="0" lvl="3" indent="-298450" algn="l" rtl="0">
               <a:lnSpc>
                 <a:spcPct val="100000"/>
               </a:lnSpc>
@@ -464,7 +477,7 @@
               <a:buSzPts val="1100"/>
               <a:buFont typeface="Arial"/>
               <a:buChar char="●"/>
-              <a:defRPr b="0" i="0" sz="1100" u="none" cap="none" strike="noStrike">
+              <a:defRPr sz="1100" b="0" i="0" u="none" strike="noStrike" cap="none">
                 <a:solidFill>
                   <a:srgbClr val="000000"/>
                 </a:solidFill>
@@ -474,7 +487,7 @@
                 <a:sym typeface="Arial"/>
               </a:defRPr>
             </a:lvl4pPr>
-            <a:lvl5pPr indent="-298450" lvl="4" marL="2286000" marR="0" rtl="0" algn="l">
+            <a:lvl5pPr marL="2286000" marR="0" lvl="4" indent="-298450" algn="l" rtl="0">
               <a:lnSpc>
                 <a:spcPct val="100000"/>
               </a:lnSpc>
@@ -490,7 +503,7 @@
               <a:buSzPts val="1100"/>
               <a:buFont typeface="Arial"/>
               <a:buChar char="○"/>
-              <a:defRPr b="0" i="0" sz="1100" u="none" cap="none" strike="noStrike">
+              <a:defRPr sz="1100" b="0" i="0" u="none" strike="noStrike" cap="none">
                 <a:solidFill>
                   <a:srgbClr val="000000"/>
                 </a:solidFill>
@@ -500,7 +513,7 @@
                 <a:sym typeface="Arial"/>
               </a:defRPr>
             </a:lvl5pPr>
-            <a:lvl6pPr indent="-298450" lvl="5" marL="2743200" marR="0" rtl="0" algn="l">
+            <a:lvl6pPr marL="2743200" marR="0" lvl="5" indent="-298450" algn="l" rtl="0">
               <a:lnSpc>
                 <a:spcPct val="100000"/>
               </a:lnSpc>
@@ -516,7 +529,7 @@
               <a:buSzPts val="1100"/>
               <a:buFont typeface="Arial"/>
               <a:buChar char="■"/>
-              <a:defRPr b="0" i="0" sz="1100" u="none" cap="none" strike="noStrike">
+              <a:defRPr sz="1100" b="0" i="0" u="none" strike="noStrike" cap="none">
                 <a:solidFill>
                   <a:srgbClr val="000000"/>
                 </a:solidFill>
@@ -526,7 +539,7 @@
                 <a:sym typeface="Arial"/>
               </a:defRPr>
             </a:lvl6pPr>
-            <a:lvl7pPr indent="-298450" lvl="6" marL="3200400" marR="0" rtl="0" algn="l">
+            <a:lvl7pPr marL="3200400" marR="0" lvl="6" indent="-298450" algn="l" rtl="0">
               <a:lnSpc>
                 <a:spcPct val="100000"/>
               </a:lnSpc>
@@ -542,7 +555,7 @@
               <a:buSzPts val="1100"/>
               <a:buFont typeface="Arial"/>
               <a:buChar char="●"/>
-              <a:defRPr b="0" i="0" sz="1100" u="none" cap="none" strike="noStrike">
+              <a:defRPr sz="1100" b="0" i="0" u="none" strike="noStrike" cap="none">
                 <a:solidFill>
                   <a:srgbClr val="000000"/>
                 </a:solidFill>
@@ -552,7 +565,7 @@
                 <a:sym typeface="Arial"/>
               </a:defRPr>
             </a:lvl7pPr>
-            <a:lvl8pPr indent="-298450" lvl="7" marL="3657600" marR="0" rtl="0" algn="l">
+            <a:lvl8pPr marL="3657600" marR="0" lvl="7" indent="-298450" algn="l" rtl="0">
               <a:lnSpc>
                 <a:spcPct val="100000"/>
               </a:lnSpc>
@@ -568,7 +581,7 @@
               <a:buSzPts val="1100"/>
               <a:buFont typeface="Arial"/>
               <a:buChar char="○"/>
-              <a:defRPr b="0" i="0" sz="1100" u="none" cap="none" strike="noStrike">
+              <a:defRPr sz="1100" b="0" i="0" u="none" strike="noStrike" cap="none">
                 <a:solidFill>
                   <a:srgbClr val="000000"/>
                 </a:solidFill>
@@ -578,7 +591,7 @@
                 <a:sym typeface="Arial"/>
               </a:defRPr>
             </a:lvl8pPr>
-            <a:lvl9pPr indent="-298450" lvl="8" marL="4114800" marR="0" rtl="0" algn="l">
+            <a:lvl9pPr marL="4114800" marR="0" lvl="8" indent="-298450" algn="l" rtl="0">
               <a:lnSpc>
                 <a:spcPct val="100000"/>
               </a:lnSpc>
@@ -594,7 +607,7 @@
               <a:buSzPts val="1100"/>
               <a:buFont typeface="Arial"/>
               <a:buChar char="■"/>
-              <a:defRPr b="0" i="0" sz="1100" u="none" cap="none" strike="noStrike">
+              <a:defRPr sz="1100" b="0" i="0" u="none" strike="noStrike" cap="none">
                 <a:solidFill>
                   <a:srgbClr val="000000"/>
                 </a:solidFill>
@@ -605,14 +618,16 @@
               </a:defRPr>
             </a:lvl9pPr>
           </a:lstStyle>
-          <a:p/>
+          <a:p>
+            <a:endParaRPr/>
+          </a:p>
         </p:txBody>
       </p:sp>
     </p:spTree>
   </p:cSld>
-  <p:clrMap accent1="accent1" accent2="accent2" accent3="accent3" accent4="accent4" accent5="accent5" accent6="accent6" bg1="lt1" bg2="dk2" tx1="dk1" tx2="lt2" folHlink="folHlink" hlink="hlink"/>
+  <p:clrMap bg1="lt1" tx1="dk1" bg2="dk2" tx2="lt2" accent1="accent1" accent2="accent2" accent3="accent3" accent4="accent4" accent5="accent5" accent6="accent6" hlink="hlink" folHlink="folHlink"/>
   <p:notesStyle>
-    <a:defPPr lvl="0" marR="0" rtl="0" algn="l">
+    <a:defPPr marR="0" lvl="0" algn="l" rtl="0">
       <a:lnSpc>
         <a:spcPct val="100000"/>
       </a:lnSpc>
@@ -623,7 +638,7 @@
         <a:spcPts val="0"/>
       </a:spcAft>
     </a:defPPr>
-    <a:lvl1pPr lvl="0" marR="0" rtl="0" algn="l">
+    <a:lvl1pPr marR="0" lvl="0" algn="l" rtl="0">
       <a:lnSpc>
         <a:spcPct val="100000"/>
       </a:lnSpc>
@@ -637,7 +652,7 @@
         <a:srgbClr val="000000"/>
       </a:buClr>
       <a:buFont typeface="Arial"/>
-      <a:defRPr b="0" i="0" spc="0" sz="1400" u="none" cap="none" strike="noStrike">
+      <a:defRPr sz="1400" b="0" i="0" u="none" strike="noStrike" cap="none" spc="0">
         <a:solidFill>
           <a:srgbClr val="000000"/>
         </a:solidFill>
@@ -647,7 +662,7 @@
         <a:sym typeface="Arial"/>
       </a:defRPr>
     </a:lvl1pPr>
-    <a:lvl2pPr lvl="1" marR="0" rtl="0" algn="l">
+    <a:lvl2pPr marR="0" lvl="1" algn="l" rtl="0">
       <a:lnSpc>
         <a:spcPct val="100000"/>
       </a:lnSpc>
@@ -661,7 +676,7 @@
         <a:srgbClr val="000000"/>
       </a:buClr>
       <a:buFont typeface="Arial"/>
-      <a:defRPr b="0" i="0" spc="0" sz="1400" u="none" cap="none" strike="noStrike">
+      <a:defRPr sz="1400" b="0" i="0" u="none" strike="noStrike" cap="none" spc="0">
         <a:solidFill>
           <a:srgbClr val="000000"/>
         </a:solidFill>
@@ -671,7 +686,7 @@
         <a:sym typeface="Arial"/>
       </a:defRPr>
     </a:lvl2pPr>
-    <a:lvl3pPr lvl="2" marR="0" rtl="0" algn="l">
+    <a:lvl3pPr marR="0" lvl="2" algn="l" rtl="0">
       <a:lnSpc>
         <a:spcPct val="100000"/>
       </a:lnSpc>
@@ -685,7 +700,7 @@
         <a:srgbClr val="000000"/>
       </a:buClr>
       <a:buFont typeface="Arial"/>
-      <a:defRPr b="0" i="0" spc="0" sz="1400" u="none" cap="none" strike="noStrike">
+      <a:defRPr sz="1400" b="0" i="0" u="none" strike="noStrike" cap="none" spc="0">
         <a:solidFill>
           <a:srgbClr val="000000"/>
         </a:solidFill>
@@ -695,7 +710,7 @@
         <a:sym typeface="Arial"/>
       </a:defRPr>
     </a:lvl3pPr>
-    <a:lvl4pPr lvl="3" marR="0" rtl="0" algn="l">
+    <a:lvl4pPr marR="0" lvl="3" algn="l" rtl="0">
       <a:lnSpc>
         <a:spcPct val="100000"/>
       </a:lnSpc>
@@ -709,7 +724,7 @@
         <a:srgbClr val="000000"/>
       </a:buClr>
       <a:buFont typeface="Arial"/>
-      <a:defRPr b="0" i="0" spc="0" sz="1400" u="none" cap="none" strike="noStrike">
+      <a:defRPr sz="1400" b="0" i="0" u="none" strike="noStrike" cap="none" spc="0">
         <a:solidFill>
           <a:srgbClr val="000000"/>
         </a:solidFill>
@@ -719,7 +734,7 @@
         <a:sym typeface="Arial"/>
       </a:defRPr>
     </a:lvl4pPr>
-    <a:lvl5pPr lvl="4" marR="0" rtl="0" algn="l">
+    <a:lvl5pPr marR="0" lvl="4" algn="l" rtl="0">
       <a:lnSpc>
         <a:spcPct val="100000"/>
       </a:lnSpc>
@@ -733,7 +748,7 @@
         <a:srgbClr val="000000"/>
       </a:buClr>
       <a:buFont typeface="Arial"/>
-      <a:defRPr b="0" i="0" spc="0" sz="1400" u="none" cap="none" strike="noStrike">
+      <a:defRPr sz="1400" b="0" i="0" u="none" strike="noStrike" cap="none" spc="0">
         <a:solidFill>
           <a:srgbClr val="000000"/>
         </a:solidFill>
@@ -743,7 +758,7 @@
         <a:sym typeface="Arial"/>
       </a:defRPr>
     </a:lvl5pPr>
-    <a:lvl6pPr lvl="5" marR="0" rtl="0" algn="l">
+    <a:lvl6pPr marR="0" lvl="5" algn="l" rtl="0">
       <a:lnSpc>
         <a:spcPct val="100000"/>
       </a:lnSpc>
@@ -757,7 +772,7 @@
         <a:srgbClr val="000000"/>
       </a:buClr>
       <a:buFont typeface="Arial"/>
-      <a:defRPr b="0" i="0" spc="0" sz="1400" u="none" cap="none" strike="noStrike">
+      <a:defRPr sz="1400" b="0" i="0" u="none" strike="noStrike" cap="none" spc="0">
         <a:solidFill>
           <a:srgbClr val="000000"/>
         </a:solidFill>
@@ -767,7 +782,7 @@
         <a:sym typeface="Arial"/>
       </a:defRPr>
     </a:lvl6pPr>
-    <a:lvl7pPr lvl="6" marR="0" rtl="0" algn="l">
+    <a:lvl7pPr marR="0" lvl="6" algn="l" rtl="0">
       <a:lnSpc>
         <a:spcPct val="100000"/>
       </a:lnSpc>
@@ -781,7 +796,7 @@
         <a:srgbClr val="000000"/>
       </a:buClr>
       <a:buFont typeface="Arial"/>
-      <a:defRPr b="0" i="0" spc="0" sz="1400" u="none" cap="none" strike="noStrike">
+      <a:defRPr sz="1400" b="0" i="0" u="none" strike="noStrike" cap="none" spc="0">
         <a:solidFill>
           <a:srgbClr val="000000"/>
         </a:solidFill>
@@ -791,7 +806,7 @@
         <a:sym typeface="Arial"/>
       </a:defRPr>
     </a:lvl7pPr>
-    <a:lvl8pPr lvl="7" marR="0" rtl="0" algn="l">
+    <a:lvl8pPr marR="0" lvl="7" algn="l" rtl="0">
       <a:lnSpc>
         <a:spcPct val="100000"/>
       </a:lnSpc>
@@ -805,7 +820,7 @@
         <a:srgbClr val="000000"/>
       </a:buClr>
       <a:buFont typeface="Arial"/>
-      <a:defRPr b="0" i="0" spc="0" sz="1400" u="none" cap="none" strike="noStrike">
+      <a:defRPr sz="1400" b="0" i="0" u="none" strike="noStrike" cap="none" spc="0">
         <a:solidFill>
           <a:srgbClr val="000000"/>
         </a:solidFill>
@@ -815,7 +830,7 @@
         <a:sym typeface="Arial"/>
       </a:defRPr>
     </a:lvl8pPr>
-    <a:lvl9pPr lvl="8" marR="0" rtl="0" algn="l">
+    <a:lvl9pPr marR="0" lvl="8" algn="l" rtl="0">
       <a:lnSpc>
         <a:spcPct val="100000"/>
       </a:lnSpc>
@@ -829,7 +844,7 @@
         <a:srgbClr val="000000"/>
       </a:buClr>
       <a:buFont typeface="Arial"/>
-      <a:defRPr b="0" i="0" spc="0" sz="1400" u="none" cap="none" strike="noStrike">
+      <a:defRPr sz="1400" b="0" i="0" u="none" strike="noStrike" cap="none" spc="0">
         <a:solidFill>
           <a:srgbClr val="000000"/>
         </a:solidFill>
@@ -844,11 +859,11 @@
 </file>
 
 <file path=ppt/notesSlides/notesSlide1.xml><?xml version="1.0" encoding="utf-8"?>
-<p:notes xmlns:a="http://schemas.openxmlformats.org/drawingml/2006/main" xmlns:r="http://schemas.openxmlformats.org/officeDocument/2006/relationships" xmlns:mc="http://schemas.openxmlformats.org/markup-compatibility/2006" xmlns:mv="urn:schemas-microsoft-com:mac:vml" xmlns:p="http://schemas.openxmlformats.org/presentationml/2006/main" xmlns:c="http://schemas.openxmlformats.org/drawingml/2006/chart" xmlns:dgm="http://schemas.openxmlformats.org/drawingml/2006/diagram" xmlns:o="urn:schemas-microsoft-com:office:office" xmlns:v="urn:schemas-microsoft-com:vml" xmlns:pvml="urn:schemas-microsoft-com:office:powerpoint" xmlns:com="http://schemas.openxmlformats.org/drawingml/2006/compatibility" xmlns:p14="http://schemas.microsoft.com/office/powerpoint/2010/main" xmlns:p15="http://schemas.microsoft.com/office/powerpoint/2012/main" xmlns:ahyp="http://schemas.microsoft.com/office/drawing/2018/hyperlinkcolor" showMasterPhAnim="0" showMasterSp="0">
+<p:notes xmlns:a="http://schemas.openxmlformats.org/drawingml/2006/main" xmlns:r="http://schemas.openxmlformats.org/officeDocument/2006/relationships" xmlns:p="http://schemas.openxmlformats.org/presentationml/2006/main" showMasterSp="0" showMasterPhAnim="0">
   <p:cSld>
     <p:spTree>
       <p:nvGrpSpPr>
-        <p:cNvPr id="50" name="Shape 50"/>
+        <p:cNvPr id="1" name="Shape 50"/>
         <p:cNvGrpSpPr/>
         <p:nvPr/>
       </p:nvGrpSpPr>
@@ -863,20 +878,26 @@
       <p:sp>
         <p:nvSpPr>
           <p:cNvPr id="51" name="Google Shape;51;g260e20c4d8c_0_0:notes"/>
-          <p:cNvSpPr/>
+          <p:cNvSpPr>
+            <a:spLocks noGrp="1" noRot="1" noChangeAspect="1"/>
+          </p:cNvSpPr>
           <p:nvPr>
-            <p:ph idx="2" type="sldImg"/>
+            <p:ph type="sldImg" idx="2"/>
           </p:nvPr>
         </p:nvSpPr>
         <p:spPr>
           <a:xfrm>
-            <a:off x="2464919" y="685800"/>
-            <a:ext cx="1928700" cy="3429000"/>
+            <a:off x="2465388" y="685800"/>
+            <a:ext cx="1928812" cy="3429000"/>
           </a:xfrm>
           <a:custGeom>
-            <a:rect b="b" l="l" r="r" t="t"/>
+            <a:avLst/>
+            <a:gdLst/>
+            <a:ahLst/>
+            <a:cxnLst/>
+            <a:rect l="l" t="t" r="r" b="b"/>
             <a:pathLst>
-              <a:path extrusionOk="0" h="120000" w="120000">
+              <a:path w="120000" h="120000" extrusionOk="0">
                 <a:moveTo>
                   <a:pt x="0" y="0"/>
                 </a:moveTo>
@@ -894,23 +915,25 @@
             </a:pathLst>
           </a:custGeom>
           <a:noFill/>
-          <a:ln cap="flat" cmpd="sng" w="9525">
+          <a:ln w="9525" cap="flat" cmpd="sng">
             <a:solidFill>
               <a:srgbClr val="000000"/>
             </a:solidFill>
             <a:prstDash val="solid"/>
             <a:round/>
-            <a:headEnd len="sm" w="sm" type="none"/>
-            <a:tailEnd len="sm" w="sm" type="none"/>
+            <a:headEnd type="none" w="sm" len="sm"/>
+            <a:tailEnd type="none" w="sm" len="sm"/>
           </a:ln>
         </p:spPr>
       </p:sp>
       <p:sp>
         <p:nvSpPr>
           <p:cNvPr id="52" name="Google Shape;52;g260e20c4d8c_0_0:notes"/>
-          <p:cNvSpPr txBox="1"/>
+          <p:cNvSpPr txBox="1">
+            <a:spLocks noGrp="1"/>
+          </p:cNvSpPr>
           <p:nvPr>
-            <p:ph idx="1" type="body"/>
+            <p:ph type="body" idx="1"/>
           </p:nvPr>
         </p:nvSpPr>
         <p:spPr>
@@ -927,12 +950,12 @@
           </a:ln>
         </p:spPr>
         <p:txBody>
-          <a:bodyPr anchorCtr="0" anchor="t" bIns="91425" lIns="91425" spcFirstLastPara="1" rIns="91425" wrap="square" tIns="91425">
+          <a:bodyPr spcFirstLastPara="1" wrap="square" lIns="91425" tIns="91425" rIns="91425" bIns="91425" anchor="t" anchorCtr="0">
             <a:noAutofit/>
           </a:bodyPr>
           <a:lstStyle/>
           <a:p>
-            <a:pPr indent="0" lvl="0" marL="0" rtl="0" algn="l">
+            <a:pPr marL="0" lvl="0" indent="0" algn="l" rtl="0">
               <a:lnSpc>
                 <a:spcPct val="100000"/>
               </a:lnSpc>
@@ -945,9 +968,6 @@
               <a:buSzPts val="1100"/>
               <a:buNone/>
             </a:pPr>
-            <a:r>
-              <a:t/>
-            </a:r>
             <a:endParaRPr/>
           </a:p>
         </p:txBody>
@@ -961,11 +981,11 @@
 </file>
 
 <file path=ppt/notesSlides/notesSlide2.xml><?xml version="1.0" encoding="utf-8"?>
-<p:notes xmlns:a="http://schemas.openxmlformats.org/drawingml/2006/main" xmlns:r="http://schemas.openxmlformats.org/officeDocument/2006/relationships" xmlns:mc="http://schemas.openxmlformats.org/markup-compatibility/2006" xmlns:mv="urn:schemas-microsoft-com:mac:vml" xmlns:p="http://schemas.openxmlformats.org/presentationml/2006/main" xmlns:c="http://schemas.openxmlformats.org/drawingml/2006/chart" xmlns:dgm="http://schemas.openxmlformats.org/drawingml/2006/diagram" xmlns:o="urn:schemas-microsoft-com:office:office" xmlns:v="urn:schemas-microsoft-com:vml" xmlns:pvml="urn:schemas-microsoft-com:office:powerpoint" xmlns:com="http://schemas.openxmlformats.org/drawingml/2006/compatibility" xmlns:p14="http://schemas.microsoft.com/office/powerpoint/2010/main" xmlns:p15="http://schemas.microsoft.com/office/powerpoint/2012/main" xmlns:ahyp="http://schemas.microsoft.com/office/drawing/2018/hyperlinkcolor" showMasterPhAnim="0" showMasterSp="0">
+<p:notes xmlns:a="http://schemas.openxmlformats.org/drawingml/2006/main" xmlns:r="http://schemas.openxmlformats.org/officeDocument/2006/relationships" xmlns:p="http://schemas.openxmlformats.org/presentationml/2006/main" showMasterSp="0" showMasterPhAnim="0">
   <p:cSld>
     <p:spTree>
       <p:nvGrpSpPr>
-        <p:cNvPr id="55" name="Shape 55"/>
+        <p:cNvPr id="1" name="Shape 55"/>
         <p:cNvGrpSpPr/>
         <p:nvPr/>
       </p:nvGrpSpPr>
@@ -980,20 +1000,26 @@
       <p:sp>
         <p:nvSpPr>
           <p:cNvPr id="56" name="Google Shape;56;g21c1ad74c67_0_0:notes"/>
-          <p:cNvSpPr/>
+          <p:cNvSpPr>
+            <a:spLocks noGrp="1" noRot="1" noChangeAspect="1"/>
+          </p:cNvSpPr>
           <p:nvPr>
-            <p:ph idx="2" type="sldImg"/>
+            <p:ph type="sldImg" idx="2"/>
           </p:nvPr>
         </p:nvSpPr>
         <p:spPr>
           <a:xfrm>
-            <a:off x="2464919" y="685800"/>
-            <a:ext cx="1928700" cy="3429000"/>
+            <a:off x="2465388" y="685800"/>
+            <a:ext cx="1928812" cy="3429000"/>
           </a:xfrm>
           <a:custGeom>
-            <a:rect b="b" l="l" r="r" t="t"/>
+            <a:avLst/>
+            <a:gdLst/>
+            <a:ahLst/>
+            <a:cxnLst/>
+            <a:rect l="l" t="t" r="r" b="b"/>
             <a:pathLst>
-              <a:path extrusionOk="0" h="120000" w="120000">
+              <a:path w="120000" h="120000" extrusionOk="0">
                 <a:moveTo>
                   <a:pt x="0" y="0"/>
                 </a:moveTo>
@@ -1011,23 +1037,25 @@
             </a:pathLst>
           </a:custGeom>
           <a:noFill/>
-          <a:ln cap="flat" cmpd="sng" w="9525">
+          <a:ln w="9525" cap="flat" cmpd="sng">
             <a:solidFill>
               <a:srgbClr val="000000"/>
             </a:solidFill>
             <a:prstDash val="solid"/>
             <a:round/>
-            <a:headEnd len="sm" w="sm" type="none"/>
-            <a:tailEnd len="sm" w="sm" type="none"/>
+            <a:headEnd type="none" w="sm" len="sm"/>
+            <a:tailEnd type="none" w="sm" len="sm"/>
           </a:ln>
         </p:spPr>
       </p:sp>
       <p:sp>
         <p:nvSpPr>
           <p:cNvPr id="57" name="Google Shape;57;g21c1ad74c67_0_0:notes"/>
-          <p:cNvSpPr txBox="1"/>
+          <p:cNvSpPr txBox="1">
+            <a:spLocks noGrp="1"/>
+          </p:cNvSpPr>
           <p:nvPr>
-            <p:ph idx="1" type="body"/>
+            <p:ph type="body" idx="1"/>
           </p:nvPr>
         </p:nvSpPr>
         <p:spPr>
@@ -1044,12 +1072,12 @@
           </a:ln>
         </p:spPr>
         <p:txBody>
-          <a:bodyPr anchorCtr="0" anchor="t" bIns="91425" lIns="91425" spcFirstLastPara="1" rIns="91425" wrap="square" tIns="91425">
+          <a:bodyPr spcFirstLastPara="1" wrap="square" lIns="91425" tIns="91425" rIns="91425" bIns="91425" anchor="t" anchorCtr="0">
             <a:noAutofit/>
           </a:bodyPr>
           <a:lstStyle/>
           <a:p>
-            <a:pPr indent="0" lvl="0" marL="0" rtl="0" algn="l">
+            <a:pPr marL="0" lvl="0" indent="0" algn="l" rtl="0">
               <a:lnSpc>
                 <a:spcPct val="100000"/>
               </a:lnSpc>
@@ -1062,9 +1090,6 @@
               <a:buSzPts val="1100"/>
               <a:buNone/>
             </a:pPr>
-            <a:r>
-              <a:t/>
-            </a:r>
             <a:endParaRPr/>
           </a:p>
         </p:txBody>
@@ -1078,11 +1103,11 @@
 </file>
 
 <file path=ppt/notesSlides/notesSlide3.xml><?xml version="1.0" encoding="utf-8"?>
-<p:notes xmlns:a="http://schemas.openxmlformats.org/drawingml/2006/main" xmlns:r="http://schemas.openxmlformats.org/officeDocument/2006/relationships" xmlns:mc="http://schemas.openxmlformats.org/markup-compatibility/2006" xmlns:mv="urn:schemas-microsoft-com:mac:vml" xmlns:p="http://schemas.openxmlformats.org/presentationml/2006/main" xmlns:c="http://schemas.openxmlformats.org/drawingml/2006/chart" xmlns:dgm="http://schemas.openxmlformats.org/drawingml/2006/diagram" xmlns:o="urn:schemas-microsoft-com:office:office" xmlns:v="urn:schemas-microsoft-com:vml" xmlns:pvml="urn:schemas-microsoft-com:office:powerpoint" xmlns:com="http://schemas.openxmlformats.org/drawingml/2006/compatibility" xmlns:p14="http://schemas.microsoft.com/office/powerpoint/2010/main" xmlns:p15="http://schemas.microsoft.com/office/powerpoint/2012/main" xmlns:ahyp="http://schemas.microsoft.com/office/drawing/2018/hyperlinkcolor" showMasterPhAnim="0" showMasterSp="0">
+<p:notes xmlns:a="http://schemas.openxmlformats.org/drawingml/2006/main" xmlns:r="http://schemas.openxmlformats.org/officeDocument/2006/relationships" xmlns:p="http://schemas.openxmlformats.org/presentationml/2006/main" showMasterSp="0" showMasterPhAnim="0">
   <p:cSld>
     <p:spTree>
       <p:nvGrpSpPr>
-        <p:cNvPr id="66" name="Shape 66"/>
+        <p:cNvPr id="1" name="Shape 66"/>
         <p:cNvGrpSpPr/>
         <p:nvPr/>
       </p:nvGrpSpPr>
@@ -1097,9 +1122,11 @@
       <p:sp>
         <p:nvSpPr>
           <p:cNvPr id="67" name="Google Shape;67;g2f244e6b6fe_0_0:notes"/>
-          <p:cNvSpPr/>
+          <p:cNvSpPr>
+            <a:spLocks noGrp="1" noRot="1" noChangeAspect="1"/>
+          </p:cNvSpPr>
           <p:nvPr>
-            <p:ph idx="2" type="sldImg"/>
+            <p:ph type="sldImg" idx="2"/>
           </p:nvPr>
         </p:nvSpPr>
         <p:spPr>
@@ -1108,9 +1135,13 @@
             <a:ext cx="1928700" cy="3429000"/>
           </a:xfrm>
           <a:custGeom>
-            <a:rect b="b" l="l" r="r" t="t"/>
+            <a:avLst/>
+            <a:gdLst/>
+            <a:ahLst/>
+            <a:cxnLst/>
+            <a:rect l="l" t="t" r="r" b="b"/>
             <a:pathLst>
-              <a:path extrusionOk="0" h="120000" w="120000">
+              <a:path w="120000" h="120000" extrusionOk="0">
                 <a:moveTo>
                   <a:pt x="0" y="0"/>
                 </a:moveTo>
@@ -1128,23 +1159,25 @@
             </a:pathLst>
           </a:custGeom>
           <a:noFill/>
-          <a:ln cap="flat" cmpd="sng" w="9525">
+          <a:ln w="9525" cap="flat" cmpd="sng">
             <a:solidFill>
               <a:srgbClr val="000000"/>
             </a:solidFill>
             <a:prstDash val="solid"/>
             <a:round/>
-            <a:headEnd len="sm" w="sm" type="none"/>
-            <a:tailEnd len="sm" w="sm" type="none"/>
+            <a:headEnd type="none" w="sm" len="sm"/>
+            <a:tailEnd type="none" w="sm" len="sm"/>
           </a:ln>
         </p:spPr>
       </p:sp>
       <p:sp>
         <p:nvSpPr>
           <p:cNvPr id="68" name="Google Shape;68;g2f244e6b6fe_0_0:notes"/>
-          <p:cNvSpPr txBox="1"/>
+          <p:cNvSpPr txBox="1">
+            <a:spLocks noGrp="1"/>
+          </p:cNvSpPr>
           <p:nvPr>
-            <p:ph idx="1" type="body"/>
+            <p:ph type="body" idx="1"/>
           </p:nvPr>
         </p:nvSpPr>
         <p:spPr>
@@ -1161,12 +1194,12 @@
           </a:ln>
         </p:spPr>
         <p:txBody>
-          <a:bodyPr anchorCtr="0" anchor="t" bIns="91425" lIns="91425" spcFirstLastPara="1" rIns="91425" wrap="square" tIns="91425">
+          <a:bodyPr spcFirstLastPara="1" wrap="square" lIns="91425" tIns="91425" rIns="91425" bIns="91425" anchor="t" anchorCtr="0">
             <a:noAutofit/>
           </a:bodyPr>
           <a:lstStyle/>
           <a:p>
-            <a:pPr indent="0" lvl="0" marL="0" rtl="0" algn="l">
+            <a:pPr marL="0" lvl="0" indent="0" algn="l" rtl="0">
               <a:lnSpc>
                 <a:spcPct val="100000"/>
               </a:lnSpc>
@@ -1179,9 +1212,6 @@
               <a:buSzPts val="1100"/>
               <a:buNone/>
             </a:pPr>
-            <a:r>
-              <a:t/>
-            </a:r>
             <a:endParaRPr/>
           </a:p>
         </p:txBody>
@@ -1195,11 +1225,11 @@
 </file>
 
 <file path=ppt/notesSlides/notesSlide4.xml><?xml version="1.0" encoding="utf-8"?>
-<p:notes xmlns:a="http://schemas.openxmlformats.org/drawingml/2006/main" xmlns:r="http://schemas.openxmlformats.org/officeDocument/2006/relationships" xmlns:mc="http://schemas.openxmlformats.org/markup-compatibility/2006" xmlns:mv="urn:schemas-microsoft-com:mac:vml" xmlns:p="http://schemas.openxmlformats.org/presentationml/2006/main" xmlns:c="http://schemas.openxmlformats.org/drawingml/2006/chart" xmlns:dgm="http://schemas.openxmlformats.org/drawingml/2006/diagram" xmlns:o="urn:schemas-microsoft-com:office:office" xmlns:v="urn:schemas-microsoft-com:vml" xmlns:pvml="urn:schemas-microsoft-com:office:powerpoint" xmlns:com="http://schemas.openxmlformats.org/drawingml/2006/compatibility" xmlns:p14="http://schemas.microsoft.com/office/powerpoint/2010/main" xmlns:p15="http://schemas.microsoft.com/office/powerpoint/2012/main" xmlns:ahyp="http://schemas.microsoft.com/office/drawing/2018/hyperlinkcolor" showMasterPhAnim="0" showMasterSp="0">
+<p:notes xmlns:a="http://schemas.openxmlformats.org/drawingml/2006/main" xmlns:r="http://schemas.openxmlformats.org/officeDocument/2006/relationships" xmlns:p="http://schemas.openxmlformats.org/presentationml/2006/main" showMasterSp="0" showMasterPhAnim="0">
   <p:cSld>
     <p:spTree>
       <p:nvGrpSpPr>
-        <p:cNvPr id="70" name="Shape 70"/>
+        <p:cNvPr id="1" name="Shape 70"/>
         <p:cNvGrpSpPr/>
         <p:nvPr/>
       </p:nvGrpSpPr>
@@ -1214,9 +1244,11 @@
       <p:sp>
         <p:nvSpPr>
           <p:cNvPr id="71" name="Google Shape;71;g2f244e6b6fe_0_4:notes"/>
-          <p:cNvSpPr/>
+          <p:cNvSpPr>
+            <a:spLocks noGrp="1" noRot="1" noChangeAspect="1"/>
+          </p:cNvSpPr>
           <p:nvPr>
-            <p:ph idx="2" type="sldImg"/>
+            <p:ph type="sldImg" idx="2"/>
           </p:nvPr>
         </p:nvSpPr>
         <p:spPr>
@@ -1225,9 +1257,13 @@
             <a:ext cx="1928700" cy="3429000"/>
           </a:xfrm>
           <a:custGeom>
-            <a:rect b="b" l="l" r="r" t="t"/>
+            <a:avLst/>
+            <a:gdLst/>
+            <a:ahLst/>
+            <a:cxnLst/>
+            <a:rect l="l" t="t" r="r" b="b"/>
             <a:pathLst>
-              <a:path extrusionOk="0" h="120000" w="120000">
+              <a:path w="120000" h="120000" extrusionOk="0">
                 <a:moveTo>
                   <a:pt x="0" y="0"/>
                 </a:moveTo>
@@ -1245,23 +1281,25 @@
             </a:pathLst>
           </a:custGeom>
           <a:noFill/>
-          <a:ln cap="flat" cmpd="sng" w="9525">
+          <a:ln w="9525" cap="flat" cmpd="sng">
             <a:solidFill>
               <a:srgbClr val="000000"/>
             </a:solidFill>
             <a:prstDash val="solid"/>
             <a:round/>
-            <a:headEnd len="sm" w="sm" type="none"/>
-            <a:tailEnd len="sm" w="sm" type="none"/>
+            <a:headEnd type="none" w="sm" len="sm"/>
+            <a:tailEnd type="none" w="sm" len="sm"/>
           </a:ln>
         </p:spPr>
       </p:sp>
       <p:sp>
         <p:nvSpPr>
           <p:cNvPr id="72" name="Google Shape;72;g2f244e6b6fe_0_4:notes"/>
-          <p:cNvSpPr txBox="1"/>
+          <p:cNvSpPr txBox="1">
+            <a:spLocks noGrp="1"/>
+          </p:cNvSpPr>
           <p:nvPr>
-            <p:ph idx="1" type="body"/>
+            <p:ph type="body" idx="1"/>
           </p:nvPr>
         </p:nvSpPr>
         <p:spPr>
@@ -1278,12 +1316,12 @@
           </a:ln>
         </p:spPr>
         <p:txBody>
-          <a:bodyPr anchorCtr="0" anchor="t" bIns="91425" lIns="91425" spcFirstLastPara="1" rIns="91425" wrap="square" tIns="91425">
+          <a:bodyPr spcFirstLastPara="1" wrap="square" lIns="91425" tIns="91425" rIns="91425" bIns="91425" anchor="t" anchorCtr="0">
             <a:noAutofit/>
           </a:bodyPr>
           <a:lstStyle/>
           <a:p>
-            <a:pPr indent="0" lvl="0" marL="0" rtl="0" algn="l">
+            <a:pPr marL="0" lvl="0" indent="0" algn="l" rtl="0">
               <a:lnSpc>
                 <a:spcPct val="100000"/>
               </a:lnSpc>
@@ -1296,9 +1334,6 @@
               <a:buSzPts val="1100"/>
               <a:buNone/>
             </a:pPr>
-            <a:r>
-              <a:t/>
-            </a:r>
             <a:endParaRPr/>
           </a:p>
         </p:txBody>
@@ -1312,11 +1347,11 @@
 </file>
 
 <file path=ppt/slideLayouts/slideLayout1.xml><?xml version="1.0" encoding="utf-8"?>
-<p:sldLayout xmlns:a="http://schemas.openxmlformats.org/drawingml/2006/main" xmlns:r="http://schemas.openxmlformats.org/officeDocument/2006/relationships" xmlns:mc="http://schemas.openxmlformats.org/markup-compatibility/2006" xmlns:mv="urn:schemas-microsoft-com:mac:vml" xmlns:p="http://schemas.openxmlformats.org/presentationml/2006/main" xmlns:c="http://schemas.openxmlformats.org/drawingml/2006/chart" xmlns:dgm="http://schemas.openxmlformats.org/drawingml/2006/diagram" xmlns:o="urn:schemas-microsoft-com:office:office" xmlns:v="urn:schemas-microsoft-com:vml" xmlns:pvml="urn:schemas-microsoft-com:office:powerpoint" xmlns:com="http://schemas.openxmlformats.org/drawingml/2006/compatibility" xmlns:p14="http://schemas.microsoft.com/office/powerpoint/2010/main" xmlns:p15="http://schemas.microsoft.com/office/powerpoint/2012/main" xmlns:ahyp="http://schemas.microsoft.com/office/drawing/2018/hyperlinkcolor" matchingName="Title slide" type="title">
+<p:sldLayout xmlns:a="http://schemas.openxmlformats.org/drawingml/2006/main" xmlns:r="http://schemas.openxmlformats.org/officeDocument/2006/relationships" xmlns:p="http://schemas.openxmlformats.org/presentationml/2006/main" matchingName="Title slide" type="title">
   <p:cSld name="TITLE">
     <p:spTree>
       <p:nvGrpSpPr>
-        <p:cNvPr id="9" name="Shape 9"/>
+        <p:cNvPr id="1" name="Shape 9"/>
         <p:cNvGrpSpPr/>
         <p:nvPr/>
       </p:nvGrpSpPr>
@@ -1331,7 +1366,9 @@
       <p:sp>
         <p:nvSpPr>
           <p:cNvPr id="10" name="Google Shape;10;p2"/>
-          <p:cNvSpPr txBox="1"/>
+          <p:cNvSpPr txBox="1">
+            <a:spLocks noGrp="1"/>
+          </p:cNvSpPr>
           <p:nvPr>
             <p:ph type="ctrTitle"/>
           </p:nvPr>
@@ -1350,7 +1387,7 @@
           </a:ln>
         </p:spPr>
         <p:txBody>
-          <a:bodyPr anchorCtr="0" anchor="b" bIns="176925" lIns="176925" spcFirstLastPara="1" rIns="176925" wrap="square" tIns="176925">
+          <a:bodyPr spcFirstLastPara="1" wrap="square" lIns="176925" tIns="176925" rIns="176925" bIns="176925" anchor="b" anchorCtr="0">
             <a:normAutofit/>
           </a:bodyPr>
           <a:lstStyle>
@@ -1481,15 +1518,19 @@
               <a:defRPr sz="10100"/>
             </a:lvl9pPr>
           </a:lstStyle>
-          <a:p/>
+          <a:p>
+            <a:endParaRPr/>
+          </a:p>
         </p:txBody>
       </p:sp>
       <p:sp>
         <p:nvSpPr>
           <p:cNvPr id="11" name="Google Shape;11;p2"/>
-          <p:cNvSpPr txBox="1"/>
+          <p:cNvSpPr txBox="1">
+            <a:spLocks noGrp="1"/>
+          </p:cNvSpPr>
           <p:nvPr>
-            <p:ph idx="1" type="subTitle"/>
+            <p:ph type="subTitle" idx="1"/>
           </p:nvPr>
         </p:nvSpPr>
         <p:spPr>
@@ -1506,7 +1547,7 @@
           </a:ln>
         </p:spPr>
         <p:txBody>
-          <a:bodyPr anchorCtr="0" anchor="t" bIns="176925" lIns="176925" spcFirstLastPara="1" rIns="176925" wrap="square" tIns="176925">
+          <a:bodyPr spcFirstLastPara="1" wrap="square" lIns="176925" tIns="176925" rIns="176925" bIns="176925" anchor="t" anchorCtr="0">
             <a:normAutofit/>
           </a:bodyPr>
           <a:lstStyle>
@@ -1637,15 +1678,19 @@
               <a:defRPr sz="5400"/>
             </a:lvl9pPr>
           </a:lstStyle>
-          <a:p/>
+          <a:p>
+            <a:endParaRPr/>
+          </a:p>
         </p:txBody>
       </p:sp>
       <p:sp>
         <p:nvSpPr>
           <p:cNvPr id="12" name="Google Shape;12;p2"/>
-          <p:cNvSpPr txBox="1"/>
+          <p:cNvSpPr txBox="1">
+            <a:spLocks noGrp="1"/>
+          </p:cNvSpPr>
           <p:nvPr>
-            <p:ph idx="12" type="sldNum"/>
+            <p:ph type="sldNum" idx="12"/>
           </p:nvPr>
         </p:nvSpPr>
         <p:spPr>
@@ -1662,27 +1707,27 @@
           </a:ln>
         </p:spPr>
         <p:txBody>
-          <a:bodyPr anchorCtr="0" anchor="ctr" bIns="176925" lIns="176925" spcFirstLastPara="1" rIns="176925" wrap="square" tIns="176925">
+          <a:bodyPr spcFirstLastPara="1" wrap="square" lIns="176925" tIns="176925" rIns="176925" bIns="176925" anchor="ctr" anchorCtr="0">
             <a:normAutofit/>
           </a:bodyPr>
           <a:lstStyle>
-            <a:lvl1pPr indent="0" lvl="0" marL="0" marR="0" algn="r">
-              <a:lnSpc>
-                <a:spcPct val="100000"/>
-              </a:lnSpc>
-              <a:spcBef>
-                <a:spcPts val="0"/>
-              </a:spcBef>
-              <a:spcAft>
-                <a:spcPts val="0"/>
-              </a:spcAft>
-              <a:buClr>
-                <a:srgbClr val="000000"/>
-              </a:buClr>
-              <a:buSzPts val="1900"/>
-              <a:buFont typeface="Arial"/>
-              <a:buNone/>
-              <a:defRPr b="0" i="0" sz="1900" u="none" cap="none" strike="noStrike">
+            <a:lvl1pPr marL="0" marR="0" lvl="0" indent="0" algn="r">
+              <a:lnSpc>
+                <a:spcPct val="100000"/>
+              </a:lnSpc>
+              <a:spcBef>
+                <a:spcPts val="0"/>
+              </a:spcBef>
+              <a:spcAft>
+                <a:spcPts val="0"/>
+              </a:spcAft>
+              <a:buClr>
+                <a:srgbClr val="000000"/>
+              </a:buClr>
+              <a:buSzPts val="1900"/>
+              <a:buFont typeface="Arial"/>
+              <a:buNone/>
+              <a:defRPr sz="1900" b="0" i="0" u="none" strike="noStrike" cap="none">
                 <a:solidFill>
                   <a:schemeClr val="dk2"/>
                 </a:solidFill>
@@ -1692,23 +1737,23 @@
                 <a:sym typeface="Arial"/>
               </a:defRPr>
             </a:lvl1pPr>
-            <a:lvl2pPr indent="0" lvl="1" marL="0" marR="0" algn="r">
-              <a:lnSpc>
-                <a:spcPct val="100000"/>
-              </a:lnSpc>
-              <a:spcBef>
-                <a:spcPts val="0"/>
-              </a:spcBef>
-              <a:spcAft>
-                <a:spcPts val="0"/>
-              </a:spcAft>
-              <a:buClr>
-                <a:srgbClr val="000000"/>
-              </a:buClr>
-              <a:buSzPts val="1900"/>
-              <a:buFont typeface="Arial"/>
-              <a:buNone/>
-              <a:defRPr b="0" i="0" sz="1900" u="none" cap="none" strike="noStrike">
+            <a:lvl2pPr marL="0" marR="0" lvl="1" indent="0" algn="r">
+              <a:lnSpc>
+                <a:spcPct val="100000"/>
+              </a:lnSpc>
+              <a:spcBef>
+                <a:spcPts val="0"/>
+              </a:spcBef>
+              <a:spcAft>
+                <a:spcPts val="0"/>
+              </a:spcAft>
+              <a:buClr>
+                <a:srgbClr val="000000"/>
+              </a:buClr>
+              <a:buSzPts val="1900"/>
+              <a:buFont typeface="Arial"/>
+              <a:buNone/>
+              <a:defRPr sz="1900" b="0" i="0" u="none" strike="noStrike" cap="none">
                 <a:solidFill>
                   <a:schemeClr val="dk2"/>
                 </a:solidFill>
@@ -1718,23 +1763,23 @@
                 <a:sym typeface="Arial"/>
               </a:defRPr>
             </a:lvl2pPr>
-            <a:lvl3pPr indent="0" lvl="2" marL="0" marR="0" algn="r">
-              <a:lnSpc>
-                <a:spcPct val="100000"/>
-              </a:lnSpc>
-              <a:spcBef>
-                <a:spcPts val="0"/>
-              </a:spcBef>
-              <a:spcAft>
-                <a:spcPts val="0"/>
-              </a:spcAft>
-              <a:buClr>
-                <a:srgbClr val="000000"/>
-              </a:buClr>
-              <a:buSzPts val="1900"/>
-              <a:buFont typeface="Arial"/>
-              <a:buNone/>
-              <a:defRPr b="0" i="0" sz="1900" u="none" cap="none" strike="noStrike">
+            <a:lvl3pPr marL="0" marR="0" lvl="2" indent="0" algn="r">
+              <a:lnSpc>
+                <a:spcPct val="100000"/>
+              </a:lnSpc>
+              <a:spcBef>
+                <a:spcPts val="0"/>
+              </a:spcBef>
+              <a:spcAft>
+                <a:spcPts val="0"/>
+              </a:spcAft>
+              <a:buClr>
+                <a:srgbClr val="000000"/>
+              </a:buClr>
+              <a:buSzPts val="1900"/>
+              <a:buFont typeface="Arial"/>
+              <a:buNone/>
+              <a:defRPr sz="1900" b="0" i="0" u="none" strike="noStrike" cap="none">
                 <a:solidFill>
                   <a:schemeClr val="dk2"/>
                 </a:solidFill>
@@ -1744,23 +1789,23 @@
                 <a:sym typeface="Arial"/>
               </a:defRPr>
             </a:lvl3pPr>
-            <a:lvl4pPr indent="0" lvl="3" marL="0" marR="0" algn="r">
-              <a:lnSpc>
-                <a:spcPct val="100000"/>
-              </a:lnSpc>
-              <a:spcBef>
-                <a:spcPts val="0"/>
-              </a:spcBef>
-              <a:spcAft>
-                <a:spcPts val="0"/>
-              </a:spcAft>
-              <a:buClr>
-                <a:srgbClr val="000000"/>
-              </a:buClr>
-              <a:buSzPts val="1900"/>
-              <a:buFont typeface="Arial"/>
-              <a:buNone/>
-              <a:defRPr b="0" i="0" sz="1900" u="none" cap="none" strike="noStrike">
+            <a:lvl4pPr marL="0" marR="0" lvl="3" indent="0" algn="r">
+              <a:lnSpc>
+                <a:spcPct val="100000"/>
+              </a:lnSpc>
+              <a:spcBef>
+                <a:spcPts val="0"/>
+              </a:spcBef>
+              <a:spcAft>
+                <a:spcPts val="0"/>
+              </a:spcAft>
+              <a:buClr>
+                <a:srgbClr val="000000"/>
+              </a:buClr>
+              <a:buSzPts val="1900"/>
+              <a:buFont typeface="Arial"/>
+              <a:buNone/>
+              <a:defRPr sz="1900" b="0" i="0" u="none" strike="noStrike" cap="none">
                 <a:solidFill>
                   <a:schemeClr val="dk2"/>
                 </a:solidFill>
@@ -1770,23 +1815,23 @@
                 <a:sym typeface="Arial"/>
               </a:defRPr>
             </a:lvl4pPr>
-            <a:lvl5pPr indent="0" lvl="4" marL="0" marR="0" algn="r">
-              <a:lnSpc>
-                <a:spcPct val="100000"/>
-              </a:lnSpc>
-              <a:spcBef>
-                <a:spcPts val="0"/>
-              </a:spcBef>
-              <a:spcAft>
-                <a:spcPts val="0"/>
-              </a:spcAft>
-              <a:buClr>
-                <a:srgbClr val="000000"/>
-              </a:buClr>
-              <a:buSzPts val="1900"/>
-              <a:buFont typeface="Arial"/>
-              <a:buNone/>
-              <a:defRPr b="0" i="0" sz="1900" u="none" cap="none" strike="noStrike">
+            <a:lvl5pPr marL="0" marR="0" lvl="4" indent="0" algn="r">
+              <a:lnSpc>
+                <a:spcPct val="100000"/>
+              </a:lnSpc>
+              <a:spcBef>
+                <a:spcPts val="0"/>
+              </a:spcBef>
+              <a:spcAft>
+                <a:spcPts val="0"/>
+              </a:spcAft>
+              <a:buClr>
+                <a:srgbClr val="000000"/>
+              </a:buClr>
+              <a:buSzPts val="1900"/>
+              <a:buFont typeface="Arial"/>
+              <a:buNone/>
+              <a:defRPr sz="1900" b="0" i="0" u="none" strike="noStrike" cap="none">
                 <a:solidFill>
                   <a:schemeClr val="dk2"/>
                 </a:solidFill>
@@ -1796,23 +1841,23 @@
                 <a:sym typeface="Arial"/>
               </a:defRPr>
             </a:lvl5pPr>
-            <a:lvl6pPr indent="0" lvl="5" marL="0" marR="0" algn="r">
-              <a:lnSpc>
-                <a:spcPct val="100000"/>
-              </a:lnSpc>
-              <a:spcBef>
-                <a:spcPts val="0"/>
-              </a:spcBef>
-              <a:spcAft>
-                <a:spcPts val="0"/>
-              </a:spcAft>
-              <a:buClr>
-                <a:srgbClr val="000000"/>
-              </a:buClr>
-              <a:buSzPts val="1900"/>
-              <a:buFont typeface="Arial"/>
-              <a:buNone/>
-              <a:defRPr b="0" i="0" sz="1900" u="none" cap="none" strike="noStrike">
+            <a:lvl6pPr marL="0" marR="0" lvl="5" indent="0" algn="r">
+              <a:lnSpc>
+                <a:spcPct val="100000"/>
+              </a:lnSpc>
+              <a:spcBef>
+                <a:spcPts val="0"/>
+              </a:spcBef>
+              <a:spcAft>
+                <a:spcPts val="0"/>
+              </a:spcAft>
+              <a:buClr>
+                <a:srgbClr val="000000"/>
+              </a:buClr>
+              <a:buSzPts val="1900"/>
+              <a:buFont typeface="Arial"/>
+              <a:buNone/>
+              <a:defRPr sz="1900" b="0" i="0" u="none" strike="noStrike" cap="none">
                 <a:solidFill>
                   <a:schemeClr val="dk2"/>
                 </a:solidFill>
@@ -1822,23 +1867,23 @@
                 <a:sym typeface="Arial"/>
               </a:defRPr>
             </a:lvl6pPr>
-            <a:lvl7pPr indent="0" lvl="6" marL="0" marR="0" algn="r">
-              <a:lnSpc>
-                <a:spcPct val="100000"/>
-              </a:lnSpc>
-              <a:spcBef>
-                <a:spcPts val="0"/>
-              </a:spcBef>
-              <a:spcAft>
-                <a:spcPts val="0"/>
-              </a:spcAft>
-              <a:buClr>
-                <a:srgbClr val="000000"/>
-              </a:buClr>
-              <a:buSzPts val="1900"/>
-              <a:buFont typeface="Arial"/>
-              <a:buNone/>
-              <a:defRPr b="0" i="0" sz="1900" u="none" cap="none" strike="noStrike">
+            <a:lvl7pPr marL="0" marR="0" lvl="6" indent="0" algn="r">
+              <a:lnSpc>
+                <a:spcPct val="100000"/>
+              </a:lnSpc>
+              <a:spcBef>
+                <a:spcPts val="0"/>
+              </a:spcBef>
+              <a:spcAft>
+                <a:spcPts val="0"/>
+              </a:spcAft>
+              <a:buClr>
+                <a:srgbClr val="000000"/>
+              </a:buClr>
+              <a:buSzPts val="1900"/>
+              <a:buFont typeface="Arial"/>
+              <a:buNone/>
+              <a:defRPr sz="1900" b="0" i="0" u="none" strike="noStrike" cap="none">
                 <a:solidFill>
                   <a:schemeClr val="dk2"/>
                 </a:solidFill>
@@ -1848,23 +1893,23 @@
                 <a:sym typeface="Arial"/>
               </a:defRPr>
             </a:lvl7pPr>
-            <a:lvl8pPr indent="0" lvl="7" marL="0" marR="0" algn="r">
-              <a:lnSpc>
-                <a:spcPct val="100000"/>
-              </a:lnSpc>
-              <a:spcBef>
-                <a:spcPts val="0"/>
-              </a:spcBef>
-              <a:spcAft>
-                <a:spcPts val="0"/>
-              </a:spcAft>
-              <a:buClr>
-                <a:srgbClr val="000000"/>
-              </a:buClr>
-              <a:buSzPts val="1900"/>
-              <a:buFont typeface="Arial"/>
-              <a:buNone/>
-              <a:defRPr b="0" i="0" sz="1900" u="none" cap="none" strike="noStrike">
+            <a:lvl8pPr marL="0" marR="0" lvl="7" indent="0" algn="r">
+              <a:lnSpc>
+                <a:spcPct val="100000"/>
+              </a:lnSpc>
+              <a:spcBef>
+                <a:spcPts val="0"/>
+              </a:spcBef>
+              <a:spcAft>
+                <a:spcPts val="0"/>
+              </a:spcAft>
+              <a:buClr>
+                <a:srgbClr val="000000"/>
+              </a:buClr>
+              <a:buSzPts val="1900"/>
+              <a:buFont typeface="Arial"/>
+              <a:buNone/>
+              <a:defRPr sz="1900" b="0" i="0" u="none" strike="noStrike" cap="none">
                 <a:solidFill>
                   <a:schemeClr val="dk2"/>
                 </a:solidFill>
@@ -1874,23 +1919,23 @@
                 <a:sym typeface="Arial"/>
               </a:defRPr>
             </a:lvl8pPr>
-            <a:lvl9pPr indent="0" lvl="8" marL="0" marR="0" algn="r">
-              <a:lnSpc>
-                <a:spcPct val="100000"/>
-              </a:lnSpc>
-              <a:spcBef>
-                <a:spcPts val="0"/>
-              </a:spcBef>
-              <a:spcAft>
-                <a:spcPts val="0"/>
-              </a:spcAft>
-              <a:buClr>
-                <a:srgbClr val="000000"/>
-              </a:buClr>
-              <a:buSzPts val="1900"/>
-              <a:buFont typeface="Arial"/>
-              <a:buNone/>
-              <a:defRPr b="0" i="0" sz="1900" u="none" cap="none" strike="noStrike">
+            <a:lvl9pPr marL="0" marR="0" lvl="8" indent="0" algn="r">
+              <a:lnSpc>
+                <a:spcPct val="100000"/>
+              </a:lnSpc>
+              <a:spcBef>
+                <a:spcPts val="0"/>
+              </a:spcBef>
+              <a:spcAft>
+                <a:spcPts val="0"/>
+              </a:spcAft>
+              <a:buClr>
+                <a:srgbClr val="000000"/>
+              </a:buClr>
+              <a:buSzPts val="1900"/>
+              <a:buFont typeface="Arial"/>
+              <a:buNone/>
+              <a:defRPr sz="1900" b="0" i="0" u="none" strike="noStrike" cap="none">
                 <a:solidFill>
                   <a:schemeClr val="dk2"/>
                 </a:solidFill>
@@ -1902,7 +1947,7 @@
             </a:lvl9pPr>
           </a:lstStyle>
           <a:p>
-            <a:pPr indent="0" lvl="0" marL="0" rtl="0" algn="r">
+            <a:pPr marL="0" lvl="0" indent="0" algn="r" rtl="0">
               <a:spcBef>
                 <a:spcPts val="0"/>
               </a:spcBef>
@@ -1928,11 +1973,11 @@
 </file>
 
 <file path=ppt/slideLayouts/slideLayout10.xml><?xml version="1.0" encoding="utf-8"?>
-<p:sldLayout xmlns:a="http://schemas.openxmlformats.org/drawingml/2006/main" xmlns:r="http://schemas.openxmlformats.org/officeDocument/2006/relationships" xmlns:mc="http://schemas.openxmlformats.org/markup-compatibility/2006" xmlns:mv="urn:schemas-microsoft-com:mac:vml" xmlns:p="http://schemas.openxmlformats.org/presentationml/2006/main" xmlns:c="http://schemas.openxmlformats.org/drawingml/2006/chart" xmlns:dgm="http://schemas.openxmlformats.org/drawingml/2006/diagram" xmlns:o="urn:schemas-microsoft-com:office:office" xmlns:v="urn:schemas-microsoft-com:vml" xmlns:pvml="urn:schemas-microsoft-com:office:powerpoint" xmlns:com="http://schemas.openxmlformats.org/drawingml/2006/compatibility" xmlns:p14="http://schemas.microsoft.com/office/powerpoint/2010/main" xmlns:p15="http://schemas.microsoft.com/office/powerpoint/2012/main" xmlns:ahyp="http://schemas.microsoft.com/office/drawing/2018/hyperlinkcolor" matchingName="Big number">
+<p:sldLayout xmlns:a="http://schemas.openxmlformats.org/drawingml/2006/main" xmlns:r="http://schemas.openxmlformats.org/officeDocument/2006/relationships" xmlns:p="http://schemas.openxmlformats.org/presentationml/2006/main" matchingName="Big number">
   <p:cSld name="BIG_NUMBER">
     <p:spTree>
       <p:nvGrpSpPr>
-        <p:cNvPr id="44" name="Shape 44"/>
+        <p:cNvPr id="1" name="Shape 44"/>
         <p:cNvGrpSpPr/>
         <p:nvPr/>
       </p:nvGrpSpPr>
@@ -1947,9 +1992,11 @@
       <p:sp>
         <p:nvSpPr>
           <p:cNvPr id="45" name="Google Shape;45;p11"/>
-          <p:cNvSpPr txBox="1"/>
+          <p:cNvSpPr txBox="1">
+            <a:spLocks noGrp="1"/>
+          </p:cNvSpPr>
           <p:nvPr>
-            <p:ph hasCustomPrompt="1" type="title"/>
+            <p:ph type="title" hasCustomPrompt="1"/>
           </p:nvPr>
         </p:nvSpPr>
         <p:spPr>
@@ -1966,7 +2013,7 @@
           </a:ln>
         </p:spPr>
         <p:txBody>
-          <a:bodyPr anchorCtr="0" anchor="b" bIns="176925" lIns="176925" spcFirstLastPara="1" rIns="176925" wrap="square" tIns="176925">
+          <a:bodyPr spcFirstLastPara="1" wrap="square" lIns="176925" tIns="176925" rIns="176925" bIns="176925" anchor="b" anchorCtr="0">
             <a:normAutofit/>
           </a:bodyPr>
           <a:lstStyle>
@@ -2107,9 +2154,11 @@
       <p:sp>
         <p:nvSpPr>
           <p:cNvPr id="46" name="Google Shape;46;p11"/>
-          <p:cNvSpPr txBox="1"/>
+          <p:cNvSpPr txBox="1">
+            <a:spLocks noGrp="1"/>
+          </p:cNvSpPr>
           <p:nvPr>
-            <p:ph idx="1" type="body"/>
+            <p:ph type="body" idx="1"/>
           </p:nvPr>
         </p:nvSpPr>
         <p:spPr>
@@ -2126,11 +2175,11 @@
           </a:ln>
         </p:spPr>
         <p:txBody>
-          <a:bodyPr anchorCtr="0" anchor="t" bIns="176925" lIns="176925" spcFirstLastPara="1" rIns="176925" wrap="square" tIns="176925">
+          <a:bodyPr spcFirstLastPara="1" wrap="square" lIns="176925" tIns="176925" rIns="176925" bIns="176925" anchor="t" anchorCtr="0">
             <a:normAutofit/>
           </a:bodyPr>
           <a:lstStyle>
-            <a:lvl1pPr indent="-450850" lvl="0" marL="457200" algn="ctr">
+            <a:lvl1pPr marL="457200" lvl="0" indent="-450850" algn="ctr">
               <a:lnSpc>
                 <a:spcPct val="115000"/>
               </a:lnSpc>
@@ -2144,7 +2193,7 @@
               <a:buChar char="●"/>
               <a:defRPr/>
             </a:lvl1pPr>
-            <a:lvl2pPr indent="-400050" lvl="1" marL="914400" algn="ctr">
+            <a:lvl2pPr marL="914400" lvl="1" indent="-400050" algn="ctr">
               <a:lnSpc>
                 <a:spcPct val="115000"/>
               </a:lnSpc>
@@ -2158,7 +2207,7 @@
               <a:buChar char="○"/>
               <a:defRPr/>
             </a:lvl2pPr>
-            <a:lvl3pPr indent="-400050" lvl="2" marL="1371600" algn="ctr">
+            <a:lvl3pPr marL="1371600" lvl="2" indent="-400050" algn="ctr">
               <a:lnSpc>
                 <a:spcPct val="115000"/>
               </a:lnSpc>
@@ -2172,7 +2221,7 @@
               <a:buChar char="■"/>
               <a:defRPr/>
             </a:lvl3pPr>
-            <a:lvl4pPr indent="-400050" lvl="3" marL="1828800" algn="ctr">
+            <a:lvl4pPr marL="1828800" lvl="3" indent="-400050" algn="ctr">
               <a:lnSpc>
                 <a:spcPct val="115000"/>
               </a:lnSpc>
@@ -2186,7 +2235,7 @@
               <a:buChar char="●"/>
               <a:defRPr/>
             </a:lvl4pPr>
-            <a:lvl5pPr indent="-400050" lvl="4" marL="2286000" algn="ctr">
+            <a:lvl5pPr marL="2286000" lvl="4" indent="-400050" algn="ctr">
               <a:lnSpc>
                 <a:spcPct val="115000"/>
               </a:lnSpc>
@@ -2200,7 +2249,7 @@
               <a:buChar char="○"/>
               <a:defRPr/>
             </a:lvl5pPr>
-            <a:lvl6pPr indent="-400050" lvl="5" marL="2743200" algn="ctr">
+            <a:lvl6pPr marL="2743200" lvl="5" indent="-400050" algn="ctr">
               <a:lnSpc>
                 <a:spcPct val="115000"/>
               </a:lnSpc>
@@ -2214,7 +2263,7 @@
               <a:buChar char="■"/>
               <a:defRPr/>
             </a:lvl6pPr>
-            <a:lvl7pPr indent="-400050" lvl="6" marL="3200400" algn="ctr">
+            <a:lvl7pPr marL="3200400" lvl="6" indent="-400050" algn="ctr">
               <a:lnSpc>
                 <a:spcPct val="115000"/>
               </a:lnSpc>
@@ -2228,7 +2277,7 @@
               <a:buChar char="●"/>
               <a:defRPr/>
             </a:lvl7pPr>
-            <a:lvl8pPr indent="-400050" lvl="7" marL="3657600" algn="ctr">
+            <a:lvl8pPr marL="3657600" lvl="7" indent="-400050" algn="ctr">
               <a:lnSpc>
                 <a:spcPct val="115000"/>
               </a:lnSpc>
@@ -2242,7 +2291,7 @@
               <a:buChar char="○"/>
               <a:defRPr/>
             </a:lvl8pPr>
-            <a:lvl9pPr indent="-400050" lvl="8" marL="4114800" algn="ctr">
+            <a:lvl9pPr marL="4114800" lvl="8" indent="-400050" algn="ctr">
               <a:lnSpc>
                 <a:spcPct val="115000"/>
               </a:lnSpc>
@@ -2257,15 +2306,19 @@
               <a:defRPr/>
             </a:lvl9pPr>
           </a:lstStyle>
-          <a:p/>
+          <a:p>
+            <a:endParaRPr/>
+          </a:p>
         </p:txBody>
       </p:sp>
       <p:sp>
         <p:nvSpPr>
           <p:cNvPr id="47" name="Google Shape;47;p11"/>
-          <p:cNvSpPr txBox="1"/>
+          <p:cNvSpPr txBox="1">
+            <a:spLocks noGrp="1"/>
+          </p:cNvSpPr>
           <p:nvPr>
-            <p:ph idx="12" type="sldNum"/>
+            <p:ph type="sldNum" idx="12"/>
           </p:nvPr>
         </p:nvSpPr>
         <p:spPr>
@@ -2282,27 +2335,27 @@
           </a:ln>
         </p:spPr>
         <p:txBody>
-          <a:bodyPr anchorCtr="0" anchor="ctr" bIns="176925" lIns="176925" spcFirstLastPara="1" rIns="176925" wrap="square" tIns="176925">
+          <a:bodyPr spcFirstLastPara="1" wrap="square" lIns="176925" tIns="176925" rIns="176925" bIns="176925" anchor="ctr" anchorCtr="0">
             <a:normAutofit/>
           </a:bodyPr>
           <a:lstStyle>
-            <a:lvl1pPr indent="0" lvl="0" marL="0" marR="0" algn="r">
-              <a:lnSpc>
-                <a:spcPct val="100000"/>
-              </a:lnSpc>
-              <a:spcBef>
-                <a:spcPts val="0"/>
-              </a:spcBef>
-              <a:spcAft>
-                <a:spcPts val="0"/>
-              </a:spcAft>
-              <a:buClr>
-                <a:srgbClr val="000000"/>
-              </a:buClr>
-              <a:buSzPts val="1900"/>
-              <a:buFont typeface="Arial"/>
-              <a:buNone/>
-              <a:defRPr b="0" i="0" sz="1900" u="none" cap="none" strike="noStrike">
+            <a:lvl1pPr marL="0" marR="0" lvl="0" indent="0" algn="r">
+              <a:lnSpc>
+                <a:spcPct val="100000"/>
+              </a:lnSpc>
+              <a:spcBef>
+                <a:spcPts val="0"/>
+              </a:spcBef>
+              <a:spcAft>
+                <a:spcPts val="0"/>
+              </a:spcAft>
+              <a:buClr>
+                <a:srgbClr val="000000"/>
+              </a:buClr>
+              <a:buSzPts val="1900"/>
+              <a:buFont typeface="Arial"/>
+              <a:buNone/>
+              <a:defRPr sz="1900" b="0" i="0" u="none" strike="noStrike" cap="none">
                 <a:solidFill>
                   <a:schemeClr val="dk2"/>
                 </a:solidFill>
@@ -2312,23 +2365,23 @@
                 <a:sym typeface="Arial"/>
               </a:defRPr>
             </a:lvl1pPr>
-            <a:lvl2pPr indent="0" lvl="1" marL="0" marR="0" algn="r">
-              <a:lnSpc>
-                <a:spcPct val="100000"/>
-              </a:lnSpc>
-              <a:spcBef>
-                <a:spcPts val="0"/>
-              </a:spcBef>
-              <a:spcAft>
-                <a:spcPts val="0"/>
-              </a:spcAft>
-              <a:buClr>
-                <a:srgbClr val="000000"/>
-              </a:buClr>
-              <a:buSzPts val="1900"/>
-              <a:buFont typeface="Arial"/>
-              <a:buNone/>
-              <a:defRPr b="0" i="0" sz="1900" u="none" cap="none" strike="noStrike">
+            <a:lvl2pPr marL="0" marR="0" lvl="1" indent="0" algn="r">
+              <a:lnSpc>
+                <a:spcPct val="100000"/>
+              </a:lnSpc>
+              <a:spcBef>
+                <a:spcPts val="0"/>
+              </a:spcBef>
+              <a:spcAft>
+                <a:spcPts val="0"/>
+              </a:spcAft>
+              <a:buClr>
+                <a:srgbClr val="000000"/>
+              </a:buClr>
+              <a:buSzPts val="1900"/>
+              <a:buFont typeface="Arial"/>
+              <a:buNone/>
+              <a:defRPr sz="1900" b="0" i="0" u="none" strike="noStrike" cap="none">
                 <a:solidFill>
                   <a:schemeClr val="dk2"/>
                 </a:solidFill>
@@ -2338,23 +2391,23 @@
                 <a:sym typeface="Arial"/>
               </a:defRPr>
             </a:lvl2pPr>
-            <a:lvl3pPr indent="0" lvl="2" marL="0" marR="0" algn="r">
-              <a:lnSpc>
-                <a:spcPct val="100000"/>
-              </a:lnSpc>
-              <a:spcBef>
-                <a:spcPts val="0"/>
-              </a:spcBef>
-              <a:spcAft>
-                <a:spcPts val="0"/>
-              </a:spcAft>
-              <a:buClr>
-                <a:srgbClr val="000000"/>
-              </a:buClr>
-              <a:buSzPts val="1900"/>
-              <a:buFont typeface="Arial"/>
-              <a:buNone/>
-              <a:defRPr b="0" i="0" sz="1900" u="none" cap="none" strike="noStrike">
+            <a:lvl3pPr marL="0" marR="0" lvl="2" indent="0" algn="r">
+              <a:lnSpc>
+                <a:spcPct val="100000"/>
+              </a:lnSpc>
+              <a:spcBef>
+                <a:spcPts val="0"/>
+              </a:spcBef>
+              <a:spcAft>
+                <a:spcPts val="0"/>
+              </a:spcAft>
+              <a:buClr>
+                <a:srgbClr val="000000"/>
+              </a:buClr>
+              <a:buSzPts val="1900"/>
+              <a:buFont typeface="Arial"/>
+              <a:buNone/>
+              <a:defRPr sz="1900" b="0" i="0" u="none" strike="noStrike" cap="none">
                 <a:solidFill>
                   <a:schemeClr val="dk2"/>
                 </a:solidFill>
@@ -2364,23 +2417,23 @@
                 <a:sym typeface="Arial"/>
               </a:defRPr>
             </a:lvl3pPr>
-            <a:lvl4pPr indent="0" lvl="3" marL="0" marR="0" algn="r">
-              <a:lnSpc>
-                <a:spcPct val="100000"/>
-              </a:lnSpc>
-              <a:spcBef>
-                <a:spcPts val="0"/>
-              </a:spcBef>
-              <a:spcAft>
-                <a:spcPts val="0"/>
-              </a:spcAft>
-              <a:buClr>
-                <a:srgbClr val="000000"/>
-              </a:buClr>
-              <a:buSzPts val="1900"/>
-              <a:buFont typeface="Arial"/>
-              <a:buNone/>
-              <a:defRPr b="0" i="0" sz="1900" u="none" cap="none" strike="noStrike">
+            <a:lvl4pPr marL="0" marR="0" lvl="3" indent="0" algn="r">
+              <a:lnSpc>
+                <a:spcPct val="100000"/>
+              </a:lnSpc>
+              <a:spcBef>
+                <a:spcPts val="0"/>
+              </a:spcBef>
+              <a:spcAft>
+                <a:spcPts val="0"/>
+              </a:spcAft>
+              <a:buClr>
+                <a:srgbClr val="000000"/>
+              </a:buClr>
+              <a:buSzPts val="1900"/>
+              <a:buFont typeface="Arial"/>
+              <a:buNone/>
+              <a:defRPr sz="1900" b="0" i="0" u="none" strike="noStrike" cap="none">
                 <a:solidFill>
                   <a:schemeClr val="dk2"/>
                 </a:solidFill>
@@ -2390,23 +2443,23 @@
                 <a:sym typeface="Arial"/>
               </a:defRPr>
             </a:lvl4pPr>
-            <a:lvl5pPr indent="0" lvl="4" marL="0" marR="0" algn="r">
-              <a:lnSpc>
-                <a:spcPct val="100000"/>
-              </a:lnSpc>
-              <a:spcBef>
-                <a:spcPts val="0"/>
-              </a:spcBef>
-              <a:spcAft>
-                <a:spcPts val="0"/>
-              </a:spcAft>
-              <a:buClr>
-                <a:srgbClr val="000000"/>
-              </a:buClr>
-              <a:buSzPts val="1900"/>
-              <a:buFont typeface="Arial"/>
-              <a:buNone/>
-              <a:defRPr b="0" i="0" sz="1900" u="none" cap="none" strike="noStrike">
+            <a:lvl5pPr marL="0" marR="0" lvl="4" indent="0" algn="r">
+              <a:lnSpc>
+                <a:spcPct val="100000"/>
+              </a:lnSpc>
+              <a:spcBef>
+                <a:spcPts val="0"/>
+              </a:spcBef>
+              <a:spcAft>
+                <a:spcPts val="0"/>
+              </a:spcAft>
+              <a:buClr>
+                <a:srgbClr val="000000"/>
+              </a:buClr>
+              <a:buSzPts val="1900"/>
+              <a:buFont typeface="Arial"/>
+              <a:buNone/>
+              <a:defRPr sz="1900" b="0" i="0" u="none" strike="noStrike" cap="none">
                 <a:solidFill>
                   <a:schemeClr val="dk2"/>
                 </a:solidFill>
@@ -2416,23 +2469,23 @@
                 <a:sym typeface="Arial"/>
               </a:defRPr>
             </a:lvl5pPr>
-            <a:lvl6pPr indent="0" lvl="5" marL="0" marR="0" algn="r">
-              <a:lnSpc>
-                <a:spcPct val="100000"/>
-              </a:lnSpc>
-              <a:spcBef>
-                <a:spcPts val="0"/>
-              </a:spcBef>
-              <a:spcAft>
-                <a:spcPts val="0"/>
-              </a:spcAft>
-              <a:buClr>
-                <a:srgbClr val="000000"/>
-              </a:buClr>
-              <a:buSzPts val="1900"/>
-              <a:buFont typeface="Arial"/>
-              <a:buNone/>
-              <a:defRPr b="0" i="0" sz="1900" u="none" cap="none" strike="noStrike">
+            <a:lvl6pPr marL="0" marR="0" lvl="5" indent="0" algn="r">
+              <a:lnSpc>
+                <a:spcPct val="100000"/>
+              </a:lnSpc>
+              <a:spcBef>
+                <a:spcPts val="0"/>
+              </a:spcBef>
+              <a:spcAft>
+                <a:spcPts val="0"/>
+              </a:spcAft>
+              <a:buClr>
+                <a:srgbClr val="000000"/>
+              </a:buClr>
+              <a:buSzPts val="1900"/>
+              <a:buFont typeface="Arial"/>
+              <a:buNone/>
+              <a:defRPr sz="1900" b="0" i="0" u="none" strike="noStrike" cap="none">
                 <a:solidFill>
                   <a:schemeClr val="dk2"/>
                 </a:solidFill>
@@ -2442,23 +2495,23 @@
                 <a:sym typeface="Arial"/>
               </a:defRPr>
             </a:lvl6pPr>
-            <a:lvl7pPr indent="0" lvl="6" marL="0" marR="0" algn="r">
-              <a:lnSpc>
-                <a:spcPct val="100000"/>
-              </a:lnSpc>
-              <a:spcBef>
-                <a:spcPts val="0"/>
-              </a:spcBef>
-              <a:spcAft>
-                <a:spcPts val="0"/>
-              </a:spcAft>
-              <a:buClr>
-                <a:srgbClr val="000000"/>
-              </a:buClr>
-              <a:buSzPts val="1900"/>
-              <a:buFont typeface="Arial"/>
-              <a:buNone/>
-              <a:defRPr b="0" i="0" sz="1900" u="none" cap="none" strike="noStrike">
+            <a:lvl7pPr marL="0" marR="0" lvl="6" indent="0" algn="r">
+              <a:lnSpc>
+                <a:spcPct val="100000"/>
+              </a:lnSpc>
+              <a:spcBef>
+                <a:spcPts val="0"/>
+              </a:spcBef>
+              <a:spcAft>
+                <a:spcPts val="0"/>
+              </a:spcAft>
+              <a:buClr>
+                <a:srgbClr val="000000"/>
+              </a:buClr>
+              <a:buSzPts val="1900"/>
+              <a:buFont typeface="Arial"/>
+              <a:buNone/>
+              <a:defRPr sz="1900" b="0" i="0" u="none" strike="noStrike" cap="none">
                 <a:solidFill>
                   <a:schemeClr val="dk2"/>
                 </a:solidFill>
@@ -2468,23 +2521,23 @@
                 <a:sym typeface="Arial"/>
               </a:defRPr>
             </a:lvl7pPr>
-            <a:lvl8pPr indent="0" lvl="7" marL="0" marR="0" algn="r">
-              <a:lnSpc>
-                <a:spcPct val="100000"/>
-              </a:lnSpc>
-              <a:spcBef>
-                <a:spcPts val="0"/>
-              </a:spcBef>
-              <a:spcAft>
-                <a:spcPts val="0"/>
-              </a:spcAft>
-              <a:buClr>
-                <a:srgbClr val="000000"/>
-              </a:buClr>
-              <a:buSzPts val="1900"/>
-              <a:buFont typeface="Arial"/>
-              <a:buNone/>
-              <a:defRPr b="0" i="0" sz="1900" u="none" cap="none" strike="noStrike">
+            <a:lvl8pPr marL="0" marR="0" lvl="7" indent="0" algn="r">
+              <a:lnSpc>
+                <a:spcPct val="100000"/>
+              </a:lnSpc>
+              <a:spcBef>
+                <a:spcPts val="0"/>
+              </a:spcBef>
+              <a:spcAft>
+                <a:spcPts val="0"/>
+              </a:spcAft>
+              <a:buClr>
+                <a:srgbClr val="000000"/>
+              </a:buClr>
+              <a:buSzPts val="1900"/>
+              <a:buFont typeface="Arial"/>
+              <a:buNone/>
+              <a:defRPr sz="1900" b="0" i="0" u="none" strike="noStrike" cap="none">
                 <a:solidFill>
                   <a:schemeClr val="dk2"/>
                 </a:solidFill>
@@ -2494,23 +2547,23 @@
                 <a:sym typeface="Arial"/>
               </a:defRPr>
             </a:lvl8pPr>
-            <a:lvl9pPr indent="0" lvl="8" marL="0" marR="0" algn="r">
-              <a:lnSpc>
-                <a:spcPct val="100000"/>
-              </a:lnSpc>
-              <a:spcBef>
-                <a:spcPts val="0"/>
-              </a:spcBef>
-              <a:spcAft>
-                <a:spcPts val="0"/>
-              </a:spcAft>
-              <a:buClr>
-                <a:srgbClr val="000000"/>
-              </a:buClr>
-              <a:buSzPts val="1900"/>
-              <a:buFont typeface="Arial"/>
-              <a:buNone/>
-              <a:defRPr b="0" i="0" sz="1900" u="none" cap="none" strike="noStrike">
+            <a:lvl9pPr marL="0" marR="0" lvl="8" indent="0" algn="r">
+              <a:lnSpc>
+                <a:spcPct val="100000"/>
+              </a:lnSpc>
+              <a:spcBef>
+                <a:spcPts val="0"/>
+              </a:spcBef>
+              <a:spcAft>
+                <a:spcPts val="0"/>
+              </a:spcAft>
+              <a:buClr>
+                <a:srgbClr val="000000"/>
+              </a:buClr>
+              <a:buSzPts val="1900"/>
+              <a:buFont typeface="Arial"/>
+              <a:buNone/>
+              <a:defRPr sz="1900" b="0" i="0" u="none" strike="noStrike" cap="none">
                 <a:solidFill>
                   <a:schemeClr val="dk2"/>
                 </a:solidFill>
@@ -2522,7 +2575,7 @@
             </a:lvl9pPr>
           </a:lstStyle>
           <a:p>
-            <a:pPr indent="0" lvl="0" marL="0" rtl="0" algn="r">
+            <a:pPr marL="0" lvl="0" indent="0" algn="r" rtl="0">
               <a:spcBef>
                 <a:spcPts val="0"/>
               </a:spcBef>
@@ -2548,11 +2601,11 @@
 </file>
 
 <file path=ppt/slideLayouts/slideLayout11.xml><?xml version="1.0" encoding="utf-8"?>
-<p:sldLayout xmlns:a="http://schemas.openxmlformats.org/drawingml/2006/main" xmlns:r="http://schemas.openxmlformats.org/officeDocument/2006/relationships" xmlns:mc="http://schemas.openxmlformats.org/markup-compatibility/2006" xmlns:mv="urn:schemas-microsoft-com:mac:vml" xmlns:p="http://schemas.openxmlformats.org/presentationml/2006/main" xmlns:c="http://schemas.openxmlformats.org/drawingml/2006/chart" xmlns:dgm="http://schemas.openxmlformats.org/drawingml/2006/diagram" xmlns:o="urn:schemas-microsoft-com:office:office" xmlns:v="urn:schemas-microsoft-com:vml" xmlns:pvml="urn:schemas-microsoft-com:office:powerpoint" xmlns:com="http://schemas.openxmlformats.org/drawingml/2006/compatibility" xmlns:p14="http://schemas.microsoft.com/office/powerpoint/2010/main" xmlns:p15="http://schemas.microsoft.com/office/powerpoint/2012/main" xmlns:ahyp="http://schemas.microsoft.com/office/drawing/2018/hyperlinkcolor" matchingName="Blank" type="blank">
+<p:sldLayout xmlns:a="http://schemas.openxmlformats.org/drawingml/2006/main" xmlns:r="http://schemas.openxmlformats.org/officeDocument/2006/relationships" xmlns:p="http://schemas.openxmlformats.org/presentationml/2006/main" matchingName="Blank" type="blank">
   <p:cSld name="BLANK">
     <p:spTree>
       <p:nvGrpSpPr>
-        <p:cNvPr id="48" name="Shape 48"/>
+        <p:cNvPr id="1" name="Shape 48"/>
         <p:cNvGrpSpPr/>
         <p:nvPr/>
       </p:nvGrpSpPr>
@@ -2567,9 +2620,11 @@
       <p:sp>
         <p:nvSpPr>
           <p:cNvPr id="49" name="Google Shape;49;p12"/>
-          <p:cNvSpPr txBox="1"/>
+          <p:cNvSpPr txBox="1">
+            <a:spLocks noGrp="1"/>
+          </p:cNvSpPr>
           <p:nvPr>
-            <p:ph idx="12" type="sldNum"/>
+            <p:ph type="sldNum" idx="12"/>
           </p:nvPr>
         </p:nvSpPr>
         <p:spPr>
@@ -2586,27 +2641,27 @@
           </a:ln>
         </p:spPr>
         <p:txBody>
-          <a:bodyPr anchorCtr="0" anchor="ctr" bIns="176925" lIns="176925" spcFirstLastPara="1" rIns="176925" wrap="square" tIns="176925">
+          <a:bodyPr spcFirstLastPara="1" wrap="square" lIns="176925" tIns="176925" rIns="176925" bIns="176925" anchor="ctr" anchorCtr="0">
             <a:normAutofit/>
           </a:bodyPr>
           <a:lstStyle>
-            <a:lvl1pPr indent="0" lvl="0" marL="0" marR="0" algn="r">
-              <a:lnSpc>
-                <a:spcPct val="100000"/>
-              </a:lnSpc>
-              <a:spcBef>
-                <a:spcPts val="0"/>
-              </a:spcBef>
-              <a:spcAft>
-                <a:spcPts val="0"/>
-              </a:spcAft>
-              <a:buClr>
-                <a:srgbClr val="000000"/>
-              </a:buClr>
-              <a:buSzPts val="1900"/>
-              <a:buFont typeface="Arial"/>
-              <a:buNone/>
-              <a:defRPr b="0" i="0" sz="1900" u="none" cap="none" strike="noStrike">
+            <a:lvl1pPr marL="0" marR="0" lvl="0" indent="0" algn="r">
+              <a:lnSpc>
+                <a:spcPct val="100000"/>
+              </a:lnSpc>
+              <a:spcBef>
+                <a:spcPts val="0"/>
+              </a:spcBef>
+              <a:spcAft>
+                <a:spcPts val="0"/>
+              </a:spcAft>
+              <a:buClr>
+                <a:srgbClr val="000000"/>
+              </a:buClr>
+              <a:buSzPts val="1900"/>
+              <a:buFont typeface="Arial"/>
+              <a:buNone/>
+              <a:defRPr sz="1900" b="0" i="0" u="none" strike="noStrike" cap="none">
                 <a:solidFill>
                   <a:schemeClr val="dk2"/>
                 </a:solidFill>
@@ -2616,23 +2671,23 @@
                 <a:sym typeface="Arial"/>
               </a:defRPr>
             </a:lvl1pPr>
-            <a:lvl2pPr indent="0" lvl="1" marL="0" marR="0" algn="r">
-              <a:lnSpc>
-                <a:spcPct val="100000"/>
-              </a:lnSpc>
-              <a:spcBef>
-                <a:spcPts val="0"/>
-              </a:spcBef>
-              <a:spcAft>
-                <a:spcPts val="0"/>
-              </a:spcAft>
-              <a:buClr>
-                <a:srgbClr val="000000"/>
-              </a:buClr>
-              <a:buSzPts val="1900"/>
-              <a:buFont typeface="Arial"/>
-              <a:buNone/>
-              <a:defRPr b="0" i="0" sz="1900" u="none" cap="none" strike="noStrike">
+            <a:lvl2pPr marL="0" marR="0" lvl="1" indent="0" algn="r">
+              <a:lnSpc>
+                <a:spcPct val="100000"/>
+              </a:lnSpc>
+              <a:spcBef>
+                <a:spcPts val="0"/>
+              </a:spcBef>
+              <a:spcAft>
+                <a:spcPts val="0"/>
+              </a:spcAft>
+              <a:buClr>
+                <a:srgbClr val="000000"/>
+              </a:buClr>
+              <a:buSzPts val="1900"/>
+              <a:buFont typeface="Arial"/>
+              <a:buNone/>
+              <a:defRPr sz="1900" b="0" i="0" u="none" strike="noStrike" cap="none">
                 <a:solidFill>
                   <a:schemeClr val="dk2"/>
                 </a:solidFill>
@@ -2642,23 +2697,23 @@
                 <a:sym typeface="Arial"/>
               </a:defRPr>
             </a:lvl2pPr>
-            <a:lvl3pPr indent="0" lvl="2" marL="0" marR="0" algn="r">
-              <a:lnSpc>
-                <a:spcPct val="100000"/>
-              </a:lnSpc>
-              <a:spcBef>
-                <a:spcPts val="0"/>
-              </a:spcBef>
-              <a:spcAft>
-                <a:spcPts val="0"/>
-              </a:spcAft>
-              <a:buClr>
-                <a:srgbClr val="000000"/>
-              </a:buClr>
-              <a:buSzPts val="1900"/>
-              <a:buFont typeface="Arial"/>
-              <a:buNone/>
-              <a:defRPr b="0" i="0" sz="1900" u="none" cap="none" strike="noStrike">
+            <a:lvl3pPr marL="0" marR="0" lvl="2" indent="0" algn="r">
+              <a:lnSpc>
+                <a:spcPct val="100000"/>
+              </a:lnSpc>
+              <a:spcBef>
+                <a:spcPts val="0"/>
+              </a:spcBef>
+              <a:spcAft>
+                <a:spcPts val="0"/>
+              </a:spcAft>
+              <a:buClr>
+                <a:srgbClr val="000000"/>
+              </a:buClr>
+              <a:buSzPts val="1900"/>
+              <a:buFont typeface="Arial"/>
+              <a:buNone/>
+              <a:defRPr sz="1900" b="0" i="0" u="none" strike="noStrike" cap="none">
                 <a:solidFill>
                   <a:schemeClr val="dk2"/>
                 </a:solidFill>
@@ -2668,23 +2723,23 @@
                 <a:sym typeface="Arial"/>
               </a:defRPr>
             </a:lvl3pPr>
-            <a:lvl4pPr indent="0" lvl="3" marL="0" marR="0" algn="r">
-              <a:lnSpc>
-                <a:spcPct val="100000"/>
-              </a:lnSpc>
-              <a:spcBef>
-                <a:spcPts val="0"/>
-              </a:spcBef>
-              <a:spcAft>
-                <a:spcPts val="0"/>
-              </a:spcAft>
-              <a:buClr>
-                <a:srgbClr val="000000"/>
-              </a:buClr>
-              <a:buSzPts val="1900"/>
-              <a:buFont typeface="Arial"/>
-              <a:buNone/>
-              <a:defRPr b="0" i="0" sz="1900" u="none" cap="none" strike="noStrike">
+            <a:lvl4pPr marL="0" marR="0" lvl="3" indent="0" algn="r">
+              <a:lnSpc>
+                <a:spcPct val="100000"/>
+              </a:lnSpc>
+              <a:spcBef>
+                <a:spcPts val="0"/>
+              </a:spcBef>
+              <a:spcAft>
+                <a:spcPts val="0"/>
+              </a:spcAft>
+              <a:buClr>
+                <a:srgbClr val="000000"/>
+              </a:buClr>
+              <a:buSzPts val="1900"/>
+              <a:buFont typeface="Arial"/>
+              <a:buNone/>
+              <a:defRPr sz="1900" b="0" i="0" u="none" strike="noStrike" cap="none">
                 <a:solidFill>
                   <a:schemeClr val="dk2"/>
                 </a:solidFill>
@@ -2694,23 +2749,23 @@
                 <a:sym typeface="Arial"/>
               </a:defRPr>
             </a:lvl4pPr>
-            <a:lvl5pPr indent="0" lvl="4" marL="0" marR="0" algn="r">
-              <a:lnSpc>
-                <a:spcPct val="100000"/>
-              </a:lnSpc>
-              <a:spcBef>
-                <a:spcPts val="0"/>
-              </a:spcBef>
-              <a:spcAft>
-                <a:spcPts val="0"/>
-              </a:spcAft>
-              <a:buClr>
-                <a:srgbClr val="000000"/>
-              </a:buClr>
-              <a:buSzPts val="1900"/>
-              <a:buFont typeface="Arial"/>
-              <a:buNone/>
-              <a:defRPr b="0" i="0" sz="1900" u="none" cap="none" strike="noStrike">
+            <a:lvl5pPr marL="0" marR="0" lvl="4" indent="0" algn="r">
+              <a:lnSpc>
+                <a:spcPct val="100000"/>
+              </a:lnSpc>
+              <a:spcBef>
+                <a:spcPts val="0"/>
+              </a:spcBef>
+              <a:spcAft>
+                <a:spcPts val="0"/>
+              </a:spcAft>
+              <a:buClr>
+                <a:srgbClr val="000000"/>
+              </a:buClr>
+              <a:buSzPts val="1900"/>
+              <a:buFont typeface="Arial"/>
+              <a:buNone/>
+              <a:defRPr sz="1900" b="0" i="0" u="none" strike="noStrike" cap="none">
                 <a:solidFill>
                   <a:schemeClr val="dk2"/>
                 </a:solidFill>
@@ -2720,23 +2775,23 @@
                 <a:sym typeface="Arial"/>
               </a:defRPr>
             </a:lvl5pPr>
-            <a:lvl6pPr indent="0" lvl="5" marL="0" marR="0" algn="r">
-              <a:lnSpc>
-                <a:spcPct val="100000"/>
-              </a:lnSpc>
-              <a:spcBef>
-                <a:spcPts val="0"/>
-              </a:spcBef>
-              <a:spcAft>
-                <a:spcPts val="0"/>
-              </a:spcAft>
-              <a:buClr>
-                <a:srgbClr val="000000"/>
-              </a:buClr>
-              <a:buSzPts val="1900"/>
-              <a:buFont typeface="Arial"/>
-              <a:buNone/>
-              <a:defRPr b="0" i="0" sz="1900" u="none" cap="none" strike="noStrike">
+            <a:lvl6pPr marL="0" marR="0" lvl="5" indent="0" algn="r">
+              <a:lnSpc>
+                <a:spcPct val="100000"/>
+              </a:lnSpc>
+              <a:spcBef>
+                <a:spcPts val="0"/>
+              </a:spcBef>
+              <a:spcAft>
+                <a:spcPts val="0"/>
+              </a:spcAft>
+              <a:buClr>
+                <a:srgbClr val="000000"/>
+              </a:buClr>
+              <a:buSzPts val="1900"/>
+              <a:buFont typeface="Arial"/>
+              <a:buNone/>
+              <a:defRPr sz="1900" b="0" i="0" u="none" strike="noStrike" cap="none">
                 <a:solidFill>
                   <a:schemeClr val="dk2"/>
                 </a:solidFill>
@@ -2746,23 +2801,23 @@
                 <a:sym typeface="Arial"/>
               </a:defRPr>
             </a:lvl6pPr>
-            <a:lvl7pPr indent="0" lvl="6" marL="0" marR="0" algn="r">
-              <a:lnSpc>
-                <a:spcPct val="100000"/>
-              </a:lnSpc>
-              <a:spcBef>
-                <a:spcPts val="0"/>
-              </a:spcBef>
-              <a:spcAft>
-                <a:spcPts val="0"/>
-              </a:spcAft>
-              <a:buClr>
-                <a:srgbClr val="000000"/>
-              </a:buClr>
-              <a:buSzPts val="1900"/>
-              <a:buFont typeface="Arial"/>
-              <a:buNone/>
-              <a:defRPr b="0" i="0" sz="1900" u="none" cap="none" strike="noStrike">
+            <a:lvl7pPr marL="0" marR="0" lvl="6" indent="0" algn="r">
+              <a:lnSpc>
+                <a:spcPct val="100000"/>
+              </a:lnSpc>
+              <a:spcBef>
+                <a:spcPts val="0"/>
+              </a:spcBef>
+              <a:spcAft>
+                <a:spcPts val="0"/>
+              </a:spcAft>
+              <a:buClr>
+                <a:srgbClr val="000000"/>
+              </a:buClr>
+              <a:buSzPts val="1900"/>
+              <a:buFont typeface="Arial"/>
+              <a:buNone/>
+              <a:defRPr sz="1900" b="0" i="0" u="none" strike="noStrike" cap="none">
                 <a:solidFill>
                   <a:schemeClr val="dk2"/>
                 </a:solidFill>
@@ -2772,23 +2827,23 @@
                 <a:sym typeface="Arial"/>
               </a:defRPr>
             </a:lvl7pPr>
-            <a:lvl8pPr indent="0" lvl="7" marL="0" marR="0" algn="r">
-              <a:lnSpc>
-                <a:spcPct val="100000"/>
-              </a:lnSpc>
-              <a:spcBef>
-                <a:spcPts val="0"/>
-              </a:spcBef>
-              <a:spcAft>
-                <a:spcPts val="0"/>
-              </a:spcAft>
-              <a:buClr>
-                <a:srgbClr val="000000"/>
-              </a:buClr>
-              <a:buSzPts val="1900"/>
-              <a:buFont typeface="Arial"/>
-              <a:buNone/>
-              <a:defRPr b="0" i="0" sz="1900" u="none" cap="none" strike="noStrike">
+            <a:lvl8pPr marL="0" marR="0" lvl="7" indent="0" algn="r">
+              <a:lnSpc>
+                <a:spcPct val="100000"/>
+              </a:lnSpc>
+              <a:spcBef>
+                <a:spcPts val="0"/>
+              </a:spcBef>
+              <a:spcAft>
+                <a:spcPts val="0"/>
+              </a:spcAft>
+              <a:buClr>
+                <a:srgbClr val="000000"/>
+              </a:buClr>
+              <a:buSzPts val="1900"/>
+              <a:buFont typeface="Arial"/>
+              <a:buNone/>
+              <a:defRPr sz="1900" b="0" i="0" u="none" strike="noStrike" cap="none">
                 <a:solidFill>
                   <a:schemeClr val="dk2"/>
                 </a:solidFill>
@@ -2798,23 +2853,23 @@
                 <a:sym typeface="Arial"/>
               </a:defRPr>
             </a:lvl8pPr>
-            <a:lvl9pPr indent="0" lvl="8" marL="0" marR="0" algn="r">
-              <a:lnSpc>
-                <a:spcPct val="100000"/>
-              </a:lnSpc>
-              <a:spcBef>
-                <a:spcPts val="0"/>
-              </a:spcBef>
-              <a:spcAft>
-                <a:spcPts val="0"/>
-              </a:spcAft>
-              <a:buClr>
-                <a:srgbClr val="000000"/>
-              </a:buClr>
-              <a:buSzPts val="1900"/>
-              <a:buFont typeface="Arial"/>
-              <a:buNone/>
-              <a:defRPr b="0" i="0" sz="1900" u="none" cap="none" strike="noStrike">
+            <a:lvl9pPr marL="0" marR="0" lvl="8" indent="0" algn="r">
+              <a:lnSpc>
+                <a:spcPct val="100000"/>
+              </a:lnSpc>
+              <a:spcBef>
+                <a:spcPts val="0"/>
+              </a:spcBef>
+              <a:spcAft>
+                <a:spcPts val="0"/>
+              </a:spcAft>
+              <a:buClr>
+                <a:srgbClr val="000000"/>
+              </a:buClr>
+              <a:buSzPts val="1900"/>
+              <a:buFont typeface="Arial"/>
+              <a:buNone/>
+              <a:defRPr sz="1900" b="0" i="0" u="none" strike="noStrike" cap="none">
                 <a:solidFill>
                   <a:schemeClr val="dk2"/>
                 </a:solidFill>
@@ -2826,7 +2881,7 @@
             </a:lvl9pPr>
           </a:lstStyle>
           <a:p>
-            <a:pPr indent="0" lvl="0" marL="0" rtl="0" algn="r">
+            <a:pPr marL="0" lvl="0" indent="0" algn="r" rtl="0">
               <a:spcBef>
                 <a:spcPts val="0"/>
               </a:spcBef>
@@ -2852,11 +2907,11 @@
 </file>
 
 <file path=ppt/slideLayouts/slideLayout2.xml><?xml version="1.0" encoding="utf-8"?>
-<p:sldLayout xmlns:a="http://schemas.openxmlformats.org/drawingml/2006/main" xmlns:r="http://schemas.openxmlformats.org/officeDocument/2006/relationships" xmlns:mc="http://schemas.openxmlformats.org/markup-compatibility/2006" xmlns:mv="urn:schemas-microsoft-com:mac:vml" xmlns:p="http://schemas.openxmlformats.org/presentationml/2006/main" xmlns:c="http://schemas.openxmlformats.org/drawingml/2006/chart" xmlns:dgm="http://schemas.openxmlformats.org/drawingml/2006/diagram" xmlns:o="urn:schemas-microsoft-com:office:office" xmlns:v="urn:schemas-microsoft-com:vml" xmlns:pvml="urn:schemas-microsoft-com:office:powerpoint" xmlns:com="http://schemas.openxmlformats.org/drawingml/2006/compatibility" xmlns:p14="http://schemas.microsoft.com/office/powerpoint/2010/main" xmlns:p15="http://schemas.microsoft.com/office/powerpoint/2012/main" xmlns:ahyp="http://schemas.microsoft.com/office/drawing/2018/hyperlinkcolor" matchingName="Section header" type="secHead">
+<p:sldLayout xmlns:a="http://schemas.openxmlformats.org/drawingml/2006/main" xmlns:r="http://schemas.openxmlformats.org/officeDocument/2006/relationships" xmlns:p="http://schemas.openxmlformats.org/presentationml/2006/main" matchingName="Section header" type="secHead">
   <p:cSld name="SECTION_HEADER">
     <p:spTree>
       <p:nvGrpSpPr>
-        <p:cNvPr id="13" name="Shape 13"/>
+        <p:cNvPr id="1" name="Shape 13"/>
         <p:cNvGrpSpPr/>
         <p:nvPr/>
       </p:nvGrpSpPr>
@@ -2871,7 +2926,9 @@
       <p:sp>
         <p:nvSpPr>
           <p:cNvPr id="14" name="Google Shape;14;p3"/>
-          <p:cNvSpPr txBox="1"/>
+          <p:cNvSpPr txBox="1">
+            <a:spLocks noGrp="1"/>
+          </p:cNvSpPr>
           <p:nvPr>
             <p:ph type="title"/>
           </p:nvPr>
@@ -2890,7 +2947,7 @@
           </a:ln>
         </p:spPr>
         <p:txBody>
-          <a:bodyPr anchorCtr="0" anchor="ctr" bIns="176925" lIns="176925" spcFirstLastPara="1" rIns="176925" wrap="square" tIns="176925">
+          <a:bodyPr spcFirstLastPara="1" wrap="square" lIns="176925" tIns="176925" rIns="176925" bIns="176925" anchor="ctr" anchorCtr="0">
             <a:normAutofit/>
           </a:bodyPr>
           <a:lstStyle>
@@ -3021,15 +3078,19 @@
               <a:defRPr sz="7000"/>
             </a:lvl9pPr>
           </a:lstStyle>
-          <a:p/>
+          <a:p>
+            <a:endParaRPr/>
+          </a:p>
         </p:txBody>
       </p:sp>
       <p:sp>
         <p:nvSpPr>
           <p:cNvPr id="15" name="Google Shape;15;p3"/>
-          <p:cNvSpPr txBox="1"/>
+          <p:cNvSpPr txBox="1">
+            <a:spLocks noGrp="1"/>
+          </p:cNvSpPr>
           <p:nvPr>
-            <p:ph idx="12" type="sldNum"/>
+            <p:ph type="sldNum" idx="12"/>
           </p:nvPr>
         </p:nvSpPr>
         <p:spPr>
@@ -3046,27 +3107,27 @@
           </a:ln>
         </p:spPr>
         <p:txBody>
-          <a:bodyPr anchorCtr="0" anchor="ctr" bIns="176925" lIns="176925" spcFirstLastPara="1" rIns="176925" wrap="square" tIns="176925">
+          <a:bodyPr spcFirstLastPara="1" wrap="square" lIns="176925" tIns="176925" rIns="176925" bIns="176925" anchor="ctr" anchorCtr="0">
             <a:normAutofit/>
           </a:bodyPr>
           <a:lstStyle>
-            <a:lvl1pPr indent="0" lvl="0" marL="0" marR="0" algn="r">
-              <a:lnSpc>
-                <a:spcPct val="100000"/>
-              </a:lnSpc>
-              <a:spcBef>
-                <a:spcPts val="0"/>
-              </a:spcBef>
-              <a:spcAft>
-                <a:spcPts val="0"/>
-              </a:spcAft>
-              <a:buClr>
-                <a:srgbClr val="000000"/>
-              </a:buClr>
-              <a:buSzPts val="1900"/>
-              <a:buFont typeface="Arial"/>
-              <a:buNone/>
-              <a:defRPr b="0" i="0" sz="1900" u="none" cap="none" strike="noStrike">
+            <a:lvl1pPr marL="0" marR="0" lvl="0" indent="0" algn="r">
+              <a:lnSpc>
+                <a:spcPct val="100000"/>
+              </a:lnSpc>
+              <a:spcBef>
+                <a:spcPts val="0"/>
+              </a:spcBef>
+              <a:spcAft>
+                <a:spcPts val="0"/>
+              </a:spcAft>
+              <a:buClr>
+                <a:srgbClr val="000000"/>
+              </a:buClr>
+              <a:buSzPts val="1900"/>
+              <a:buFont typeface="Arial"/>
+              <a:buNone/>
+              <a:defRPr sz="1900" b="0" i="0" u="none" strike="noStrike" cap="none">
                 <a:solidFill>
                   <a:schemeClr val="dk2"/>
                 </a:solidFill>
@@ -3076,23 +3137,23 @@
                 <a:sym typeface="Arial"/>
               </a:defRPr>
             </a:lvl1pPr>
-            <a:lvl2pPr indent="0" lvl="1" marL="0" marR="0" algn="r">
-              <a:lnSpc>
-                <a:spcPct val="100000"/>
-              </a:lnSpc>
-              <a:spcBef>
-                <a:spcPts val="0"/>
-              </a:spcBef>
-              <a:spcAft>
-                <a:spcPts val="0"/>
-              </a:spcAft>
-              <a:buClr>
-                <a:srgbClr val="000000"/>
-              </a:buClr>
-              <a:buSzPts val="1900"/>
-              <a:buFont typeface="Arial"/>
-              <a:buNone/>
-              <a:defRPr b="0" i="0" sz="1900" u="none" cap="none" strike="noStrike">
+            <a:lvl2pPr marL="0" marR="0" lvl="1" indent="0" algn="r">
+              <a:lnSpc>
+                <a:spcPct val="100000"/>
+              </a:lnSpc>
+              <a:spcBef>
+                <a:spcPts val="0"/>
+              </a:spcBef>
+              <a:spcAft>
+                <a:spcPts val="0"/>
+              </a:spcAft>
+              <a:buClr>
+                <a:srgbClr val="000000"/>
+              </a:buClr>
+              <a:buSzPts val="1900"/>
+              <a:buFont typeface="Arial"/>
+              <a:buNone/>
+              <a:defRPr sz="1900" b="0" i="0" u="none" strike="noStrike" cap="none">
                 <a:solidFill>
                   <a:schemeClr val="dk2"/>
                 </a:solidFill>
@@ -3102,23 +3163,23 @@
                 <a:sym typeface="Arial"/>
               </a:defRPr>
             </a:lvl2pPr>
-            <a:lvl3pPr indent="0" lvl="2" marL="0" marR="0" algn="r">
-              <a:lnSpc>
-                <a:spcPct val="100000"/>
-              </a:lnSpc>
-              <a:spcBef>
-                <a:spcPts val="0"/>
-              </a:spcBef>
-              <a:spcAft>
-                <a:spcPts val="0"/>
-              </a:spcAft>
-              <a:buClr>
-                <a:srgbClr val="000000"/>
-              </a:buClr>
-              <a:buSzPts val="1900"/>
-              <a:buFont typeface="Arial"/>
-              <a:buNone/>
-              <a:defRPr b="0" i="0" sz="1900" u="none" cap="none" strike="noStrike">
+            <a:lvl3pPr marL="0" marR="0" lvl="2" indent="0" algn="r">
+              <a:lnSpc>
+                <a:spcPct val="100000"/>
+              </a:lnSpc>
+              <a:spcBef>
+                <a:spcPts val="0"/>
+              </a:spcBef>
+              <a:spcAft>
+                <a:spcPts val="0"/>
+              </a:spcAft>
+              <a:buClr>
+                <a:srgbClr val="000000"/>
+              </a:buClr>
+              <a:buSzPts val="1900"/>
+              <a:buFont typeface="Arial"/>
+              <a:buNone/>
+              <a:defRPr sz="1900" b="0" i="0" u="none" strike="noStrike" cap="none">
                 <a:solidFill>
                   <a:schemeClr val="dk2"/>
                 </a:solidFill>
@@ -3128,23 +3189,23 @@
                 <a:sym typeface="Arial"/>
               </a:defRPr>
             </a:lvl3pPr>
-            <a:lvl4pPr indent="0" lvl="3" marL="0" marR="0" algn="r">
-              <a:lnSpc>
-                <a:spcPct val="100000"/>
-              </a:lnSpc>
-              <a:spcBef>
-                <a:spcPts val="0"/>
-              </a:spcBef>
-              <a:spcAft>
-                <a:spcPts val="0"/>
-              </a:spcAft>
-              <a:buClr>
-                <a:srgbClr val="000000"/>
-              </a:buClr>
-              <a:buSzPts val="1900"/>
-              <a:buFont typeface="Arial"/>
-              <a:buNone/>
-              <a:defRPr b="0" i="0" sz="1900" u="none" cap="none" strike="noStrike">
+            <a:lvl4pPr marL="0" marR="0" lvl="3" indent="0" algn="r">
+              <a:lnSpc>
+                <a:spcPct val="100000"/>
+              </a:lnSpc>
+              <a:spcBef>
+                <a:spcPts val="0"/>
+              </a:spcBef>
+              <a:spcAft>
+                <a:spcPts val="0"/>
+              </a:spcAft>
+              <a:buClr>
+                <a:srgbClr val="000000"/>
+              </a:buClr>
+              <a:buSzPts val="1900"/>
+              <a:buFont typeface="Arial"/>
+              <a:buNone/>
+              <a:defRPr sz="1900" b="0" i="0" u="none" strike="noStrike" cap="none">
                 <a:solidFill>
                   <a:schemeClr val="dk2"/>
                 </a:solidFill>
@@ -3154,23 +3215,23 @@
                 <a:sym typeface="Arial"/>
               </a:defRPr>
             </a:lvl4pPr>
-            <a:lvl5pPr indent="0" lvl="4" marL="0" marR="0" algn="r">
-              <a:lnSpc>
-                <a:spcPct val="100000"/>
-              </a:lnSpc>
-              <a:spcBef>
-                <a:spcPts val="0"/>
-              </a:spcBef>
-              <a:spcAft>
-                <a:spcPts val="0"/>
-              </a:spcAft>
-              <a:buClr>
-                <a:srgbClr val="000000"/>
-              </a:buClr>
-              <a:buSzPts val="1900"/>
-              <a:buFont typeface="Arial"/>
-              <a:buNone/>
-              <a:defRPr b="0" i="0" sz="1900" u="none" cap="none" strike="noStrike">
+            <a:lvl5pPr marL="0" marR="0" lvl="4" indent="0" algn="r">
+              <a:lnSpc>
+                <a:spcPct val="100000"/>
+              </a:lnSpc>
+              <a:spcBef>
+                <a:spcPts val="0"/>
+              </a:spcBef>
+              <a:spcAft>
+                <a:spcPts val="0"/>
+              </a:spcAft>
+              <a:buClr>
+                <a:srgbClr val="000000"/>
+              </a:buClr>
+              <a:buSzPts val="1900"/>
+              <a:buFont typeface="Arial"/>
+              <a:buNone/>
+              <a:defRPr sz="1900" b="0" i="0" u="none" strike="noStrike" cap="none">
                 <a:solidFill>
                   <a:schemeClr val="dk2"/>
                 </a:solidFill>
@@ -3180,23 +3241,23 @@
                 <a:sym typeface="Arial"/>
               </a:defRPr>
             </a:lvl5pPr>
-            <a:lvl6pPr indent="0" lvl="5" marL="0" marR="0" algn="r">
-              <a:lnSpc>
-                <a:spcPct val="100000"/>
-              </a:lnSpc>
-              <a:spcBef>
-                <a:spcPts val="0"/>
-              </a:spcBef>
-              <a:spcAft>
-                <a:spcPts val="0"/>
-              </a:spcAft>
-              <a:buClr>
-                <a:srgbClr val="000000"/>
-              </a:buClr>
-              <a:buSzPts val="1900"/>
-              <a:buFont typeface="Arial"/>
-              <a:buNone/>
-              <a:defRPr b="0" i="0" sz="1900" u="none" cap="none" strike="noStrike">
+            <a:lvl6pPr marL="0" marR="0" lvl="5" indent="0" algn="r">
+              <a:lnSpc>
+                <a:spcPct val="100000"/>
+              </a:lnSpc>
+              <a:spcBef>
+                <a:spcPts val="0"/>
+              </a:spcBef>
+              <a:spcAft>
+                <a:spcPts val="0"/>
+              </a:spcAft>
+              <a:buClr>
+                <a:srgbClr val="000000"/>
+              </a:buClr>
+              <a:buSzPts val="1900"/>
+              <a:buFont typeface="Arial"/>
+              <a:buNone/>
+              <a:defRPr sz="1900" b="0" i="0" u="none" strike="noStrike" cap="none">
                 <a:solidFill>
                   <a:schemeClr val="dk2"/>
                 </a:solidFill>
@@ -3206,23 +3267,23 @@
                 <a:sym typeface="Arial"/>
               </a:defRPr>
             </a:lvl6pPr>
-            <a:lvl7pPr indent="0" lvl="6" marL="0" marR="0" algn="r">
-              <a:lnSpc>
-                <a:spcPct val="100000"/>
-              </a:lnSpc>
-              <a:spcBef>
-                <a:spcPts val="0"/>
-              </a:spcBef>
-              <a:spcAft>
-                <a:spcPts val="0"/>
-              </a:spcAft>
-              <a:buClr>
-                <a:srgbClr val="000000"/>
-              </a:buClr>
-              <a:buSzPts val="1900"/>
-              <a:buFont typeface="Arial"/>
-              <a:buNone/>
-              <a:defRPr b="0" i="0" sz="1900" u="none" cap="none" strike="noStrike">
+            <a:lvl7pPr marL="0" marR="0" lvl="6" indent="0" algn="r">
+              <a:lnSpc>
+                <a:spcPct val="100000"/>
+              </a:lnSpc>
+              <a:spcBef>
+                <a:spcPts val="0"/>
+              </a:spcBef>
+              <a:spcAft>
+                <a:spcPts val="0"/>
+              </a:spcAft>
+              <a:buClr>
+                <a:srgbClr val="000000"/>
+              </a:buClr>
+              <a:buSzPts val="1900"/>
+              <a:buFont typeface="Arial"/>
+              <a:buNone/>
+              <a:defRPr sz="1900" b="0" i="0" u="none" strike="noStrike" cap="none">
                 <a:solidFill>
                   <a:schemeClr val="dk2"/>
                 </a:solidFill>
@@ -3232,23 +3293,23 @@
                 <a:sym typeface="Arial"/>
               </a:defRPr>
             </a:lvl7pPr>
-            <a:lvl8pPr indent="0" lvl="7" marL="0" marR="0" algn="r">
-              <a:lnSpc>
-                <a:spcPct val="100000"/>
-              </a:lnSpc>
-              <a:spcBef>
-                <a:spcPts val="0"/>
-              </a:spcBef>
-              <a:spcAft>
-                <a:spcPts val="0"/>
-              </a:spcAft>
-              <a:buClr>
-                <a:srgbClr val="000000"/>
-              </a:buClr>
-              <a:buSzPts val="1900"/>
-              <a:buFont typeface="Arial"/>
-              <a:buNone/>
-              <a:defRPr b="0" i="0" sz="1900" u="none" cap="none" strike="noStrike">
+            <a:lvl8pPr marL="0" marR="0" lvl="7" indent="0" algn="r">
+              <a:lnSpc>
+                <a:spcPct val="100000"/>
+              </a:lnSpc>
+              <a:spcBef>
+                <a:spcPts val="0"/>
+              </a:spcBef>
+              <a:spcAft>
+                <a:spcPts val="0"/>
+              </a:spcAft>
+              <a:buClr>
+                <a:srgbClr val="000000"/>
+              </a:buClr>
+              <a:buSzPts val="1900"/>
+              <a:buFont typeface="Arial"/>
+              <a:buNone/>
+              <a:defRPr sz="1900" b="0" i="0" u="none" strike="noStrike" cap="none">
                 <a:solidFill>
                   <a:schemeClr val="dk2"/>
                 </a:solidFill>
@@ -3258,23 +3319,23 @@
                 <a:sym typeface="Arial"/>
               </a:defRPr>
             </a:lvl8pPr>
-            <a:lvl9pPr indent="0" lvl="8" marL="0" marR="0" algn="r">
-              <a:lnSpc>
-                <a:spcPct val="100000"/>
-              </a:lnSpc>
-              <a:spcBef>
-                <a:spcPts val="0"/>
-              </a:spcBef>
-              <a:spcAft>
-                <a:spcPts val="0"/>
-              </a:spcAft>
-              <a:buClr>
-                <a:srgbClr val="000000"/>
-              </a:buClr>
-              <a:buSzPts val="1900"/>
-              <a:buFont typeface="Arial"/>
-              <a:buNone/>
-              <a:defRPr b="0" i="0" sz="1900" u="none" cap="none" strike="noStrike">
+            <a:lvl9pPr marL="0" marR="0" lvl="8" indent="0" algn="r">
+              <a:lnSpc>
+                <a:spcPct val="100000"/>
+              </a:lnSpc>
+              <a:spcBef>
+                <a:spcPts val="0"/>
+              </a:spcBef>
+              <a:spcAft>
+                <a:spcPts val="0"/>
+              </a:spcAft>
+              <a:buClr>
+                <a:srgbClr val="000000"/>
+              </a:buClr>
+              <a:buSzPts val="1900"/>
+              <a:buFont typeface="Arial"/>
+              <a:buNone/>
+              <a:defRPr sz="1900" b="0" i="0" u="none" strike="noStrike" cap="none">
                 <a:solidFill>
                   <a:schemeClr val="dk2"/>
                 </a:solidFill>
@@ -3286,7 +3347,7 @@
             </a:lvl9pPr>
           </a:lstStyle>
           <a:p>
-            <a:pPr indent="0" lvl="0" marL="0" rtl="0" algn="r">
+            <a:pPr marL="0" lvl="0" indent="0" algn="r" rtl="0">
               <a:spcBef>
                 <a:spcPts val="0"/>
               </a:spcBef>
@@ -3312,11 +3373,11 @@
 </file>
 
 <file path=ppt/slideLayouts/slideLayout3.xml><?xml version="1.0" encoding="utf-8"?>
-<p:sldLayout xmlns:a="http://schemas.openxmlformats.org/drawingml/2006/main" xmlns:r="http://schemas.openxmlformats.org/officeDocument/2006/relationships" xmlns:mc="http://schemas.openxmlformats.org/markup-compatibility/2006" xmlns:mv="urn:schemas-microsoft-com:mac:vml" xmlns:p="http://schemas.openxmlformats.org/presentationml/2006/main" xmlns:c="http://schemas.openxmlformats.org/drawingml/2006/chart" xmlns:dgm="http://schemas.openxmlformats.org/drawingml/2006/diagram" xmlns:o="urn:schemas-microsoft-com:office:office" xmlns:v="urn:schemas-microsoft-com:vml" xmlns:pvml="urn:schemas-microsoft-com:office:powerpoint" xmlns:com="http://schemas.openxmlformats.org/drawingml/2006/compatibility" xmlns:p14="http://schemas.microsoft.com/office/powerpoint/2010/main" xmlns:p15="http://schemas.microsoft.com/office/powerpoint/2012/main" xmlns:ahyp="http://schemas.microsoft.com/office/drawing/2018/hyperlinkcolor" matchingName="Title and body" type="tx">
+<p:sldLayout xmlns:a="http://schemas.openxmlformats.org/drawingml/2006/main" xmlns:r="http://schemas.openxmlformats.org/officeDocument/2006/relationships" xmlns:p="http://schemas.openxmlformats.org/presentationml/2006/main" matchingName="Title and body" type="tx">
   <p:cSld name="TITLE_AND_BODY">
     <p:spTree>
       <p:nvGrpSpPr>
-        <p:cNvPr id="16" name="Shape 16"/>
+        <p:cNvPr id="1" name="Shape 16"/>
         <p:cNvGrpSpPr/>
         <p:nvPr/>
       </p:nvGrpSpPr>
@@ -3331,7 +3392,9 @@
       <p:sp>
         <p:nvSpPr>
           <p:cNvPr id="17" name="Google Shape;17;p4"/>
-          <p:cNvSpPr txBox="1"/>
+          <p:cNvSpPr txBox="1">
+            <a:spLocks noGrp="1"/>
+          </p:cNvSpPr>
           <p:nvPr>
             <p:ph type="title"/>
           </p:nvPr>
@@ -3350,7 +3413,7 @@
           </a:ln>
         </p:spPr>
         <p:txBody>
-          <a:bodyPr anchorCtr="0" anchor="t" bIns="176925" lIns="176925" spcFirstLastPara="1" rIns="176925" wrap="square" tIns="176925">
+          <a:bodyPr spcFirstLastPara="1" wrap="square" lIns="176925" tIns="176925" rIns="176925" bIns="176925" anchor="t" anchorCtr="0">
             <a:normAutofit/>
           </a:bodyPr>
           <a:lstStyle>
@@ -3481,15 +3544,19 @@
               <a:defRPr/>
             </a:lvl9pPr>
           </a:lstStyle>
-          <a:p/>
+          <a:p>
+            <a:endParaRPr/>
+          </a:p>
         </p:txBody>
       </p:sp>
       <p:sp>
         <p:nvSpPr>
           <p:cNvPr id="18" name="Google Shape;18;p4"/>
-          <p:cNvSpPr txBox="1"/>
+          <p:cNvSpPr txBox="1">
+            <a:spLocks noGrp="1"/>
+          </p:cNvSpPr>
           <p:nvPr>
-            <p:ph idx="1" type="body"/>
+            <p:ph type="body" idx="1"/>
           </p:nvPr>
         </p:nvSpPr>
         <p:spPr>
@@ -3506,11 +3573,11 @@
           </a:ln>
         </p:spPr>
         <p:txBody>
-          <a:bodyPr anchorCtr="0" anchor="t" bIns="176925" lIns="176925" spcFirstLastPara="1" rIns="176925" wrap="square" tIns="176925">
+          <a:bodyPr spcFirstLastPara="1" wrap="square" lIns="176925" tIns="176925" rIns="176925" bIns="176925" anchor="t" anchorCtr="0">
             <a:normAutofit/>
           </a:bodyPr>
           <a:lstStyle>
-            <a:lvl1pPr indent="-450850" lvl="0" marL="457200" algn="l">
+            <a:lvl1pPr marL="457200" lvl="0" indent="-450850" algn="l">
               <a:lnSpc>
                 <a:spcPct val="115000"/>
               </a:lnSpc>
@@ -3524,7 +3591,7 @@
               <a:buChar char="●"/>
               <a:defRPr/>
             </a:lvl1pPr>
-            <a:lvl2pPr indent="-400050" lvl="1" marL="914400" algn="l">
+            <a:lvl2pPr marL="914400" lvl="1" indent="-400050" algn="l">
               <a:lnSpc>
                 <a:spcPct val="115000"/>
               </a:lnSpc>
@@ -3538,7 +3605,7 @@
               <a:buChar char="○"/>
               <a:defRPr/>
             </a:lvl2pPr>
-            <a:lvl3pPr indent="-400050" lvl="2" marL="1371600" algn="l">
+            <a:lvl3pPr marL="1371600" lvl="2" indent="-400050" algn="l">
               <a:lnSpc>
                 <a:spcPct val="115000"/>
               </a:lnSpc>
@@ -3552,7 +3619,7 @@
               <a:buChar char="■"/>
               <a:defRPr/>
             </a:lvl3pPr>
-            <a:lvl4pPr indent="-400050" lvl="3" marL="1828800" algn="l">
+            <a:lvl4pPr marL="1828800" lvl="3" indent="-400050" algn="l">
               <a:lnSpc>
                 <a:spcPct val="115000"/>
               </a:lnSpc>
@@ -3566,7 +3633,7 @@
               <a:buChar char="●"/>
               <a:defRPr/>
             </a:lvl4pPr>
-            <a:lvl5pPr indent="-400050" lvl="4" marL="2286000" algn="l">
+            <a:lvl5pPr marL="2286000" lvl="4" indent="-400050" algn="l">
               <a:lnSpc>
                 <a:spcPct val="115000"/>
               </a:lnSpc>
@@ -3580,7 +3647,7 @@
               <a:buChar char="○"/>
               <a:defRPr/>
             </a:lvl5pPr>
-            <a:lvl6pPr indent="-400050" lvl="5" marL="2743200" algn="l">
+            <a:lvl6pPr marL="2743200" lvl="5" indent="-400050" algn="l">
               <a:lnSpc>
                 <a:spcPct val="115000"/>
               </a:lnSpc>
@@ -3594,7 +3661,7 @@
               <a:buChar char="■"/>
               <a:defRPr/>
             </a:lvl6pPr>
-            <a:lvl7pPr indent="-400050" lvl="6" marL="3200400" algn="l">
+            <a:lvl7pPr marL="3200400" lvl="6" indent="-400050" algn="l">
               <a:lnSpc>
                 <a:spcPct val="115000"/>
               </a:lnSpc>
@@ -3608,7 +3675,7 @@
               <a:buChar char="●"/>
               <a:defRPr/>
             </a:lvl7pPr>
-            <a:lvl8pPr indent="-400050" lvl="7" marL="3657600" algn="l">
+            <a:lvl8pPr marL="3657600" lvl="7" indent="-400050" algn="l">
               <a:lnSpc>
                 <a:spcPct val="115000"/>
               </a:lnSpc>
@@ -3622,7 +3689,7 @@
               <a:buChar char="○"/>
               <a:defRPr/>
             </a:lvl8pPr>
-            <a:lvl9pPr indent="-400050" lvl="8" marL="4114800" algn="l">
+            <a:lvl9pPr marL="4114800" lvl="8" indent="-400050" algn="l">
               <a:lnSpc>
                 <a:spcPct val="115000"/>
               </a:lnSpc>
@@ -3637,15 +3704,19 @@
               <a:defRPr/>
             </a:lvl9pPr>
           </a:lstStyle>
-          <a:p/>
+          <a:p>
+            <a:endParaRPr/>
+          </a:p>
         </p:txBody>
       </p:sp>
       <p:sp>
         <p:nvSpPr>
           <p:cNvPr id="19" name="Google Shape;19;p4"/>
-          <p:cNvSpPr txBox="1"/>
+          <p:cNvSpPr txBox="1">
+            <a:spLocks noGrp="1"/>
+          </p:cNvSpPr>
           <p:nvPr>
-            <p:ph idx="12" type="sldNum"/>
+            <p:ph type="sldNum" idx="12"/>
           </p:nvPr>
         </p:nvSpPr>
         <p:spPr>
@@ -3662,27 +3733,27 @@
           </a:ln>
         </p:spPr>
         <p:txBody>
-          <a:bodyPr anchorCtr="0" anchor="ctr" bIns="176925" lIns="176925" spcFirstLastPara="1" rIns="176925" wrap="square" tIns="176925">
+          <a:bodyPr spcFirstLastPara="1" wrap="square" lIns="176925" tIns="176925" rIns="176925" bIns="176925" anchor="ctr" anchorCtr="0">
             <a:normAutofit/>
           </a:bodyPr>
           <a:lstStyle>
-            <a:lvl1pPr indent="0" lvl="0" marL="0" marR="0" algn="r">
-              <a:lnSpc>
-                <a:spcPct val="100000"/>
-              </a:lnSpc>
-              <a:spcBef>
-                <a:spcPts val="0"/>
-              </a:spcBef>
-              <a:spcAft>
-                <a:spcPts val="0"/>
-              </a:spcAft>
-              <a:buClr>
-                <a:srgbClr val="000000"/>
-              </a:buClr>
-              <a:buSzPts val="1900"/>
-              <a:buFont typeface="Arial"/>
-              <a:buNone/>
-              <a:defRPr b="0" i="0" sz="1900" u="none" cap="none" strike="noStrike">
+            <a:lvl1pPr marL="0" marR="0" lvl="0" indent="0" algn="r">
+              <a:lnSpc>
+                <a:spcPct val="100000"/>
+              </a:lnSpc>
+              <a:spcBef>
+                <a:spcPts val="0"/>
+              </a:spcBef>
+              <a:spcAft>
+                <a:spcPts val="0"/>
+              </a:spcAft>
+              <a:buClr>
+                <a:srgbClr val="000000"/>
+              </a:buClr>
+              <a:buSzPts val="1900"/>
+              <a:buFont typeface="Arial"/>
+              <a:buNone/>
+              <a:defRPr sz="1900" b="0" i="0" u="none" strike="noStrike" cap="none">
                 <a:solidFill>
                   <a:schemeClr val="dk2"/>
                 </a:solidFill>
@@ -3692,23 +3763,23 @@
                 <a:sym typeface="Arial"/>
               </a:defRPr>
             </a:lvl1pPr>
-            <a:lvl2pPr indent="0" lvl="1" marL="0" marR="0" algn="r">
-              <a:lnSpc>
-                <a:spcPct val="100000"/>
-              </a:lnSpc>
-              <a:spcBef>
-                <a:spcPts val="0"/>
-              </a:spcBef>
-              <a:spcAft>
-                <a:spcPts val="0"/>
-              </a:spcAft>
-              <a:buClr>
-                <a:srgbClr val="000000"/>
-              </a:buClr>
-              <a:buSzPts val="1900"/>
-              <a:buFont typeface="Arial"/>
-              <a:buNone/>
-              <a:defRPr b="0" i="0" sz="1900" u="none" cap="none" strike="noStrike">
+            <a:lvl2pPr marL="0" marR="0" lvl="1" indent="0" algn="r">
+              <a:lnSpc>
+                <a:spcPct val="100000"/>
+              </a:lnSpc>
+              <a:spcBef>
+                <a:spcPts val="0"/>
+              </a:spcBef>
+              <a:spcAft>
+                <a:spcPts val="0"/>
+              </a:spcAft>
+              <a:buClr>
+                <a:srgbClr val="000000"/>
+              </a:buClr>
+              <a:buSzPts val="1900"/>
+              <a:buFont typeface="Arial"/>
+              <a:buNone/>
+              <a:defRPr sz="1900" b="0" i="0" u="none" strike="noStrike" cap="none">
                 <a:solidFill>
                   <a:schemeClr val="dk2"/>
                 </a:solidFill>
@@ -3718,23 +3789,23 @@
                 <a:sym typeface="Arial"/>
               </a:defRPr>
             </a:lvl2pPr>
-            <a:lvl3pPr indent="0" lvl="2" marL="0" marR="0" algn="r">
-              <a:lnSpc>
-                <a:spcPct val="100000"/>
-              </a:lnSpc>
-              <a:spcBef>
-                <a:spcPts val="0"/>
-              </a:spcBef>
-              <a:spcAft>
-                <a:spcPts val="0"/>
-              </a:spcAft>
-              <a:buClr>
-                <a:srgbClr val="000000"/>
-              </a:buClr>
-              <a:buSzPts val="1900"/>
-              <a:buFont typeface="Arial"/>
-              <a:buNone/>
-              <a:defRPr b="0" i="0" sz="1900" u="none" cap="none" strike="noStrike">
+            <a:lvl3pPr marL="0" marR="0" lvl="2" indent="0" algn="r">
+              <a:lnSpc>
+                <a:spcPct val="100000"/>
+              </a:lnSpc>
+              <a:spcBef>
+                <a:spcPts val="0"/>
+              </a:spcBef>
+              <a:spcAft>
+                <a:spcPts val="0"/>
+              </a:spcAft>
+              <a:buClr>
+                <a:srgbClr val="000000"/>
+              </a:buClr>
+              <a:buSzPts val="1900"/>
+              <a:buFont typeface="Arial"/>
+              <a:buNone/>
+              <a:defRPr sz="1900" b="0" i="0" u="none" strike="noStrike" cap="none">
                 <a:solidFill>
                   <a:schemeClr val="dk2"/>
                 </a:solidFill>
@@ -3744,23 +3815,23 @@
                 <a:sym typeface="Arial"/>
               </a:defRPr>
             </a:lvl3pPr>
-            <a:lvl4pPr indent="0" lvl="3" marL="0" marR="0" algn="r">
-              <a:lnSpc>
-                <a:spcPct val="100000"/>
-              </a:lnSpc>
-              <a:spcBef>
-                <a:spcPts val="0"/>
-              </a:spcBef>
-              <a:spcAft>
-                <a:spcPts val="0"/>
-              </a:spcAft>
-              <a:buClr>
-                <a:srgbClr val="000000"/>
-              </a:buClr>
-              <a:buSzPts val="1900"/>
-              <a:buFont typeface="Arial"/>
-              <a:buNone/>
-              <a:defRPr b="0" i="0" sz="1900" u="none" cap="none" strike="noStrike">
+            <a:lvl4pPr marL="0" marR="0" lvl="3" indent="0" algn="r">
+              <a:lnSpc>
+                <a:spcPct val="100000"/>
+              </a:lnSpc>
+              <a:spcBef>
+                <a:spcPts val="0"/>
+              </a:spcBef>
+              <a:spcAft>
+                <a:spcPts val="0"/>
+              </a:spcAft>
+              <a:buClr>
+                <a:srgbClr val="000000"/>
+              </a:buClr>
+              <a:buSzPts val="1900"/>
+              <a:buFont typeface="Arial"/>
+              <a:buNone/>
+              <a:defRPr sz="1900" b="0" i="0" u="none" strike="noStrike" cap="none">
                 <a:solidFill>
                   <a:schemeClr val="dk2"/>
                 </a:solidFill>
@@ -3770,23 +3841,23 @@
                 <a:sym typeface="Arial"/>
               </a:defRPr>
             </a:lvl4pPr>
-            <a:lvl5pPr indent="0" lvl="4" marL="0" marR="0" algn="r">
-              <a:lnSpc>
-                <a:spcPct val="100000"/>
-              </a:lnSpc>
-              <a:spcBef>
-                <a:spcPts val="0"/>
-              </a:spcBef>
-              <a:spcAft>
-                <a:spcPts val="0"/>
-              </a:spcAft>
-              <a:buClr>
-                <a:srgbClr val="000000"/>
-              </a:buClr>
-              <a:buSzPts val="1900"/>
-              <a:buFont typeface="Arial"/>
-              <a:buNone/>
-              <a:defRPr b="0" i="0" sz="1900" u="none" cap="none" strike="noStrike">
+            <a:lvl5pPr marL="0" marR="0" lvl="4" indent="0" algn="r">
+              <a:lnSpc>
+                <a:spcPct val="100000"/>
+              </a:lnSpc>
+              <a:spcBef>
+                <a:spcPts val="0"/>
+              </a:spcBef>
+              <a:spcAft>
+                <a:spcPts val="0"/>
+              </a:spcAft>
+              <a:buClr>
+                <a:srgbClr val="000000"/>
+              </a:buClr>
+              <a:buSzPts val="1900"/>
+              <a:buFont typeface="Arial"/>
+              <a:buNone/>
+              <a:defRPr sz="1900" b="0" i="0" u="none" strike="noStrike" cap="none">
                 <a:solidFill>
                   <a:schemeClr val="dk2"/>
                 </a:solidFill>
@@ -3796,23 +3867,23 @@
                 <a:sym typeface="Arial"/>
               </a:defRPr>
             </a:lvl5pPr>
-            <a:lvl6pPr indent="0" lvl="5" marL="0" marR="0" algn="r">
-              <a:lnSpc>
-                <a:spcPct val="100000"/>
-              </a:lnSpc>
-              <a:spcBef>
-                <a:spcPts val="0"/>
-              </a:spcBef>
-              <a:spcAft>
-                <a:spcPts val="0"/>
-              </a:spcAft>
-              <a:buClr>
-                <a:srgbClr val="000000"/>
-              </a:buClr>
-              <a:buSzPts val="1900"/>
-              <a:buFont typeface="Arial"/>
-              <a:buNone/>
-              <a:defRPr b="0" i="0" sz="1900" u="none" cap="none" strike="noStrike">
+            <a:lvl6pPr marL="0" marR="0" lvl="5" indent="0" algn="r">
+              <a:lnSpc>
+                <a:spcPct val="100000"/>
+              </a:lnSpc>
+              <a:spcBef>
+                <a:spcPts val="0"/>
+              </a:spcBef>
+              <a:spcAft>
+                <a:spcPts val="0"/>
+              </a:spcAft>
+              <a:buClr>
+                <a:srgbClr val="000000"/>
+              </a:buClr>
+              <a:buSzPts val="1900"/>
+              <a:buFont typeface="Arial"/>
+              <a:buNone/>
+              <a:defRPr sz="1900" b="0" i="0" u="none" strike="noStrike" cap="none">
                 <a:solidFill>
                   <a:schemeClr val="dk2"/>
                 </a:solidFill>
@@ -3822,23 +3893,23 @@
                 <a:sym typeface="Arial"/>
               </a:defRPr>
             </a:lvl6pPr>
-            <a:lvl7pPr indent="0" lvl="6" marL="0" marR="0" algn="r">
-              <a:lnSpc>
-                <a:spcPct val="100000"/>
-              </a:lnSpc>
-              <a:spcBef>
-                <a:spcPts val="0"/>
-              </a:spcBef>
-              <a:spcAft>
-                <a:spcPts val="0"/>
-              </a:spcAft>
-              <a:buClr>
-                <a:srgbClr val="000000"/>
-              </a:buClr>
-              <a:buSzPts val="1900"/>
-              <a:buFont typeface="Arial"/>
-              <a:buNone/>
-              <a:defRPr b="0" i="0" sz="1900" u="none" cap="none" strike="noStrike">
+            <a:lvl7pPr marL="0" marR="0" lvl="6" indent="0" algn="r">
+              <a:lnSpc>
+                <a:spcPct val="100000"/>
+              </a:lnSpc>
+              <a:spcBef>
+                <a:spcPts val="0"/>
+              </a:spcBef>
+              <a:spcAft>
+                <a:spcPts val="0"/>
+              </a:spcAft>
+              <a:buClr>
+                <a:srgbClr val="000000"/>
+              </a:buClr>
+              <a:buSzPts val="1900"/>
+              <a:buFont typeface="Arial"/>
+              <a:buNone/>
+              <a:defRPr sz="1900" b="0" i="0" u="none" strike="noStrike" cap="none">
                 <a:solidFill>
                   <a:schemeClr val="dk2"/>
                 </a:solidFill>
@@ -3848,23 +3919,23 @@
                 <a:sym typeface="Arial"/>
               </a:defRPr>
             </a:lvl7pPr>
-            <a:lvl8pPr indent="0" lvl="7" marL="0" marR="0" algn="r">
-              <a:lnSpc>
-                <a:spcPct val="100000"/>
-              </a:lnSpc>
-              <a:spcBef>
-                <a:spcPts val="0"/>
-              </a:spcBef>
-              <a:spcAft>
-                <a:spcPts val="0"/>
-              </a:spcAft>
-              <a:buClr>
-                <a:srgbClr val="000000"/>
-              </a:buClr>
-              <a:buSzPts val="1900"/>
-              <a:buFont typeface="Arial"/>
-              <a:buNone/>
-              <a:defRPr b="0" i="0" sz="1900" u="none" cap="none" strike="noStrike">
+            <a:lvl8pPr marL="0" marR="0" lvl="7" indent="0" algn="r">
+              <a:lnSpc>
+                <a:spcPct val="100000"/>
+              </a:lnSpc>
+              <a:spcBef>
+                <a:spcPts val="0"/>
+              </a:spcBef>
+              <a:spcAft>
+                <a:spcPts val="0"/>
+              </a:spcAft>
+              <a:buClr>
+                <a:srgbClr val="000000"/>
+              </a:buClr>
+              <a:buSzPts val="1900"/>
+              <a:buFont typeface="Arial"/>
+              <a:buNone/>
+              <a:defRPr sz="1900" b="0" i="0" u="none" strike="noStrike" cap="none">
                 <a:solidFill>
                   <a:schemeClr val="dk2"/>
                 </a:solidFill>
@@ -3874,23 +3945,23 @@
                 <a:sym typeface="Arial"/>
               </a:defRPr>
             </a:lvl8pPr>
-            <a:lvl9pPr indent="0" lvl="8" marL="0" marR="0" algn="r">
-              <a:lnSpc>
-                <a:spcPct val="100000"/>
-              </a:lnSpc>
-              <a:spcBef>
-                <a:spcPts val="0"/>
-              </a:spcBef>
-              <a:spcAft>
-                <a:spcPts val="0"/>
-              </a:spcAft>
-              <a:buClr>
-                <a:srgbClr val="000000"/>
-              </a:buClr>
-              <a:buSzPts val="1900"/>
-              <a:buFont typeface="Arial"/>
-              <a:buNone/>
-              <a:defRPr b="0" i="0" sz="1900" u="none" cap="none" strike="noStrike">
+            <a:lvl9pPr marL="0" marR="0" lvl="8" indent="0" algn="r">
+              <a:lnSpc>
+                <a:spcPct val="100000"/>
+              </a:lnSpc>
+              <a:spcBef>
+                <a:spcPts val="0"/>
+              </a:spcBef>
+              <a:spcAft>
+                <a:spcPts val="0"/>
+              </a:spcAft>
+              <a:buClr>
+                <a:srgbClr val="000000"/>
+              </a:buClr>
+              <a:buSzPts val="1900"/>
+              <a:buFont typeface="Arial"/>
+              <a:buNone/>
+              <a:defRPr sz="1900" b="0" i="0" u="none" strike="noStrike" cap="none">
                 <a:solidFill>
                   <a:schemeClr val="dk2"/>
                 </a:solidFill>
@@ -3902,7 +3973,7 @@
             </a:lvl9pPr>
           </a:lstStyle>
           <a:p>
-            <a:pPr indent="0" lvl="0" marL="0" rtl="0" algn="r">
+            <a:pPr marL="0" lvl="0" indent="0" algn="r" rtl="0">
               <a:spcBef>
                 <a:spcPts val="0"/>
               </a:spcBef>
@@ -3928,11 +3999,11 @@
 </file>
 
 <file path=ppt/slideLayouts/slideLayout4.xml><?xml version="1.0" encoding="utf-8"?>
-<p:sldLayout xmlns:a="http://schemas.openxmlformats.org/drawingml/2006/main" xmlns:r="http://schemas.openxmlformats.org/officeDocument/2006/relationships" xmlns:mc="http://schemas.openxmlformats.org/markup-compatibility/2006" xmlns:mv="urn:schemas-microsoft-com:mac:vml" xmlns:p="http://schemas.openxmlformats.org/presentationml/2006/main" xmlns:c="http://schemas.openxmlformats.org/drawingml/2006/chart" xmlns:dgm="http://schemas.openxmlformats.org/drawingml/2006/diagram" xmlns:o="urn:schemas-microsoft-com:office:office" xmlns:v="urn:schemas-microsoft-com:vml" xmlns:pvml="urn:schemas-microsoft-com:office:powerpoint" xmlns:com="http://schemas.openxmlformats.org/drawingml/2006/compatibility" xmlns:p14="http://schemas.microsoft.com/office/powerpoint/2010/main" xmlns:p15="http://schemas.microsoft.com/office/powerpoint/2012/main" xmlns:ahyp="http://schemas.microsoft.com/office/drawing/2018/hyperlinkcolor" matchingName="Title and two columns" type="twoColTx">
+<p:sldLayout xmlns:a="http://schemas.openxmlformats.org/drawingml/2006/main" xmlns:r="http://schemas.openxmlformats.org/officeDocument/2006/relationships" xmlns:p="http://schemas.openxmlformats.org/presentationml/2006/main" matchingName="Title and two columns" type="twoColTx">
   <p:cSld name="TITLE_AND_TWO_COLUMNS">
     <p:spTree>
       <p:nvGrpSpPr>
-        <p:cNvPr id="20" name="Shape 20"/>
+        <p:cNvPr id="1" name="Shape 20"/>
         <p:cNvGrpSpPr/>
         <p:nvPr/>
       </p:nvGrpSpPr>
@@ -3947,7 +4018,9 @@
       <p:sp>
         <p:nvSpPr>
           <p:cNvPr id="21" name="Google Shape;21;p5"/>
-          <p:cNvSpPr txBox="1"/>
+          <p:cNvSpPr txBox="1">
+            <a:spLocks noGrp="1"/>
+          </p:cNvSpPr>
           <p:nvPr>
             <p:ph type="title"/>
           </p:nvPr>
@@ -3966,7 +4039,7 @@
           </a:ln>
         </p:spPr>
         <p:txBody>
-          <a:bodyPr anchorCtr="0" anchor="t" bIns="176925" lIns="176925" spcFirstLastPara="1" rIns="176925" wrap="square" tIns="176925">
+          <a:bodyPr spcFirstLastPara="1" wrap="square" lIns="176925" tIns="176925" rIns="176925" bIns="176925" anchor="t" anchorCtr="0">
             <a:normAutofit/>
           </a:bodyPr>
           <a:lstStyle>
@@ -4097,15 +4170,19 @@
               <a:defRPr/>
             </a:lvl9pPr>
           </a:lstStyle>
-          <a:p/>
+          <a:p>
+            <a:endParaRPr/>
+          </a:p>
         </p:txBody>
       </p:sp>
       <p:sp>
         <p:nvSpPr>
           <p:cNvPr id="22" name="Google Shape;22;p5"/>
-          <p:cNvSpPr txBox="1"/>
+          <p:cNvSpPr txBox="1">
+            <a:spLocks noGrp="1"/>
+          </p:cNvSpPr>
           <p:nvPr>
-            <p:ph idx="1" type="body"/>
+            <p:ph type="body" idx="1"/>
           </p:nvPr>
         </p:nvSpPr>
         <p:spPr>
@@ -4122,11 +4199,11 @@
           </a:ln>
         </p:spPr>
         <p:txBody>
-          <a:bodyPr anchorCtr="0" anchor="t" bIns="176925" lIns="176925" spcFirstLastPara="1" rIns="176925" wrap="square" tIns="176925">
+          <a:bodyPr spcFirstLastPara="1" wrap="square" lIns="176925" tIns="176925" rIns="176925" bIns="176925" anchor="t" anchorCtr="0">
             <a:normAutofit/>
           </a:bodyPr>
           <a:lstStyle>
-            <a:lvl1pPr indent="-400050" lvl="0" marL="457200" algn="l">
+            <a:lvl1pPr marL="457200" lvl="0" indent="-400050" algn="l">
               <a:lnSpc>
                 <a:spcPct val="115000"/>
               </a:lnSpc>
@@ -4140,7 +4217,7 @@
               <a:buChar char="●"/>
               <a:defRPr sz="2700"/>
             </a:lvl1pPr>
-            <a:lvl2pPr indent="-374650" lvl="1" marL="914400" algn="l">
+            <a:lvl2pPr marL="914400" lvl="1" indent="-374650" algn="l">
               <a:lnSpc>
                 <a:spcPct val="115000"/>
               </a:lnSpc>
@@ -4154,7 +4231,7 @@
               <a:buChar char="○"/>
               <a:defRPr sz="2300"/>
             </a:lvl2pPr>
-            <a:lvl3pPr indent="-374650" lvl="2" marL="1371600" algn="l">
+            <a:lvl3pPr marL="1371600" lvl="2" indent="-374650" algn="l">
               <a:lnSpc>
                 <a:spcPct val="115000"/>
               </a:lnSpc>
@@ -4168,7 +4245,7 @@
               <a:buChar char="■"/>
               <a:defRPr sz="2300"/>
             </a:lvl3pPr>
-            <a:lvl4pPr indent="-374650" lvl="3" marL="1828800" algn="l">
+            <a:lvl4pPr marL="1828800" lvl="3" indent="-374650" algn="l">
               <a:lnSpc>
                 <a:spcPct val="115000"/>
               </a:lnSpc>
@@ -4182,7 +4259,7 @@
               <a:buChar char="●"/>
               <a:defRPr sz="2300"/>
             </a:lvl4pPr>
-            <a:lvl5pPr indent="-374650" lvl="4" marL="2286000" algn="l">
+            <a:lvl5pPr marL="2286000" lvl="4" indent="-374650" algn="l">
               <a:lnSpc>
                 <a:spcPct val="115000"/>
               </a:lnSpc>
@@ -4196,7 +4273,7 @@
               <a:buChar char="○"/>
               <a:defRPr sz="2300"/>
             </a:lvl5pPr>
-            <a:lvl6pPr indent="-374650" lvl="5" marL="2743200" algn="l">
+            <a:lvl6pPr marL="2743200" lvl="5" indent="-374650" algn="l">
               <a:lnSpc>
                 <a:spcPct val="115000"/>
               </a:lnSpc>
@@ -4210,7 +4287,7 @@
               <a:buChar char="■"/>
               <a:defRPr sz="2300"/>
             </a:lvl6pPr>
-            <a:lvl7pPr indent="-374650" lvl="6" marL="3200400" algn="l">
+            <a:lvl7pPr marL="3200400" lvl="6" indent="-374650" algn="l">
               <a:lnSpc>
                 <a:spcPct val="115000"/>
               </a:lnSpc>
@@ -4224,7 +4301,7 @@
               <a:buChar char="●"/>
               <a:defRPr sz="2300"/>
             </a:lvl7pPr>
-            <a:lvl8pPr indent="-374650" lvl="7" marL="3657600" algn="l">
+            <a:lvl8pPr marL="3657600" lvl="7" indent="-374650" algn="l">
               <a:lnSpc>
                 <a:spcPct val="115000"/>
               </a:lnSpc>
@@ -4238,7 +4315,7 @@
               <a:buChar char="○"/>
               <a:defRPr sz="2300"/>
             </a:lvl8pPr>
-            <a:lvl9pPr indent="-374650" lvl="8" marL="4114800" algn="l">
+            <a:lvl9pPr marL="4114800" lvl="8" indent="-374650" algn="l">
               <a:lnSpc>
                 <a:spcPct val="115000"/>
               </a:lnSpc>
@@ -4253,15 +4330,19 @@
               <a:defRPr sz="2300"/>
             </a:lvl9pPr>
           </a:lstStyle>
-          <a:p/>
+          <a:p>
+            <a:endParaRPr/>
+          </a:p>
         </p:txBody>
       </p:sp>
       <p:sp>
         <p:nvSpPr>
           <p:cNvPr id="23" name="Google Shape;23;p5"/>
-          <p:cNvSpPr txBox="1"/>
+          <p:cNvSpPr txBox="1">
+            <a:spLocks noGrp="1"/>
+          </p:cNvSpPr>
           <p:nvPr>
-            <p:ph idx="2" type="body"/>
+            <p:ph type="body" idx="2"/>
           </p:nvPr>
         </p:nvSpPr>
         <p:spPr>
@@ -4278,11 +4359,11 @@
           </a:ln>
         </p:spPr>
         <p:txBody>
-          <a:bodyPr anchorCtr="0" anchor="t" bIns="176925" lIns="176925" spcFirstLastPara="1" rIns="176925" wrap="square" tIns="176925">
+          <a:bodyPr spcFirstLastPara="1" wrap="square" lIns="176925" tIns="176925" rIns="176925" bIns="176925" anchor="t" anchorCtr="0">
             <a:normAutofit/>
           </a:bodyPr>
           <a:lstStyle>
-            <a:lvl1pPr indent="-400050" lvl="0" marL="457200" algn="l">
+            <a:lvl1pPr marL="457200" lvl="0" indent="-400050" algn="l">
               <a:lnSpc>
                 <a:spcPct val="115000"/>
               </a:lnSpc>
@@ -4296,7 +4377,7 @@
               <a:buChar char="●"/>
               <a:defRPr sz="2700"/>
             </a:lvl1pPr>
-            <a:lvl2pPr indent="-374650" lvl="1" marL="914400" algn="l">
+            <a:lvl2pPr marL="914400" lvl="1" indent="-374650" algn="l">
               <a:lnSpc>
                 <a:spcPct val="115000"/>
               </a:lnSpc>
@@ -4310,7 +4391,7 @@
               <a:buChar char="○"/>
               <a:defRPr sz="2300"/>
             </a:lvl2pPr>
-            <a:lvl3pPr indent="-374650" lvl="2" marL="1371600" algn="l">
+            <a:lvl3pPr marL="1371600" lvl="2" indent="-374650" algn="l">
               <a:lnSpc>
                 <a:spcPct val="115000"/>
               </a:lnSpc>
@@ -4324,7 +4405,7 @@
               <a:buChar char="■"/>
               <a:defRPr sz="2300"/>
             </a:lvl3pPr>
-            <a:lvl4pPr indent="-374650" lvl="3" marL="1828800" algn="l">
+            <a:lvl4pPr marL="1828800" lvl="3" indent="-374650" algn="l">
               <a:lnSpc>
                 <a:spcPct val="115000"/>
               </a:lnSpc>
@@ -4338,7 +4419,7 @@
               <a:buChar char="●"/>
               <a:defRPr sz="2300"/>
             </a:lvl4pPr>
-            <a:lvl5pPr indent="-374650" lvl="4" marL="2286000" algn="l">
+            <a:lvl5pPr marL="2286000" lvl="4" indent="-374650" algn="l">
               <a:lnSpc>
                 <a:spcPct val="115000"/>
               </a:lnSpc>
@@ -4352,7 +4433,7 @@
               <a:buChar char="○"/>
               <a:defRPr sz="2300"/>
             </a:lvl5pPr>
-            <a:lvl6pPr indent="-374650" lvl="5" marL="2743200" algn="l">
+            <a:lvl6pPr marL="2743200" lvl="5" indent="-374650" algn="l">
               <a:lnSpc>
                 <a:spcPct val="115000"/>
               </a:lnSpc>
@@ -4366,7 +4447,7 @@
               <a:buChar char="■"/>
               <a:defRPr sz="2300"/>
             </a:lvl6pPr>
-            <a:lvl7pPr indent="-374650" lvl="6" marL="3200400" algn="l">
+            <a:lvl7pPr marL="3200400" lvl="6" indent="-374650" algn="l">
               <a:lnSpc>
                 <a:spcPct val="115000"/>
               </a:lnSpc>
@@ -4380,7 +4461,7 @@
               <a:buChar char="●"/>
               <a:defRPr sz="2300"/>
             </a:lvl7pPr>
-            <a:lvl8pPr indent="-374650" lvl="7" marL="3657600" algn="l">
+            <a:lvl8pPr marL="3657600" lvl="7" indent="-374650" algn="l">
               <a:lnSpc>
                 <a:spcPct val="115000"/>
               </a:lnSpc>
@@ -4394,7 +4475,7 @@
               <a:buChar char="○"/>
               <a:defRPr sz="2300"/>
             </a:lvl8pPr>
-            <a:lvl9pPr indent="-374650" lvl="8" marL="4114800" algn="l">
+            <a:lvl9pPr marL="4114800" lvl="8" indent="-374650" algn="l">
               <a:lnSpc>
                 <a:spcPct val="115000"/>
               </a:lnSpc>
@@ -4409,15 +4490,19 @@
               <a:defRPr sz="2300"/>
             </a:lvl9pPr>
           </a:lstStyle>
-          <a:p/>
+          <a:p>
+            <a:endParaRPr/>
+          </a:p>
         </p:txBody>
       </p:sp>
       <p:sp>
         <p:nvSpPr>
           <p:cNvPr id="24" name="Google Shape;24;p5"/>
-          <p:cNvSpPr txBox="1"/>
+          <p:cNvSpPr txBox="1">
+            <a:spLocks noGrp="1"/>
+          </p:cNvSpPr>
           <p:nvPr>
-            <p:ph idx="12" type="sldNum"/>
+            <p:ph type="sldNum" idx="12"/>
           </p:nvPr>
         </p:nvSpPr>
         <p:spPr>
@@ -4434,27 +4519,27 @@
           </a:ln>
         </p:spPr>
         <p:txBody>
-          <a:bodyPr anchorCtr="0" anchor="ctr" bIns="176925" lIns="176925" spcFirstLastPara="1" rIns="176925" wrap="square" tIns="176925">
+          <a:bodyPr spcFirstLastPara="1" wrap="square" lIns="176925" tIns="176925" rIns="176925" bIns="176925" anchor="ctr" anchorCtr="0">
             <a:normAutofit/>
           </a:bodyPr>
           <a:lstStyle>
-            <a:lvl1pPr indent="0" lvl="0" marL="0" marR="0" algn="r">
-              <a:lnSpc>
-                <a:spcPct val="100000"/>
-              </a:lnSpc>
-              <a:spcBef>
-                <a:spcPts val="0"/>
-              </a:spcBef>
-              <a:spcAft>
-                <a:spcPts val="0"/>
-              </a:spcAft>
-              <a:buClr>
-                <a:srgbClr val="000000"/>
-              </a:buClr>
-              <a:buSzPts val="1900"/>
-              <a:buFont typeface="Arial"/>
-              <a:buNone/>
-              <a:defRPr b="0" i="0" sz="1900" u="none" cap="none" strike="noStrike">
+            <a:lvl1pPr marL="0" marR="0" lvl="0" indent="0" algn="r">
+              <a:lnSpc>
+                <a:spcPct val="100000"/>
+              </a:lnSpc>
+              <a:spcBef>
+                <a:spcPts val="0"/>
+              </a:spcBef>
+              <a:spcAft>
+                <a:spcPts val="0"/>
+              </a:spcAft>
+              <a:buClr>
+                <a:srgbClr val="000000"/>
+              </a:buClr>
+              <a:buSzPts val="1900"/>
+              <a:buFont typeface="Arial"/>
+              <a:buNone/>
+              <a:defRPr sz="1900" b="0" i="0" u="none" strike="noStrike" cap="none">
                 <a:solidFill>
                   <a:schemeClr val="dk2"/>
                 </a:solidFill>
@@ -4464,23 +4549,23 @@
                 <a:sym typeface="Arial"/>
               </a:defRPr>
             </a:lvl1pPr>
-            <a:lvl2pPr indent="0" lvl="1" marL="0" marR="0" algn="r">
-              <a:lnSpc>
-                <a:spcPct val="100000"/>
-              </a:lnSpc>
-              <a:spcBef>
-                <a:spcPts val="0"/>
-              </a:spcBef>
-              <a:spcAft>
-                <a:spcPts val="0"/>
-              </a:spcAft>
-              <a:buClr>
-                <a:srgbClr val="000000"/>
-              </a:buClr>
-              <a:buSzPts val="1900"/>
-              <a:buFont typeface="Arial"/>
-              <a:buNone/>
-              <a:defRPr b="0" i="0" sz="1900" u="none" cap="none" strike="noStrike">
+            <a:lvl2pPr marL="0" marR="0" lvl="1" indent="0" algn="r">
+              <a:lnSpc>
+                <a:spcPct val="100000"/>
+              </a:lnSpc>
+              <a:spcBef>
+                <a:spcPts val="0"/>
+              </a:spcBef>
+              <a:spcAft>
+                <a:spcPts val="0"/>
+              </a:spcAft>
+              <a:buClr>
+                <a:srgbClr val="000000"/>
+              </a:buClr>
+              <a:buSzPts val="1900"/>
+              <a:buFont typeface="Arial"/>
+              <a:buNone/>
+              <a:defRPr sz="1900" b="0" i="0" u="none" strike="noStrike" cap="none">
                 <a:solidFill>
                   <a:schemeClr val="dk2"/>
                 </a:solidFill>
@@ -4490,23 +4575,23 @@
                 <a:sym typeface="Arial"/>
               </a:defRPr>
             </a:lvl2pPr>
-            <a:lvl3pPr indent="0" lvl="2" marL="0" marR="0" algn="r">
-              <a:lnSpc>
-                <a:spcPct val="100000"/>
-              </a:lnSpc>
-              <a:spcBef>
-                <a:spcPts val="0"/>
-              </a:spcBef>
-              <a:spcAft>
-                <a:spcPts val="0"/>
-              </a:spcAft>
-              <a:buClr>
-                <a:srgbClr val="000000"/>
-              </a:buClr>
-              <a:buSzPts val="1900"/>
-              <a:buFont typeface="Arial"/>
-              <a:buNone/>
-              <a:defRPr b="0" i="0" sz="1900" u="none" cap="none" strike="noStrike">
+            <a:lvl3pPr marL="0" marR="0" lvl="2" indent="0" algn="r">
+              <a:lnSpc>
+                <a:spcPct val="100000"/>
+              </a:lnSpc>
+              <a:spcBef>
+                <a:spcPts val="0"/>
+              </a:spcBef>
+              <a:spcAft>
+                <a:spcPts val="0"/>
+              </a:spcAft>
+              <a:buClr>
+                <a:srgbClr val="000000"/>
+              </a:buClr>
+              <a:buSzPts val="1900"/>
+              <a:buFont typeface="Arial"/>
+              <a:buNone/>
+              <a:defRPr sz="1900" b="0" i="0" u="none" strike="noStrike" cap="none">
                 <a:solidFill>
                   <a:schemeClr val="dk2"/>
                 </a:solidFill>
@@ -4516,23 +4601,23 @@
                 <a:sym typeface="Arial"/>
               </a:defRPr>
             </a:lvl3pPr>
-            <a:lvl4pPr indent="0" lvl="3" marL="0" marR="0" algn="r">
-              <a:lnSpc>
-                <a:spcPct val="100000"/>
-              </a:lnSpc>
-              <a:spcBef>
-                <a:spcPts val="0"/>
-              </a:spcBef>
-              <a:spcAft>
-                <a:spcPts val="0"/>
-              </a:spcAft>
-              <a:buClr>
-                <a:srgbClr val="000000"/>
-              </a:buClr>
-              <a:buSzPts val="1900"/>
-              <a:buFont typeface="Arial"/>
-              <a:buNone/>
-              <a:defRPr b="0" i="0" sz="1900" u="none" cap="none" strike="noStrike">
+            <a:lvl4pPr marL="0" marR="0" lvl="3" indent="0" algn="r">
+              <a:lnSpc>
+                <a:spcPct val="100000"/>
+              </a:lnSpc>
+              <a:spcBef>
+                <a:spcPts val="0"/>
+              </a:spcBef>
+              <a:spcAft>
+                <a:spcPts val="0"/>
+              </a:spcAft>
+              <a:buClr>
+                <a:srgbClr val="000000"/>
+              </a:buClr>
+              <a:buSzPts val="1900"/>
+              <a:buFont typeface="Arial"/>
+              <a:buNone/>
+              <a:defRPr sz="1900" b="0" i="0" u="none" strike="noStrike" cap="none">
                 <a:solidFill>
                   <a:schemeClr val="dk2"/>
                 </a:solidFill>
@@ -4542,23 +4627,23 @@
                 <a:sym typeface="Arial"/>
               </a:defRPr>
             </a:lvl4pPr>
-            <a:lvl5pPr indent="0" lvl="4" marL="0" marR="0" algn="r">
-              <a:lnSpc>
-                <a:spcPct val="100000"/>
-              </a:lnSpc>
-              <a:spcBef>
-                <a:spcPts val="0"/>
-              </a:spcBef>
-              <a:spcAft>
-                <a:spcPts val="0"/>
-              </a:spcAft>
-              <a:buClr>
-                <a:srgbClr val="000000"/>
-              </a:buClr>
-              <a:buSzPts val="1900"/>
-              <a:buFont typeface="Arial"/>
-              <a:buNone/>
-              <a:defRPr b="0" i="0" sz="1900" u="none" cap="none" strike="noStrike">
+            <a:lvl5pPr marL="0" marR="0" lvl="4" indent="0" algn="r">
+              <a:lnSpc>
+                <a:spcPct val="100000"/>
+              </a:lnSpc>
+              <a:spcBef>
+                <a:spcPts val="0"/>
+              </a:spcBef>
+              <a:spcAft>
+                <a:spcPts val="0"/>
+              </a:spcAft>
+              <a:buClr>
+                <a:srgbClr val="000000"/>
+              </a:buClr>
+              <a:buSzPts val="1900"/>
+              <a:buFont typeface="Arial"/>
+              <a:buNone/>
+              <a:defRPr sz="1900" b="0" i="0" u="none" strike="noStrike" cap="none">
                 <a:solidFill>
                   <a:schemeClr val="dk2"/>
                 </a:solidFill>
@@ -4568,23 +4653,23 @@
                 <a:sym typeface="Arial"/>
               </a:defRPr>
             </a:lvl5pPr>
-            <a:lvl6pPr indent="0" lvl="5" marL="0" marR="0" algn="r">
-              <a:lnSpc>
-                <a:spcPct val="100000"/>
-              </a:lnSpc>
-              <a:spcBef>
-                <a:spcPts val="0"/>
-              </a:spcBef>
-              <a:spcAft>
-                <a:spcPts val="0"/>
-              </a:spcAft>
-              <a:buClr>
-                <a:srgbClr val="000000"/>
-              </a:buClr>
-              <a:buSzPts val="1900"/>
-              <a:buFont typeface="Arial"/>
-              <a:buNone/>
-              <a:defRPr b="0" i="0" sz="1900" u="none" cap="none" strike="noStrike">
+            <a:lvl6pPr marL="0" marR="0" lvl="5" indent="0" algn="r">
+              <a:lnSpc>
+                <a:spcPct val="100000"/>
+              </a:lnSpc>
+              <a:spcBef>
+                <a:spcPts val="0"/>
+              </a:spcBef>
+              <a:spcAft>
+                <a:spcPts val="0"/>
+              </a:spcAft>
+              <a:buClr>
+                <a:srgbClr val="000000"/>
+              </a:buClr>
+              <a:buSzPts val="1900"/>
+              <a:buFont typeface="Arial"/>
+              <a:buNone/>
+              <a:defRPr sz="1900" b="0" i="0" u="none" strike="noStrike" cap="none">
                 <a:solidFill>
                   <a:schemeClr val="dk2"/>
                 </a:solidFill>
@@ -4594,23 +4679,23 @@
                 <a:sym typeface="Arial"/>
               </a:defRPr>
             </a:lvl6pPr>
-            <a:lvl7pPr indent="0" lvl="6" marL="0" marR="0" algn="r">
-              <a:lnSpc>
-                <a:spcPct val="100000"/>
-              </a:lnSpc>
-              <a:spcBef>
-                <a:spcPts val="0"/>
-              </a:spcBef>
-              <a:spcAft>
-                <a:spcPts val="0"/>
-              </a:spcAft>
-              <a:buClr>
-                <a:srgbClr val="000000"/>
-              </a:buClr>
-              <a:buSzPts val="1900"/>
-              <a:buFont typeface="Arial"/>
-              <a:buNone/>
-              <a:defRPr b="0" i="0" sz="1900" u="none" cap="none" strike="noStrike">
+            <a:lvl7pPr marL="0" marR="0" lvl="6" indent="0" algn="r">
+              <a:lnSpc>
+                <a:spcPct val="100000"/>
+              </a:lnSpc>
+              <a:spcBef>
+                <a:spcPts val="0"/>
+              </a:spcBef>
+              <a:spcAft>
+                <a:spcPts val="0"/>
+              </a:spcAft>
+              <a:buClr>
+                <a:srgbClr val="000000"/>
+              </a:buClr>
+              <a:buSzPts val="1900"/>
+              <a:buFont typeface="Arial"/>
+              <a:buNone/>
+              <a:defRPr sz="1900" b="0" i="0" u="none" strike="noStrike" cap="none">
                 <a:solidFill>
                   <a:schemeClr val="dk2"/>
                 </a:solidFill>
@@ -4620,23 +4705,23 @@
                 <a:sym typeface="Arial"/>
               </a:defRPr>
             </a:lvl7pPr>
-            <a:lvl8pPr indent="0" lvl="7" marL="0" marR="0" algn="r">
-              <a:lnSpc>
-                <a:spcPct val="100000"/>
-              </a:lnSpc>
-              <a:spcBef>
-                <a:spcPts val="0"/>
-              </a:spcBef>
-              <a:spcAft>
-                <a:spcPts val="0"/>
-              </a:spcAft>
-              <a:buClr>
-                <a:srgbClr val="000000"/>
-              </a:buClr>
-              <a:buSzPts val="1900"/>
-              <a:buFont typeface="Arial"/>
-              <a:buNone/>
-              <a:defRPr b="0" i="0" sz="1900" u="none" cap="none" strike="noStrike">
+            <a:lvl8pPr marL="0" marR="0" lvl="7" indent="0" algn="r">
+              <a:lnSpc>
+                <a:spcPct val="100000"/>
+              </a:lnSpc>
+              <a:spcBef>
+                <a:spcPts val="0"/>
+              </a:spcBef>
+              <a:spcAft>
+                <a:spcPts val="0"/>
+              </a:spcAft>
+              <a:buClr>
+                <a:srgbClr val="000000"/>
+              </a:buClr>
+              <a:buSzPts val="1900"/>
+              <a:buFont typeface="Arial"/>
+              <a:buNone/>
+              <a:defRPr sz="1900" b="0" i="0" u="none" strike="noStrike" cap="none">
                 <a:solidFill>
                   <a:schemeClr val="dk2"/>
                 </a:solidFill>
@@ -4646,23 +4731,23 @@
                 <a:sym typeface="Arial"/>
               </a:defRPr>
             </a:lvl8pPr>
-            <a:lvl9pPr indent="0" lvl="8" marL="0" marR="0" algn="r">
-              <a:lnSpc>
-                <a:spcPct val="100000"/>
-              </a:lnSpc>
-              <a:spcBef>
-                <a:spcPts val="0"/>
-              </a:spcBef>
-              <a:spcAft>
-                <a:spcPts val="0"/>
-              </a:spcAft>
-              <a:buClr>
-                <a:srgbClr val="000000"/>
-              </a:buClr>
-              <a:buSzPts val="1900"/>
-              <a:buFont typeface="Arial"/>
-              <a:buNone/>
-              <a:defRPr b="0" i="0" sz="1900" u="none" cap="none" strike="noStrike">
+            <a:lvl9pPr marL="0" marR="0" lvl="8" indent="0" algn="r">
+              <a:lnSpc>
+                <a:spcPct val="100000"/>
+              </a:lnSpc>
+              <a:spcBef>
+                <a:spcPts val="0"/>
+              </a:spcBef>
+              <a:spcAft>
+                <a:spcPts val="0"/>
+              </a:spcAft>
+              <a:buClr>
+                <a:srgbClr val="000000"/>
+              </a:buClr>
+              <a:buSzPts val="1900"/>
+              <a:buFont typeface="Arial"/>
+              <a:buNone/>
+              <a:defRPr sz="1900" b="0" i="0" u="none" strike="noStrike" cap="none">
                 <a:solidFill>
                   <a:schemeClr val="dk2"/>
                 </a:solidFill>
@@ -4674,7 +4759,7 @@
             </a:lvl9pPr>
           </a:lstStyle>
           <a:p>
-            <a:pPr indent="0" lvl="0" marL="0" rtl="0" algn="r">
+            <a:pPr marL="0" lvl="0" indent="0" algn="r" rtl="0">
               <a:spcBef>
                 <a:spcPts val="0"/>
               </a:spcBef>
@@ -4700,11 +4785,11 @@
 </file>
 
 <file path=ppt/slideLayouts/slideLayout5.xml><?xml version="1.0" encoding="utf-8"?>
-<p:sldLayout xmlns:a="http://schemas.openxmlformats.org/drawingml/2006/main" xmlns:r="http://schemas.openxmlformats.org/officeDocument/2006/relationships" xmlns:mc="http://schemas.openxmlformats.org/markup-compatibility/2006" xmlns:mv="urn:schemas-microsoft-com:mac:vml" xmlns:p="http://schemas.openxmlformats.org/presentationml/2006/main" xmlns:c="http://schemas.openxmlformats.org/drawingml/2006/chart" xmlns:dgm="http://schemas.openxmlformats.org/drawingml/2006/diagram" xmlns:o="urn:schemas-microsoft-com:office:office" xmlns:v="urn:schemas-microsoft-com:vml" xmlns:pvml="urn:schemas-microsoft-com:office:powerpoint" xmlns:com="http://schemas.openxmlformats.org/drawingml/2006/compatibility" xmlns:p14="http://schemas.microsoft.com/office/powerpoint/2010/main" xmlns:p15="http://schemas.microsoft.com/office/powerpoint/2012/main" xmlns:ahyp="http://schemas.microsoft.com/office/drawing/2018/hyperlinkcolor" matchingName="Title only" type="titleOnly">
+<p:sldLayout xmlns:a="http://schemas.openxmlformats.org/drawingml/2006/main" xmlns:r="http://schemas.openxmlformats.org/officeDocument/2006/relationships" xmlns:p="http://schemas.openxmlformats.org/presentationml/2006/main" matchingName="Title only" type="titleOnly">
   <p:cSld name="TITLE_ONLY">
     <p:spTree>
       <p:nvGrpSpPr>
-        <p:cNvPr id="25" name="Shape 25"/>
+        <p:cNvPr id="1" name="Shape 25"/>
         <p:cNvGrpSpPr/>
         <p:nvPr/>
       </p:nvGrpSpPr>
@@ -4719,7 +4804,9 @@
       <p:sp>
         <p:nvSpPr>
           <p:cNvPr id="26" name="Google Shape;26;p6"/>
-          <p:cNvSpPr txBox="1"/>
+          <p:cNvSpPr txBox="1">
+            <a:spLocks noGrp="1"/>
+          </p:cNvSpPr>
           <p:nvPr>
             <p:ph type="title"/>
           </p:nvPr>
@@ -4738,7 +4825,7 @@
           </a:ln>
         </p:spPr>
         <p:txBody>
-          <a:bodyPr anchorCtr="0" anchor="t" bIns="176925" lIns="176925" spcFirstLastPara="1" rIns="176925" wrap="square" tIns="176925">
+          <a:bodyPr spcFirstLastPara="1" wrap="square" lIns="176925" tIns="176925" rIns="176925" bIns="176925" anchor="t" anchorCtr="0">
             <a:normAutofit/>
           </a:bodyPr>
           <a:lstStyle>
@@ -4869,15 +4956,19 @@
               <a:defRPr/>
             </a:lvl9pPr>
           </a:lstStyle>
-          <a:p/>
+          <a:p>
+            <a:endParaRPr/>
+          </a:p>
         </p:txBody>
       </p:sp>
       <p:sp>
         <p:nvSpPr>
           <p:cNvPr id="27" name="Google Shape;27;p6"/>
-          <p:cNvSpPr txBox="1"/>
+          <p:cNvSpPr txBox="1">
+            <a:spLocks noGrp="1"/>
+          </p:cNvSpPr>
           <p:nvPr>
-            <p:ph idx="12" type="sldNum"/>
+            <p:ph type="sldNum" idx="12"/>
           </p:nvPr>
         </p:nvSpPr>
         <p:spPr>
@@ -4894,27 +4985,27 @@
           </a:ln>
         </p:spPr>
         <p:txBody>
-          <a:bodyPr anchorCtr="0" anchor="ctr" bIns="176925" lIns="176925" spcFirstLastPara="1" rIns="176925" wrap="square" tIns="176925">
+          <a:bodyPr spcFirstLastPara="1" wrap="square" lIns="176925" tIns="176925" rIns="176925" bIns="176925" anchor="ctr" anchorCtr="0">
             <a:normAutofit/>
           </a:bodyPr>
           <a:lstStyle>
-            <a:lvl1pPr indent="0" lvl="0" marL="0" marR="0" algn="r">
-              <a:lnSpc>
-                <a:spcPct val="100000"/>
-              </a:lnSpc>
-              <a:spcBef>
-                <a:spcPts val="0"/>
-              </a:spcBef>
-              <a:spcAft>
-                <a:spcPts val="0"/>
-              </a:spcAft>
-              <a:buClr>
-                <a:srgbClr val="000000"/>
-              </a:buClr>
-              <a:buSzPts val="1900"/>
-              <a:buFont typeface="Arial"/>
-              <a:buNone/>
-              <a:defRPr b="0" i="0" sz="1900" u="none" cap="none" strike="noStrike">
+            <a:lvl1pPr marL="0" marR="0" lvl="0" indent="0" algn="r">
+              <a:lnSpc>
+                <a:spcPct val="100000"/>
+              </a:lnSpc>
+              <a:spcBef>
+                <a:spcPts val="0"/>
+              </a:spcBef>
+              <a:spcAft>
+                <a:spcPts val="0"/>
+              </a:spcAft>
+              <a:buClr>
+                <a:srgbClr val="000000"/>
+              </a:buClr>
+              <a:buSzPts val="1900"/>
+              <a:buFont typeface="Arial"/>
+              <a:buNone/>
+              <a:defRPr sz="1900" b="0" i="0" u="none" strike="noStrike" cap="none">
                 <a:solidFill>
                   <a:schemeClr val="dk2"/>
                 </a:solidFill>
@@ -4924,23 +5015,23 @@
                 <a:sym typeface="Arial"/>
               </a:defRPr>
             </a:lvl1pPr>
-            <a:lvl2pPr indent="0" lvl="1" marL="0" marR="0" algn="r">
-              <a:lnSpc>
-                <a:spcPct val="100000"/>
-              </a:lnSpc>
-              <a:spcBef>
-                <a:spcPts val="0"/>
-              </a:spcBef>
-              <a:spcAft>
-                <a:spcPts val="0"/>
-              </a:spcAft>
-              <a:buClr>
-                <a:srgbClr val="000000"/>
-              </a:buClr>
-              <a:buSzPts val="1900"/>
-              <a:buFont typeface="Arial"/>
-              <a:buNone/>
-              <a:defRPr b="0" i="0" sz="1900" u="none" cap="none" strike="noStrike">
+            <a:lvl2pPr marL="0" marR="0" lvl="1" indent="0" algn="r">
+              <a:lnSpc>
+                <a:spcPct val="100000"/>
+              </a:lnSpc>
+              <a:spcBef>
+                <a:spcPts val="0"/>
+              </a:spcBef>
+              <a:spcAft>
+                <a:spcPts val="0"/>
+              </a:spcAft>
+              <a:buClr>
+                <a:srgbClr val="000000"/>
+              </a:buClr>
+              <a:buSzPts val="1900"/>
+              <a:buFont typeface="Arial"/>
+              <a:buNone/>
+              <a:defRPr sz="1900" b="0" i="0" u="none" strike="noStrike" cap="none">
                 <a:solidFill>
                   <a:schemeClr val="dk2"/>
                 </a:solidFill>
@@ -4950,23 +5041,23 @@
                 <a:sym typeface="Arial"/>
               </a:defRPr>
             </a:lvl2pPr>
-            <a:lvl3pPr indent="0" lvl="2" marL="0" marR="0" algn="r">
-              <a:lnSpc>
-                <a:spcPct val="100000"/>
-              </a:lnSpc>
-              <a:spcBef>
-                <a:spcPts val="0"/>
-              </a:spcBef>
-              <a:spcAft>
-                <a:spcPts val="0"/>
-              </a:spcAft>
-              <a:buClr>
-                <a:srgbClr val="000000"/>
-              </a:buClr>
-              <a:buSzPts val="1900"/>
-              <a:buFont typeface="Arial"/>
-              <a:buNone/>
-              <a:defRPr b="0" i="0" sz="1900" u="none" cap="none" strike="noStrike">
+            <a:lvl3pPr marL="0" marR="0" lvl="2" indent="0" algn="r">
+              <a:lnSpc>
+                <a:spcPct val="100000"/>
+              </a:lnSpc>
+              <a:spcBef>
+                <a:spcPts val="0"/>
+              </a:spcBef>
+              <a:spcAft>
+                <a:spcPts val="0"/>
+              </a:spcAft>
+              <a:buClr>
+                <a:srgbClr val="000000"/>
+              </a:buClr>
+              <a:buSzPts val="1900"/>
+              <a:buFont typeface="Arial"/>
+              <a:buNone/>
+              <a:defRPr sz="1900" b="0" i="0" u="none" strike="noStrike" cap="none">
                 <a:solidFill>
                   <a:schemeClr val="dk2"/>
                 </a:solidFill>
@@ -4976,23 +5067,23 @@
                 <a:sym typeface="Arial"/>
               </a:defRPr>
             </a:lvl3pPr>
-            <a:lvl4pPr indent="0" lvl="3" marL="0" marR="0" algn="r">
-              <a:lnSpc>
-                <a:spcPct val="100000"/>
-              </a:lnSpc>
-              <a:spcBef>
-                <a:spcPts val="0"/>
-              </a:spcBef>
-              <a:spcAft>
-                <a:spcPts val="0"/>
-              </a:spcAft>
-              <a:buClr>
-                <a:srgbClr val="000000"/>
-              </a:buClr>
-              <a:buSzPts val="1900"/>
-              <a:buFont typeface="Arial"/>
-              <a:buNone/>
-              <a:defRPr b="0" i="0" sz="1900" u="none" cap="none" strike="noStrike">
+            <a:lvl4pPr marL="0" marR="0" lvl="3" indent="0" algn="r">
+              <a:lnSpc>
+                <a:spcPct val="100000"/>
+              </a:lnSpc>
+              <a:spcBef>
+                <a:spcPts val="0"/>
+              </a:spcBef>
+              <a:spcAft>
+                <a:spcPts val="0"/>
+              </a:spcAft>
+              <a:buClr>
+                <a:srgbClr val="000000"/>
+              </a:buClr>
+              <a:buSzPts val="1900"/>
+              <a:buFont typeface="Arial"/>
+              <a:buNone/>
+              <a:defRPr sz="1900" b="0" i="0" u="none" strike="noStrike" cap="none">
                 <a:solidFill>
                   <a:schemeClr val="dk2"/>
                 </a:solidFill>
@@ -5002,23 +5093,23 @@
                 <a:sym typeface="Arial"/>
               </a:defRPr>
             </a:lvl4pPr>
-            <a:lvl5pPr indent="0" lvl="4" marL="0" marR="0" algn="r">
-              <a:lnSpc>
-                <a:spcPct val="100000"/>
-              </a:lnSpc>
-              <a:spcBef>
-                <a:spcPts val="0"/>
-              </a:spcBef>
-              <a:spcAft>
-                <a:spcPts val="0"/>
-              </a:spcAft>
-              <a:buClr>
-                <a:srgbClr val="000000"/>
-              </a:buClr>
-              <a:buSzPts val="1900"/>
-              <a:buFont typeface="Arial"/>
-              <a:buNone/>
-              <a:defRPr b="0" i="0" sz="1900" u="none" cap="none" strike="noStrike">
+            <a:lvl5pPr marL="0" marR="0" lvl="4" indent="0" algn="r">
+              <a:lnSpc>
+                <a:spcPct val="100000"/>
+              </a:lnSpc>
+              <a:spcBef>
+                <a:spcPts val="0"/>
+              </a:spcBef>
+              <a:spcAft>
+                <a:spcPts val="0"/>
+              </a:spcAft>
+              <a:buClr>
+                <a:srgbClr val="000000"/>
+              </a:buClr>
+              <a:buSzPts val="1900"/>
+              <a:buFont typeface="Arial"/>
+              <a:buNone/>
+              <a:defRPr sz="1900" b="0" i="0" u="none" strike="noStrike" cap="none">
                 <a:solidFill>
                   <a:schemeClr val="dk2"/>
                 </a:solidFill>
@@ -5028,23 +5119,23 @@
                 <a:sym typeface="Arial"/>
               </a:defRPr>
             </a:lvl5pPr>
-            <a:lvl6pPr indent="0" lvl="5" marL="0" marR="0" algn="r">
-              <a:lnSpc>
-                <a:spcPct val="100000"/>
-              </a:lnSpc>
-              <a:spcBef>
-                <a:spcPts val="0"/>
-              </a:spcBef>
-              <a:spcAft>
-                <a:spcPts val="0"/>
-              </a:spcAft>
-              <a:buClr>
-                <a:srgbClr val="000000"/>
-              </a:buClr>
-              <a:buSzPts val="1900"/>
-              <a:buFont typeface="Arial"/>
-              <a:buNone/>
-              <a:defRPr b="0" i="0" sz="1900" u="none" cap="none" strike="noStrike">
+            <a:lvl6pPr marL="0" marR="0" lvl="5" indent="0" algn="r">
+              <a:lnSpc>
+                <a:spcPct val="100000"/>
+              </a:lnSpc>
+              <a:spcBef>
+                <a:spcPts val="0"/>
+              </a:spcBef>
+              <a:spcAft>
+                <a:spcPts val="0"/>
+              </a:spcAft>
+              <a:buClr>
+                <a:srgbClr val="000000"/>
+              </a:buClr>
+              <a:buSzPts val="1900"/>
+              <a:buFont typeface="Arial"/>
+              <a:buNone/>
+              <a:defRPr sz="1900" b="0" i="0" u="none" strike="noStrike" cap="none">
                 <a:solidFill>
                   <a:schemeClr val="dk2"/>
                 </a:solidFill>
@@ -5054,23 +5145,23 @@
                 <a:sym typeface="Arial"/>
               </a:defRPr>
             </a:lvl6pPr>
-            <a:lvl7pPr indent="0" lvl="6" marL="0" marR="0" algn="r">
-              <a:lnSpc>
-                <a:spcPct val="100000"/>
-              </a:lnSpc>
-              <a:spcBef>
-                <a:spcPts val="0"/>
-              </a:spcBef>
-              <a:spcAft>
-                <a:spcPts val="0"/>
-              </a:spcAft>
-              <a:buClr>
-                <a:srgbClr val="000000"/>
-              </a:buClr>
-              <a:buSzPts val="1900"/>
-              <a:buFont typeface="Arial"/>
-              <a:buNone/>
-              <a:defRPr b="0" i="0" sz="1900" u="none" cap="none" strike="noStrike">
+            <a:lvl7pPr marL="0" marR="0" lvl="6" indent="0" algn="r">
+              <a:lnSpc>
+                <a:spcPct val="100000"/>
+              </a:lnSpc>
+              <a:spcBef>
+                <a:spcPts val="0"/>
+              </a:spcBef>
+              <a:spcAft>
+                <a:spcPts val="0"/>
+              </a:spcAft>
+              <a:buClr>
+                <a:srgbClr val="000000"/>
+              </a:buClr>
+              <a:buSzPts val="1900"/>
+              <a:buFont typeface="Arial"/>
+              <a:buNone/>
+              <a:defRPr sz="1900" b="0" i="0" u="none" strike="noStrike" cap="none">
                 <a:solidFill>
                   <a:schemeClr val="dk2"/>
                 </a:solidFill>
@@ -5080,23 +5171,23 @@
                 <a:sym typeface="Arial"/>
               </a:defRPr>
             </a:lvl7pPr>
-            <a:lvl8pPr indent="0" lvl="7" marL="0" marR="0" algn="r">
-              <a:lnSpc>
-                <a:spcPct val="100000"/>
-              </a:lnSpc>
-              <a:spcBef>
-                <a:spcPts val="0"/>
-              </a:spcBef>
-              <a:spcAft>
-                <a:spcPts val="0"/>
-              </a:spcAft>
-              <a:buClr>
-                <a:srgbClr val="000000"/>
-              </a:buClr>
-              <a:buSzPts val="1900"/>
-              <a:buFont typeface="Arial"/>
-              <a:buNone/>
-              <a:defRPr b="0" i="0" sz="1900" u="none" cap="none" strike="noStrike">
+            <a:lvl8pPr marL="0" marR="0" lvl="7" indent="0" algn="r">
+              <a:lnSpc>
+                <a:spcPct val="100000"/>
+              </a:lnSpc>
+              <a:spcBef>
+                <a:spcPts val="0"/>
+              </a:spcBef>
+              <a:spcAft>
+                <a:spcPts val="0"/>
+              </a:spcAft>
+              <a:buClr>
+                <a:srgbClr val="000000"/>
+              </a:buClr>
+              <a:buSzPts val="1900"/>
+              <a:buFont typeface="Arial"/>
+              <a:buNone/>
+              <a:defRPr sz="1900" b="0" i="0" u="none" strike="noStrike" cap="none">
                 <a:solidFill>
                   <a:schemeClr val="dk2"/>
                 </a:solidFill>
@@ -5106,23 +5197,23 @@
                 <a:sym typeface="Arial"/>
               </a:defRPr>
             </a:lvl8pPr>
-            <a:lvl9pPr indent="0" lvl="8" marL="0" marR="0" algn="r">
-              <a:lnSpc>
-                <a:spcPct val="100000"/>
-              </a:lnSpc>
-              <a:spcBef>
-                <a:spcPts val="0"/>
-              </a:spcBef>
-              <a:spcAft>
-                <a:spcPts val="0"/>
-              </a:spcAft>
-              <a:buClr>
-                <a:srgbClr val="000000"/>
-              </a:buClr>
-              <a:buSzPts val="1900"/>
-              <a:buFont typeface="Arial"/>
-              <a:buNone/>
-              <a:defRPr b="0" i="0" sz="1900" u="none" cap="none" strike="noStrike">
+            <a:lvl9pPr marL="0" marR="0" lvl="8" indent="0" algn="r">
+              <a:lnSpc>
+                <a:spcPct val="100000"/>
+              </a:lnSpc>
+              <a:spcBef>
+                <a:spcPts val="0"/>
+              </a:spcBef>
+              <a:spcAft>
+                <a:spcPts val="0"/>
+              </a:spcAft>
+              <a:buClr>
+                <a:srgbClr val="000000"/>
+              </a:buClr>
+              <a:buSzPts val="1900"/>
+              <a:buFont typeface="Arial"/>
+              <a:buNone/>
+              <a:defRPr sz="1900" b="0" i="0" u="none" strike="noStrike" cap="none">
                 <a:solidFill>
                   <a:schemeClr val="dk2"/>
                 </a:solidFill>
@@ -5134,7 +5225,7 @@
             </a:lvl9pPr>
           </a:lstStyle>
           <a:p>
-            <a:pPr indent="0" lvl="0" marL="0" rtl="0" algn="r">
+            <a:pPr marL="0" lvl="0" indent="0" algn="r" rtl="0">
               <a:spcBef>
                 <a:spcPts val="0"/>
               </a:spcBef>
@@ -5160,11 +5251,11 @@
 </file>
 
 <file path=ppt/slideLayouts/slideLayout6.xml><?xml version="1.0" encoding="utf-8"?>
-<p:sldLayout xmlns:a="http://schemas.openxmlformats.org/drawingml/2006/main" xmlns:r="http://schemas.openxmlformats.org/officeDocument/2006/relationships" xmlns:mc="http://schemas.openxmlformats.org/markup-compatibility/2006" xmlns:mv="urn:schemas-microsoft-com:mac:vml" xmlns:p="http://schemas.openxmlformats.org/presentationml/2006/main" xmlns:c="http://schemas.openxmlformats.org/drawingml/2006/chart" xmlns:dgm="http://schemas.openxmlformats.org/drawingml/2006/diagram" xmlns:o="urn:schemas-microsoft-com:office:office" xmlns:v="urn:schemas-microsoft-com:vml" xmlns:pvml="urn:schemas-microsoft-com:office:powerpoint" xmlns:com="http://schemas.openxmlformats.org/drawingml/2006/compatibility" xmlns:p14="http://schemas.microsoft.com/office/powerpoint/2010/main" xmlns:p15="http://schemas.microsoft.com/office/powerpoint/2012/main" xmlns:ahyp="http://schemas.microsoft.com/office/drawing/2018/hyperlinkcolor" matchingName="One column text">
+<p:sldLayout xmlns:a="http://schemas.openxmlformats.org/drawingml/2006/main" xmlns:r="http://schemas.openxmlformats.org/officeDocument/2006/relationships" xmlns:p="http://schemas.openxmlformats.org/presentationml/2006/main" matchingName="One column text">
   <p:cSld name="ONE_COLUMN_TEXT">
     <p:spTree>
       <p:nvGrpSpPr>
-        <p:cNvPr id="28" name="Shape 28"/>
+        <p:cNvPr id="1" name="Shape 28"/>
         <p:cNvGrpSpPr/>
         <p:nvPr/>
       </p:nvGrpSpPr>
@@ -5179,7 +5270,9 @@
       <p:sp>
         <p:nvSpPr>
           <p:cNvPr id="29" name="Google Shape;29;p7"/>
-          <p:cNvSpPr txBox="1"/>
+          <p:cNvSpPr txBox="1">
+            <a:spLocks noGrp="1"/>
+          </p:cNvSpPr>
           <p:nvPr>
             <p:ph type="title"/>
           </p:nvPr>
@@ -5198,7 +5291,7 @@
           </a:ln>
         </p:spPr>
         <p:txBody>
-          <a:bodyPr anchorCtr="0" anchor="b" bIns="176925" lIns="176925" spcFirstLastPara="1" rIns="176925" wrap="square" tIns="176925">
+          <a:bodyPr spcFirstLastPara="1" wrap="square" lIns="176925" tIns="176925" rIns="176925" bIns="176925" anchor="b" anchorCtr="0">
             <a:normAutofit/>
           </a:bodyPr>
           <a:lstStyle>
@@ -5329,15 +5422,19 @@
               <a:defRPr sz="4600"/>
             </a:lvl9pPr>
           </a:lstStyle>
-          <a:p/>
+          <a:p>
+            <a:endParaRPr/>
+          </a:p>
         </p:txBody>
       </p:sp>
       <p:sp>
         <p:nvSpPr>
           <p:cNvPr id="30" name="Google Shape;30;p7"/>
-          <p:cNvSpPr txBox="1"/>
+          <p:cNvSpPr txBox="1">
+            <a:spLocks noGrp="1"/>
+          </p:cNvSpPr>
           <p:nvPr>
-            <p:ph idx="1" type="body"/>
+            <p:ph type="body" idx="1"/>
           </p:nvPr>
         </p:nvSpPr>
         <p:spPr>
@@ -5354,11 +5451,11 @@
           </a:ln>
         </p:spPr>
         <p:txBody>
-          <a:bodyPr anchorCtr="0" anchor="t" bIns="176925" lIns="176925" spcFirstLastPara="1" rIns="176925" wrap="square" tIns="176925">
+          <a:bodyPr spcFirstLastPara="1" wrap="square" lIns="176925" tIns="176925" rIns="176925" bIns="176925" anchor="t" anchorCtr="0">
             <a:normAutofit/>
           </a:bodyPr>
           <a:lstStyle>
-            <a:lvl1pPr indent="-374650" lvl="0" marL="457200" algn="l">
+            <a:lvl1pPr marL="457200" lvl="0" indent="-374650" algn="l">
               <a:lnSpc>
                 <a:spcPct val="115000"/>
               </a:lnSpc>
@@ -5372,7 +5469,7 @@
               <a:buChar char="●"/>
               <a:defRPr sz="2300"/>
             </a:lvl1pPr>
-            <a:lvl2pPr indent="-374650" lvl="1" marL="914400" algn="l">
+            <a:lvl2pPr marL="914400" lvl="1" indent="-374650" algn="l">
               <a:lnSpc>
                 <a:spcPct val="115000"/>
               </a:lnSpc>
@@ -5386,7 +5483,7 @@
               <a:buChar char="○"/>
               <a:defRPr sz="2300"/>
             </a:lvl2pPr>
-            <a:lvl3pPr indent="-374650" lvl="2" marL="1371600" algn="l">
+            <a:lvl3pPr marL="1371600" lvl="2" indent="-374650" algn="l">
               <a:lnSpc>
                 <a:spcPct val="115000"/>
               </a:lnSpc>
@@ -5400,7 +5497,7 @@
               <a:buChar char="■"/>
               <a:defRPr sz="2300"/>
             </a:lvl3pPr>
-            <a:lvl4pPr indent="-374650" lvl="3" marL="1828800" algn="l">
+            <a:lvl4pPr marL="1828800" lvl="3" indent="-374650" algn="l">
               <a:lnSpc>
                 <a:spcPct val="115000"/>
               </a:lnSpc>
@@ -5414,7 +5511,7 @@
               <a:buChar char="●"/>
               <a:defRPr sz="2300"/>
             </a:lvl4pPr>
-            <a:lvl5pPr indent="-374650" lvl="4" marL="2286000" algn="l">
+            <a:lvl5pPr marL="2286000" lvl="4" indent="-374650" algn="l">
               <a:lnSpc>
                 <a:spcPct val="115000"/>
               </a:lnSpc>
@@ -5428,7 +5525,7 @@
               <a:buChar char="○"/>
               <a:defRPr sz="2300"/>
             </a:lvl5pPr>
-            <a:lvl6pPr indent="-374650" lvl="5" marL="2743200" algn="l">
+            <a:lvl6pPr marL="2743200" lvl="5" indent="-374650" algn="l">
               <a:lnSpc>
                 <a:spcPct val="115000"/>
               </a:lnSpc>
@@ -5442,7 +5539,7 @@
               <a:buChar char="■"/>
               <a:defRPr sz="2300"/>
             </a:lvl6pPr>
-            <a:lvl7pPr indent="-374650" lvl="6" marL="3200400" algn="l">
+            <a:lvl7pPr marL="3200400" lvl="6" indent="-374650" algn="l">
               <a:lnSpc>
                 <a:spcPct val="115000"/>
               </a:lnSpc>
@@ -5456,7 +5553,7 @@
               <a:buChar char="●"/>
               <a:defRPr sz="2300"/>
             </a:lvl7pPr>
-            <a:lvl8pPr indent="-374650" lvl="7" marL="3657600" algn="l">
+            <a:lvl8pPr marL="3657600" lvl="7" indent="-374650" algn="l">
               <a:lnSpc>
                 <a:spcPct val="115000"/>
               </a:lnSpc>
@@ -5470,7 +5567,7 @@
               <a:buChar char="○"/>
               <a:defRPr sz="2300"/>
             </a:lvl8pPr>
-            <a:lvl9pPr indent="-374650" lvl="8" marL="4114800" algn="l">
+            <a:lvl9pPr marL="4114800" lvl="8" indent="-374650" algn="l">
               <a:lnSpc>
                 <a:spcPct val="115000"/>
               </a:lnSpc>
@@ -5485,15 +5582,19 @@
               <a:defRPr sz="2300"/>
             </a:lvl9pPr>
           </a:lstStyle>
-          <a:p/>
+          <a:p>
+            <a:endParaRPr/>
+          </a:p>
         </p:txBody>
       </p:sp>
       <p:sp>
         <p:nvSpPr>
           <p:cNvPr id="31" name="Google Shape;31;p7"/>
-          <p:cNvSpPr txBox="1"/>
+          <p:cNvSpPr txBox="1">
+            <a:spLocks noGrp="1"/>
+          </p:cNvSpPr>
           <p:nvPr>
-            <p:ph idx="12" type="sldNum"/>
+            <p:ph type="sldNum" idx="12"/>
           </p:nvPr>
         </p:nvSpPr>
         <p:spPr>
@@ -5510,27 +5611,27 @@
           </a:ln>
         </p:spPr>
         <p:txBody>
-          <a:bodyPr anchorCtr="0" anchor="ctr" bIns="176925" lIns="176925" spcFirstLastPara="1" rIns="176925" wrap="square" tIns="176925">
+          <a:bodyPr spcFirstLastPara="1" wrap="square" lIns="176925" tIns="176925" rIns="176925" bIns="176925" anchor="ctr" anchorCtr="0">
             <a:normAutofit/>
           </a:bodyPr>
           <a:lstStyle>
-            <a:lvl1pPr indent="0" lvl="0" marL="0" marR="0" algn="r">
-              <a:lnSpc>
-                <a:spcPct val="100000"/>
-              </a:lnSpc>
-              <a:spcBef>
-                <a:spcPts val="0"/>
-              </a:spcBef>
-              <a:spcAft>
-                <a:spcPts val="0"/>
-              </a:spcAft>
-              <a:buClr>
-                <a:srgbClr val="000000"/>
-              </a:buClr>
-              <a:buSzPts val="1900"/>
-              <a:buFont typeface="Arial"/>
-              <a:buNone/>
-              <a:defRPr b="0" i="0" sz="1900" u="none" cap="none" strike="noStrike">
+            <a:lvl1pPr marL="0" marR="0" lvl="0" indent="0" algn="r">
+              <a:lnSpc>
+                <a:spcPct val="100000"/>
+              </a:lnSpc>
+              <a:spcBef>
+                <a:spcPts val="0"/>
+              </a:spcBef>
+              <a:spcAft>
+                <a:spcPts val="0"/>
+              </a:spcAft>
+              <a:buClr>
+                <a:srgbClr val="000000"/>
+              </a:buClr>
+              <a:buSzPts val="1900"/>
+              <a:buFont typeface="Arial"/>
+              <a:buNone/>
+              <a:defRPr sz="1900" b="0" i="0" u="none" strike="noStrike" cap="none">
                 <a:solidFill>
                   <a:schemeClr val="dk2"/>
                 </a:solidFill>
@@ -5540,23 +5641,23 @@
                 <a:sym typeface="Arial"/>
               </a:defRPr>
             </a:lvl1pPr>
-            <a:lvl2pPr indent="0" lvl="1" marL="0" marR="0" algn="r">
-              <a:lnSpc>
-                <a:spcPct val="100000"/>
-              </a:lnSpc>
-              <a:spcBef>
-                <a:spcPts val="0"/>
-              </a:spcBef>
-              <a:spcAft>
-                <a:spcPts val="0"/>
-              </a:spcAft>
-              <a:buClr>
-                <a:srgbClr val="000000"/>
-              </a:buClr>
-              <a:buSzPts val="1900"/>
-              <a:buFont typeface="Arial"/>
-              <a:buNone/>
-              <a:defRPr b="0" i="0" sz="1900" u="none" cap="none" strike="noStrike">
+            <a:lvl2pPr marL="0" marR="0" lvl="1" indent="0" algn="r">
+              <a:lnSpc>
+                <a:spcPct val="100000"/>
+              </a:lnSpc>
+              <a:spcBef>
+                <a:spcPts val="0"/>
+              </a:spcBef>
+              <a:spcAft>
+                <a:spcPts val="0"/>
+              </a:spcAft>
+              <a:buClr>
+                <a:srgbClr val="000000"/>
+              </a:buClr>
+              <a:buSzPts val="1900"/>
+              <a:buFont typeface="Arial"/>
+              <a:buNone/>
+              <a:defRPr sz="1900" b="0" i="0" u="none" strike="noStrike" cap="none">
                 <a:solidFill>
                   <a:schemeClr val="dk2"/>
                 </a:solidFill>
@@ -5566,23 +5667,23 @@
                 <a:sym typeface="Arial"/>
               </a:defRPr>
             </a:lvl2pPr>
-            <a:lvl3pPr indent="0" lvl="2" marL="0" marR="0" algn="r">
-              <a:lnSpc>
-                <a:spcPct val="100000"/>
-              </a:lnSpc>
-              <a:spcBef>
-                <a:spcPts val="0"/>
-              </a:spcBef>
-              <a:spcAft>
-                <a:spcPts val="0"/>
-              </a:spcAft>
-              <a:buClr>
-                <a:srgbClr val="000000"/>
-              </a:buClr>
-              <a:buSzPts val="1900"/>
-              <a:buFont typeface="Arial"/>
-              <a:buNone/>
-              <a:defRPr b="0" i="0" sz="1900" u="none" cap="none" strike="noStrike">
+            <a:lvl3pPr marL="0" marR="0" lvl="2" indent="0" algn="r">
+              <a:lnSpc>
+                <a:spcPct val="100000"/>
+              </a:lnSpc>
+              <a:spcBef>
+                <a:spcPts val="0"/>
+              </a:spcBef>
+              <a:spcAft>
+                <a:spcPts val="0"/>
+              </a:spcAft>
+              <a:buClr>
+                <a:srgbClr val="000000"/>
+              </a:buClr>
+              <a:buSzPts val="1900"/>
+              <a:buFont typeface="Arial"/>
+              <a:buNone/>
+              <a:defRPr sz="1900" b="0" i="0" u="none" strike="noStrike" cap="none">
                 <a:solidFill>
                   <a:schemeClr val="dk2"/>
                 </a:solidFill>
@@ -5592,23 +5693,23 @@
                 <a:sym typeface="Arial"/>
               </a:defRPr>
             </a:lvl3pPr>
-            <a:lvl4pPr indent="0" lvl="3" marL="0" marR="0" algn="r">
-              <a:lnSpc>
-                <a:spcPct val="100000"/>
-              </a:lnSpc>
-              <a:spcBef>
-                <a:spcPts val="0"/>
-              </a:spcBef>
-              <a:spcAft>
-                <a:spcPts val="0"/>
-              </a:spcAft>
-              <a:buClr>
-                <a:srgbClr val="000000"/>
-              </a:buClr>
-              <a:buSzPts val="1900"/>
-              <a:buFont typeface="Arial"/>
-              <a:buNone/>
-              <a:defRPr b="0" i="0" sz="1900" u="none" cap="none" strike="noStrike">
+            <a:lvl4pPr marL="0" marR="0" lvl="3" indent="0" algn="r">
+              <a:lnSpc>
+                <a:spcPct val="100000"/>
+              </a:lnSpc>
+              <a:spcBef>
+                <a:spcPts val="0"/>
+              </a:spcBef>
+              <a:spcAft>
+                <a:spcPts val="0"/>
+              </a:spcAft>
+              <a:buClr>
+                <a:srgbClr val="000000"/>
+              </a:buClr>
+              <a:buSzPts val="1900"/>
+              <a:buFont typeface="Arial"/>
+              <a:buNone/>
+              <a:defRPr sz="1900" b="0" i="0" u="none" strike="noStrike" cap="none">
                 <a:solidFill>
                   <a:schemeClr val="dk2"/>
                 </a:solidFill>
@@ -5618,23 +5719,23 @@
                 <a:sym typeface="Arial"/>
               </a:defRPr>
             </a:lvl4pPr>
-            <a:lvl5pPr indent="0" lvl="4" marL="0" marR="0" algn="r">
-              <a:lnSpc>
-                <a:spcPct val="100000"/>
-              </a:lnSpc>
-              <a:spcBef>
-                <a:spcPts val="0"/>
-              </a:spcBef>
-              <a:spcAft>
-                <a:spcPts val="0"/>
-              </a:spcAft>
-              <a:buClr>
-                <a:srgbClr val="000000"/>
-              </a:buClr>
-              <a:buSzPts val="1900"/>
-              <a:buFont typeface="Arial"/>
-              <a:buNone/>
-              <a:defRPr b="0" i="0" sz="1900" u="none" cap="none" strike="noStrike">
+            <a:lvl5pPr marL="0" marR="0" lvl="4" indent="0" algn="r">
+              <a:lnSpc>
+                <a:spcPct val="100000"/>
+              </a:lnSpc>
+              <a:spcBef>
+                <a:spcPts val="0"/>
+              </a:spcBef>
+              <a:spcAft>
+                <a:spcPts val="0"/>
+              </a:spcAft>
+              <a:buClr>
+                <a:srgbClr val="000000"/>
+              </a:buClr>
+              <a:buSzPts val="1900"/>
+              <a:buFont typeface="Arial"/>
+              <a:buNone/>
+              <a:defRPr sz="1900" b="0" i="0" u="none" strike="noStrike" cap="none">
                 <a:solidFill>
                   <a:schemeClr val="dk2"/>
                 </a:solidFill>
@@ -5644,23 +5745,23 @@
                 <a:sym typeface="Arial"/>
               </a:defRPr>
             </a:lvl5pPr>
-            <a:lvl6pPr indent="0" lvl="5" marL="0" marR="0" algn="r">
-              <a:lnSpc>
-                <a:spcPct val="100000"/>
-              </a:lnSpc>
-              <a:spcBef>
-                <a:spcPts val="0"/>
-              </a:spcBef>
-              <a:spcAft>
-                <a:spcPts val="0"/>
-              </a:spcAft>
-              <a:buClr>
-                <a:srgbClr val="000000"/>
-              </a:buClr>
-              <a:buSzPts val="1900"/>
-              <a:buFont typeface="Arial"/>
-              <a:buNone/>
-              <a:defRPr b="0" i="0" sz="1900" u="none" cap="none" strike="noStrike">
+            <a:lvl6pPr marL="0" marR="0" lvl="5" indent="0" algn="r">
+              <a:lnSpc>
+                <a:spcPct val="100000"/>
+              </a:lnSpc>
+              <a:spcBef>
+                <a:spcPts val="0"/>
+              </a:spcBef>
+              <a:spcAft>
+                <a:spcPts val="0"/>
+              </a:spcAft>
+              <a:buClr>
+                <a:srgbClr val="000000"/>
+              </a:buClr>
+              <a:buSzPts val="1900"/>
+              <a:buFont typeface="Arial"/>
+              <a:buNone/>
+              <a:defRPr sz="1900" b="0" i="0" u="none" strike="noStrike" cap="none">
                 <a:solidFill>
                   <a:schemeClr val="dk2"/>
                 </a:solidFill>
@@ -5670,23 +5771,23 @@
                 <a:sym typeface="Arial"/>
               </a:defRPr>
             </a:lvl6pPr>
-            <a:lvl7pPr indent="0" lvl="6" marL="0" marR="0" algn="r">
-              <a:lnSpc>
-                <a:spcPct val="100000"/>
-              </a:lnSpc>
-              <a:spcBef>
-                <a:spcPts val="0"/>
-              </a:spcBef>
-              <a:spcAft>
-                <a:spcPts val="0"/>
-              </a:spcAft>
-              <a:buClr>
-                <a:srgbClr val="000000"/>
-              </a:buClr>
-              <a:buSzPts val="1900"/>
-              <a:buFont typeface="Arial"/>
-              <a:buNone/>
-              <a:defRPr b="0" i="0" sz="1900" u="none" cap="none" strike="noStrike">
+            <a:lvl7pPr marL="0" marR="0" lvl="6" indent="0" algn="r">
+              <a:lnSpc>
+                <a:spcPct val="100000"/>
+              </a:lnSpc>
+              <a:spcBef>
+                <a:spcPts val="0"/>
+              </a:spcBef>
+              <a:spcAft>
+                <a:spcPts val="0"/>
+              </a:spcAft>
+              <a:buClr>
+                <a:srgbClr val="000000"/>
+              </a:buClr>
+              <a:buSzPts val="1900"/>
+              <a:buFont typeface="Arial"/>
+              <a:buNone/>
+              <a:defRPr sz="1900" b="0" i="0" u="none" strike="noStrike" cap="none">
                 <a:solidFill>
                   <a:schemeClr val="dk2"/>
                 </a:solidFill>
@@ -5696,23 +5797,23 @@
                 <a:sym typeface="Arial"/>
               </a:defRPr>
             </a:lvl7pPr>
-            <a:lvl8pPr indent="0" lvl="7" marL="0" marR="0" algn="r">
-              <a:lnSpc>
-                <a:spcPct val="100000"/>
-              </a:lnSpc>
-              <a:spcBef>
-                <a:spcPts val="0"/>
-              </a:spcBef>
-              <a:spcAft>
-                <a:spcPts val="0"/>
-              </a:spcAft>
-              <a:buClr>
-                <a:srgbClr val="000000"/>
-              </a:buClr>
-              <a:buSzPts val="1900"/>
-              <a:buFont typeface="Arial"/>
-              <a:buNone/>
-              <a:defRPr b="0" i="0" sz="1900" u="none" cap="none" strike="noStrike">
+            <a:lvl8pPr marL="0" marR="0" lvl="7" indent="0" algn="r">
+              <a:lnSpc>
+                <a:spcPct val="100000"/>
+              </a:lnSpc>
+              <a:spcBef>
+                <a:spcPts val="0"/>
+              </a:spcBef>
+              <a:spcAft>
+                <a:spcPts val="0"/>
+              </a:spcAft>
+              <a:buClr>
+                <a:srgbClr val="000000"/>
+              </a:buClr>
+              <a:buSzPts val="1900"/>
+              <a:buFont typeface="Arial"/>
+              <a:buNone/>
+              <a:defRPr sz="1900" b="0" i="0" u="none" strike="noStrike" cap="none">
                 <a:solidFill>
                   <a:schemeClr val="dk2"/>
                 </a:solidFill>
@@ -5722,23 +5823,23 @@
                 <a:sym typeface="Arial"/>
               </a:defRPr>
             </a:lvl8pPr>
-            <a:lvl9pPr indent="0" lvl="8" marL="0" marR="0" algn="r">
-              <a:lnSpc>
-                <a:spcPct val="100000"/>
-              </a:lnSpc>
-              <a:spcBef>
-                <a:spcPts val="0"/>
-              </a:spcBef>
-              <a:spcAft>
-                <a:spcPts val="0"/>
-              </a:spcAft>
-              <a:buClr>
-                <a:srgbClr val="000000"/>
-              </a:buClr>
-              <a:buSzPts val="1900"/>
-              <a:buFont typeface="Arial"/>
-              <a:buNone/>
-              <a:defRPr b="0" i="0" sz="1900" u="none" cap="none" strike="noStrike">
+            <a:lvl9pPr marL="0" marR="0" lvl="8" indent="0" algn="r">
+              <a:lnSpc>
+                <a:spcPct val="100000"/>
+              </a:lnSpc>
+              <a:spcBef>
+                <a:spcPts val="0"/>
+              </a:spcBef>
+              <a:spcAft>
+                <a:spcPts val="0"/>
+              </a:spcAft>
+              <a:buClr>
+                <a:srgbClr val="000000"/>
+              </a:buClr>
+              <a:buSzPts val="1900"/>
+              <a:buFont typeface="Arial"/>
+              <a:buNone/>
+              <a:defRPr sz="1900" b="0" i="0" u="none" strike="noStrike" cap="none">
                 <a:solidFill>
                   <a:schemeClr val="dk2"/>
                 </a:solidFill>
@@ -5750,7 +5851,7 @@
             </a:lvl9pPr>
           </a:lstStyle>
           <a:p>
-            <a:pPr indent="0" lvl="0" marL="0" rtl="0" algn="r">
+            <a:pPr marL="0" lvl="0" indent="0" algn="r" rtl="0">
               <a:spcBef>
                 <a:spcPts val="0"/>
               </a:spcBef>
@@ -5776,11 +5877,11 @@
 </file>
 
 <file path=ppt/slideLayouts/slideLayout7.xml><?xml version="1.0" encoding="utf-8"?>
-<p:sldLayout xmlns:a="http://schemas.openxmlformats.org/drawingml/2006/main" xmlns:r="http://schemas.openxmlformats.org/officeDocument/2006/relationships" xmlns:mc="http://schemas.openxmlformats.org/markup-compatibility/2006" xmlns:mv="urn:schemas-microsoft-com:mac:vml" xmlns:p="http://schemas.openxmlformats.org/presentationml/2006/main" xmlns:c="http://schemas.openxmlformats.org/drawingml/2006/chart" xmlns:dgm="http://schemas.openxmlformats.org/drawingml/2006/diagram" xmlns:o="urn:schemas-microsoft-com:office:office" xmlns:v="urn:schemas-microsoft-com:vml" xmlns:pvml="urn:schemas-microsoft-com:office:powerpoint" xmlns:com="http://schemas.openxmlformats.org/drawingml/2006/compatibility" xmlns:p14="http://schemas.microsoft.com/office/powerpoint/2010/main" xmlns:p15="http://schemas.microsoft.com/office/powerpoint/2012/main" xmlns:ahyp="http://schemas.microsoft.com/office/drawing/2018/hyperlinkcolor" matchingName="Main point">
+<p:sldLayout xmlns:a="http://schemas.openxmlformats.org/drawingml/2006/main" xmlns:r="http://schemas.openxmlformats.org/officeDocument/2006/relationships" xmlns:p="http://schemas.openxmlformats.org/presentationml/2006/main" matchingName="Main point">
   <p:cSld name="MAIN_POINT">
     <p:spTree>
       <p:nvGrpSpPr>
-        <p:cNvPr id="32" name="Shape 32"/>
+        <p:cNvPr id="1" name="Shape 32"/>
         <p:cNvGrpSpPr/>
         <p:nvPr/>
       </p:nvGrpSpPr>
@@ -5795,7 +5896,9 @@
       <p:sp>
         <p:nvSpPr>
           <p:cNvPr id="33" name="Google Shape;33;p8"/>
-          <p:cNvSpPr txBox="1"/>
+          <p:cNvSpPr txBox="1">
+            <a:spLocks noGrp="1"/>
+          </p:cNvSpPr>
           <p:nvPr>
             <p:ph type="title"/>
           </p:nvPr>
@@ -5814,7 +5917,7 @@
           </a:ln>
         </p:spPr>
         <p:txBody>
-          <a:bodyPr anchorCtr="0" anchor="ctr" bIns="176925" lIns="176925" spcFirstLastPara="1" rIns="176925" wrap="square" tIns="176925">
+          <a:bodyPr spcFirstLastPara="1" wrap="square" lIns="176925" tIns="176925" rIns="176925" bIns="176925" anchor="ctr" anchorCtr="0">
             <a:normAutofit/>
           </a:bodyPr>
           <a:lstStyle>
@@ -5945,15 +6048,19 @@
               <a:defRPr sz="9300"/>
             </a:lvl9pPr>
           </a:lstStyle>
-          <a:p/>
+          <a:p>
+            <a:endParaRPr/>
+          </a:p>
         </p:txBody>
       </p:sp>
       <p:sp>
         <p:nvSpPr>
           <p:cNvPr id="34" name="Google Shape;34;p8"/>
-          <p:cNvSpPr txBox="1"/>
+          <p:cNvSpPr txBox="1">
+            <a:spLocks noGrp="1"/>
+          </p:cNvSpPr>
           <p:nvPr>
-            <p:ph idx="12" type="sldNum"/>
+            <p:ph type="sldNum" idx="12"/>
           </p:nvPr>
         </p:nvSpPr>
         <p:spPr>
@@ -5970,27 +6077,27 @@
           </a:ln>
         </p:spPr>
         <p:txBody>
-          <a:bodyPr anchorCtr="0" anchor="ctr" bIns="176925" lIns="176925" spcFirstLastPara="1" rIns="176925" wrap="square" tIns="176925">
+          <a:bodyPr spcFirstLastPara="1" wrap="square" lIns="176925" tIns="176925" rIns="176925" bIns="176925" anchor="ctr" anchorCtr="0">
             <a:normAutofit/>
           </a:bodyPr>
           <a:lstStyle>
-            <a:lvl1pPr indent="0" lvl="0" marL="0" marR="0" algn="r">
-              <a:lnSpc>
-                <a:spcPct val="100000"/>
-              </a:lnSpc>
-              <a:spcBef>
-                <a:spcPts val="0"/>
-              </a:spcBef>
-              <a:spcAft>
-                <a:spcPts val="0"/>
-              </a:spcAft>
-              <a:buClr>
-                <a:srgbClr val="000000"/>
-              </a:buClr>
-              <a:buSzPts val="1900"/>
-              <a:buFont typeface="Arial"/>
-              <a:buNone/>
-              <a:defRPr b="0" i="0" sz="1900" u="none" cap="none" strike="noStrike">
+            <a:lvl1pPr marL="0" marR="0" lvl="0" indent="0" algn="r">
+              <a:lnSpc>
+                <a:spcPct val="100000"/>
+              </a:lnSpc>
+              <a:spcBef>
+                <a:spcPts val="0"/>
+              </a:spcBef>
+              <a:spcAft>
+                <a:spcPts val="0"/>
+              </a:spcAft>
+              <a:buClr>
+                <a:srgbClr val="000000"/>
+              </a:buClr>
+              <a:buSzPts val="1900"/>
+              <a:buFont typeface="Arial"/>
+              <a:buNone/>
+              <a:defRPr sz="1900" b="0" i="0" u="none" strike="noStrike" cap="none">
                 <a:solidFill>
                   <a:schemeClr val="dk2"/>
                 </a:solidFill>
@@ -6000,23 +6107,23 @@
                 <a:sym typeface="Arial"/>
               </a:defRPr>
             </a:lvl1pPr>
-            <a:lvl2pPr indent="0" lvl="1" marL="0" marR="0" algn="r">
-              <a:lnSpc>
-                <a:spcPct val="100000"/>
-              </a:lnSpc>
-              <a:spcBef>
-                <a:spcPts val="0"/>
-              </a:spcBef>
-              <a:spcAft>
-                <a:spcPts val="0"/>
-              </a:spcAft>
-              <a:buClr>
-                <a:srgbClr val="000000"/>
-              </a:buClr>
-              <a:buSzPts val="1900"/>
-              <a:buFont typeface="Arial"/>
-              <a:buNone/>
-              <a:defRPr b="0" i="0" sz="1900" u="none" cap="none" strike="noStrike">
+            <a:lvl2pPr marL="0" marR="0" lvl="1" indent="0" algn="r">
+              <a:lnSpc>
+                <a:spcPct val="100000"/>
+              </a:lnSpc>
+              <a:spcBef>
+                <a:spcPts val="0"/>
+              </a:spcBef>
+              <a:spcAft>
+                <a:spcPts val="0"/>
+              </a:spcAft>
+              <a:buClr>
+                <a:srgbClr val="000000"/>
+              </a:buClr>
+              <a:buSzPts val="1900"/>
+              <a:buFont typeface="Arial"/>
+              <a:buNone/>
+              <a:defRPr sz="1900" b="0" i="0" u="none" strike="noStrike" cap="none">
                 <a:solidFill>
                   <a:schemeClr val="dk2"/>
                 </a:solidFill>
@@ -6026,23 +6133,23 @@
                 <a:sym typeface="Arial"/>
               </a:defRPr>
             </a:lvl2pPr>
-            <a:lvl3pPr indent="0" lvl="2" marL="0" marR="0" algn="r">
-              <a:lnSpc>
-                <a:spcPct val="100000"/>
-              </a:lnSpc>
-              <a:spcBef>
-                <a:spcPts val="0"/>
-              </a:spcBef>
-              <a:spcAft>
-                <a:spcPts val="0"/>
-              </a:spcAft>
-              <a:buClr>
-                <a:srgbClr val="000000"/>
-              </a:buClr>
-              <a:buSzPts val="1900"/>
-              <a:buFont typeface="Arial"/>
-              <a:buNone/>
-              <a:defRPr b="0" i="0" sz="1900" u="none" cap="none" strike="noStrike">
+            <a:lvl3pPr marL="0" marR="0" lvl="2" indent="0" algn="r">
+              <a:lnSpc>
+                <a:spcPct val="100000"/>
+              </a:lnSpc>
+              <a:spcBef>
+                <a:spcPts val="0"/>
+              </a:spcBef>
+              <a:spcAft>
+                <a:spcPts val="0"/>
+              </a:spcAft>
+              <a:buClr>
+                <a:srgbClr val="000000"/>
+              </a:buClr>
+              <a:buSzPts val="1900"/>
+              <a:buFont typeface="Arial"/>
+              <a:buNone/>
+              <a:defRPr sz="1900" b="0" i="0" u="none" strike="noStrike" cap="none">
                 <a:solidFill>
                   <a:schemeClr val="dk2"/>
                 </a:solidFill>
@@ -6052,23 +6159,23 @@
                 <a:sym typeface="Arial"/>
               </a:defRPr>
             </a:lvl3pPr>
-            <a:lvl4pPr indent="0" lvl="3" marL="0" marR="0" algn="r">
-              <a:lnSpc>
-                <a:spcPct val="100000"/>
-              </a:lnSpc>
-              <a:spcBef>
-                <a:spcPts val="0"/>
-              </a:spcBef>
-              <a:spcAft>
-                <a:spcPts val="0"/>
-              </a:spcAft>
-              <a:buClr>
-                <a:srgbClr val="000000"/>
-              </a:buClr>
-              <a:buSzPts val="1900"/>
-              <a:buFont typeface="Arial"/>
-              <a:buNone/>
-              <a:defRPr b="0" i="0" sz="1900" u="none" cap="none" strike="noStrike">
+            <a:lvl4pPr marL="0" marR="0" lvl="3" indent="0" algn="r">
+              <a:lnSpc>
+                <a:spcPct val="100000"/>
+              </a:lnSpc>
+              <a:spcBef>
+                <a:spcPts val="0"/>
+              </a:spcBef>
+              <a:spcAft>
+                <a:spcPts val="0"/>
+              </a:spcAft>
+              <a:buClr>
+                <a:srgbClr val="000000"/>
+              </a:buClr>
+              <a:buSzPts val="1900"/>
+              <a:buFont typeface="Arial"/>
+              <a:buNone/>
+              <a:defRPr sz="1900" b="0" i="0" u="none" strike="noStrike" cap="none">
                 <a:solidFill>
                   <a:schemeClr val="dk2"/>
                 </a:solidFill>
@@ -6078,23 +6185,23 @@
                 <a:sym typeface="Arial"/>
               </a:defRPr>
             </a:lvl4pPr>
-            <a:lvl5pPr indent="0" lvl="4" marL="0" marR="0" algn="r">
-              <a:lnSpc>
-                <a:spcPct val="100000"/>
-              </a:lnSpc>
-              <a:spcBef>
-                <a:spcPts val="0"/>
-              </a:spcBef>
-              <a:spcAft>
-                <a:spcPts val="0"/>
-              </a:spcAft>
-              <a:buClr>
-                <a:srgbClr val="000000"/>
-              </a:buClr>
-              <a:buSzPts val="1900"/>
-              <a:buFont typeface="Arial"/>
-              <a:buNone/>
-              <a:defRPr b="0" i="0" sz="1900" u="none" cap="none" strike="noStrike">
+            <a:lvl5pPr marL="0" marR="0" lvl="4" indent="0" algn="r">
+              <a:lnSpc>
+                <a:spcPct val="100000"/>
+              </a:lnSpc>
+              <a:spcBef>
+                <a:spcPts val="0"/>
+              </a:spcBef>
+              <a:spcAft>
+                <a:spcPts val="0"/>
+              </a:spcAft>
+              <a:buClr>
+                <a:srgbClr val="000000"/>
+              </a:buClr>
+              <a:buSzPts val="1900"/>
+              <a:buFont typeface="Arial"/>
+              <a:buNone/>
+              <a:defRPr sz="1900" b="0" i="0" u="none" strike="noStrike" cap="none">
                 <a:solidFill>
                   <a:schemeClr val="dk2"/>
                 </a:solidFill>
@@ -6104,23 +6211,23 @@
                 <a:sym typeface="Arial"/>
               </a:defRPr>
             </a:lvl5pPr>
-            <a:lvl6pPr indent="0" lvl="5" marL="0" marR="0" algn="r">
-              <a:lnSpc>
-                <a:spcPct val="100000"/>
-              </a:lnSpc>
-              <a:spcBef>
-                <a:spcPts val="0"/>
-              </a:spcBef>
-              <a:spcAft>
-                <a:spcPts val="0"/>
-              </a:spcAft>
-              <a:buClr>
-                <a:srgbClr val="000000"/>
-              </a:buClr>
-              <a:buSzPts val="1900"/>
-              <a:buFont typeface="Arial"/>
-              <a:buNone/>
-              <a:defRPr b="0" i="0" sz="1900" u="none" cap="none" strike="noStrike">
+            <a:lvl6pPr marL="0" marR="0" lvl="5" indent="0" algn="r">
+              <a:lnSpc>
+                <a:spcPct val="100000"/>
+              </a:lnSpc>
+              <a:spcBef>
+                <a:spcPts val="0"/>
+              </a:spcBef>
+              <a:spcAft>
+                <a:spcPts val="0"/>
+              </a:spcAft>
+              <a:buClr>
+                <a:srgbClr val="000000"/>
+              </a:buClr>
+              <a:buSzPts val="1900"/>
+              <a:buFont typeface="Arial"/>
+              <a:buNone/>
+              <a:defRPr sz="1900" b="0" i="0" u="none" strike="noStrike" cap="none">
                 <a:solidFill>
                   <a:schemeClr val="dk2"/>
                 </a:solidFill>
@@ -6130,23 +6237,23 @@
                 <a:sym typeface="Arial"/>
               </a:defRPr>
             </a:lvl6pPr>
-            <a:lvl7pPr indent="0" lvl="6" marL="0" marR="0" algn="r">
-              <a:lnSpc>
-                <a:spcPct val="100000"/>
-              </a:lnSpc>
-              <a:spcBef>
-                <a:spcPts val="0"/>
-              </a:spcBef>
-              <a:spcAft>
-                <a:spcPts val="0"/>
-              </a:spcAft>
-              <a:buClr>
-                <a:srgbClr val="000000"/>
-              </a:buClr>
-              <a:buSzPts val="1900"/>
-              <a:buFont typeface="Arial"/>
-              <a:buNone/>
-              <a:defRPr b="0" i="0" sz="1900" u="none" cap="none" strike="noStrike">
+            <a:lvl7pPr marL="0" marR="0" lvl="6" indent="0" algn="r">
+              <a:lnSpc>
+                <a:spcPct val="100000"/>
+              </a:lnSpc>
+              <a:spcBef>
+                <a:spcPts val="0"/>
+              </a:spcBef>
+              <a:spcAft>
+                <a:spcPts val="0"/>
+              </a:spcAft>
+              <a:buClr>
+                <a:srgbClr val="000000"/>
+              </a:buClr>
+              <a:buSzPts val="1900"/>
+              <a:buFont typeface="Arial"/>
+              <a:buNone/>
+              <a:defRPr sz="1900" b="0" i="0" u="none" strike="noStrike" cap="none">
                 <a:solidFill>
                   <a:schemeClr val="dk2"/>
                 </a:solidFill>
@@ -6156,23 +6263,23 @@
                 <a:sym typeface="Arial"/>
               </a:defRPr>
             </a:lvl7pPr>
-            <a:lvl8pPr indent="0" lvl="7" marL="0" marR="0" algn="r">
-              <a:lnSpc>
-                <a:spcPct val="100000"/>
-              </a:lnSpc>
-              <a:spcBef>
-                <a:spcPts val="0"/>
-              </a:spcBef>
-              <a:spcAft>
-                <a:spcPts val="0"/>
-              </a:spcAft>
-              <a:buClr>
-                <a:srgbClr val="000000"/>
-              </a:buClr>
-              <a:buSzPts val="1900"/>
-              <a:buFont typeface="Arial"/>
-              <a:buNone/>
-              <a:defRPr b="0" i="0" sz="1900" u="none" cap="none" strike="noStrike">
+            <a:lvl8pPr marL="0" marR="0" lvl="7" indent="0" algn="r">
+              <a:lnSpc>
+                <a:spcPct val="100000"/>
+              </a:lnSpc>
+              <a:spcBef>
+                <a:spcPts val="0"/>
+              </a:spcBef>
+              <a:spcAft>
+                <a:spcPts val="0"/>
+              </a:spcAft>
+              <a:buClr>
+                <a:srgbClr val="000000"/>
+              </a:buClr>
+              <a:buSzPts val="1900"/>
+              <a:buFont typeface="Arial"/>
+              <a:buNone/>
+              <a:defRPr sz="1900" b="0" i="0" u="none" strike="noStrike" cap="none">
                 <a:solidFill>
                   <a:schemeClr val="dk2"/>
                 </a:solidFill>
@@ -6182,23 +6289,23 @@
                 <a:sym typeface="Arial"/>
               </a:defRPr>
             </a:lvl8pPr>
-            <a:lvl9pPr indent="0" lvl="8" marL="0" marR="0" algn="r">
-              <a:lnSpc>
-                <a:spcPct val="100000"/>
-              </a:lnSpc>
-              <a:spcBef>
-                <a:spcPts val="0"/>
-              </a:spcBef>
-              <a:spcAft>
-                <a:spcPts val="0"/>
-              </a:spcAft>
-              <a:buClr>
-                <a:srgbClr val="000000"/>
-              </a:buClr>
-              <a:buSzPts val="1900"/>
-              <a:buFont typeface="Arial"/>
-              <a:buNone/>
-              <a:defRPr b="0" i="0" sz="1900" u="none" cap="none" strike="noStrike">
+            <a:lvl9pPr marL="0" marR="0" lvl="8" indent="0" algn="r">
+              <a:lnSpc>
+                <a:spcPct val="100000"/>
+              </a:lnSpc>
+              <a:spcBef>
+                <a:spcPts val="0"/>
+              </a:spcBef>
+              <a:spcAft>
+                <a:spcPts val="0"/>
+              </a:spcAft>
+              <a:buClr>
+                <a:srgbClr val="000000"/>
+              </a:buClr>
+              <a:buSzPts val="1900"/>
+              <a:buFont typeface="Arial"/>
+              <a:buNone/>
+              <a:defRPr sz="1900" b="0" i="0" u="none" strike="noStrike" cap="none">
                 <a:solidFill>
                   <a:schemeClr val="dk2"/>
                 </a:solidFill>
@@ -6210,7 +6317,7 @@
             </a:lvl9pPr>
           </a:lstStyle>
           <a:p>
-            <a:pPr indent="0" lvl="0" marL="0" rtl="0" algn="r">
+            <a:pPr marL="0" lvl="0" indent="0" algn="r" rtl="0">
               <a:spcBef>
                 <a:spcPts val="0"/>
               </a:spcBef>
@@ -6236,11 +6343,11 @@
 </file>
 
 <file path=ppt/slideLayouts/slideLayout8.xml><?xml version="1.0" encoding="utf-8"?>
-<p:sldLayout xmlns:a="http://schemas.openxmlformats.org/drawingml/2006/main" xmlns:r="http://schemas.openxmlformats.org/officeDocument/2006/relationships" xmlns:mc="http://schemas.openxmlformats.org/markup-compatibility/2006" xmlns:mv="urn:schemas-microsoft-com:mac:vml" xmlns:p="http://schemas.openxmlformats.org/presentationml/2006/main" xmlns:c="http://schemas.openxmlformats.org/drawingml/2006/chart" xmlns:dgm="http://schemas.openxmlformats.org/drawingml/2006/diagram" xmlns:o="urn:schemas-microsoft-com:office:office" xmlns:v="urn:schemas-microsoft-com:vml" xmlns:pvml="urn:schemas-microsoft-com:office:powerpoint" xmlns:com="http://schemas.openxmlformats.org/drawingml/2006/compatibility" xmlns:p14="http://schemas.microsoft.com/office/powerpoint/2010/main" xmlns:p15="http://schemas.microsoft.com/office/powerpoint/2012/main" xmlns:ahyp="http://schemas.microsoft.com/office/drawing/2018/hyperlinkcolor" matchingName="Section title and description">
+<p:sldLayout xmlns:a="http://schemas.openxmlformats.org/drawingml/2006/main" xmlns:r="http://schemas.openxmlformats.org/officeDocument/2006/relationships" xmlns:p="http://schemas.openxmlformats.org/presentationml/2006/main" matchingName="Section title and description">
   <p:cSld name="SECTION_TITLE_AND_DESCRIPTION">
     <p:spTree>
       <p:nvGrpSpPr>
-        <p:cNvPr id="35" name="Shape 35"/>
+        <p:cNvPr id="1" name="Shape 35"/>
         <p:cNvGrpSpPr/>
         <p:nvPr/>
       </p:nvGrpSpPr>
@@ -6274,12 +6381,12 @@
           </a:ln>
         </p:spPr>
         <p:txBody>
-          <a:bodyPr anchorCtr="0" anchor="ctr" bIns="176925" lIns="176925" spcFirstLastPara="1" rIns="176925" wrap="square" tIns="176925">
+          <a:bodyPr spcFirstLastPara="1" wrap="square" lIns="176925" tIns="176925" rIns="176925" bIns="176925" anchor="ctr" anchorCtr="0">
             <a:noAutofit/>
           </a:bodyPr>
           <a:lstStyle/>
           <a:p>
-            <a:pPr indent="0" lvl="0" marL="0" marR="0" rtl="0" algn="l">
+            <a:pPr marL="0" marR="0" lvl="0" indent="0" algn="l" rtl="0">
               <a:lnSpc>
                 <a:spcPct val="100000"/>
               </a:lnSpc>
@@ -6296,10 +6403,7 @@
               <a:buFont typeface="Arial"/>
               <a:buNone/>
             </a:pPr>
-            <a:r>
-              <a:t/>
-            </a:r>
-            <a:endParaRPr b="0" i="0" sz="1400" u="none" cap="none" strike="noStrike">
+            <a:endParaRPr sz="1400" b="0" i="0" u="none" strike="noStrike" cap="none">
               <a:solidFill>
                 <a:srgbClr val="000000"/>
               </a:solidFill>
@@ -6314,7 +6418,9 @@
       <p:sp>
         <p:nvSpPr>
           <p:cNvPr id="37" name="Google Shape;37;p9"/>
-          <p:cNvSpPr txBox="1"/>
+          <p:cNvSpPr txBox="1">
+            <a:spLocks noGrp="1"/>
+          </p:cNvSpPr>
           <p:nvPr>
             <p:ph type="title"/>
           </p:nvPr>
@@ -6333,7 +6439,7 @@
           </a:ln>
         </p:spPr>
         <p:txBody>
-          <a:bodyPr anchorCtr="0" anchor="b" bIns="176925" lIns="176925" spcFirstLastPara="1" rIns="176925" wrap="square" tIns="176925">
+          <a:bodyPr spcFirstLastPara="1" wrap="square" lIns="176925" tIns="176925" rIns="176925" bIns="176925" anchor="b" anchorCtr="0">
             <a:normAutofit/>
           </a:bodyPr>
           <a:lstStyle>
@@ -6464,15 +6570,19 @@
               <a:defRPr sz="8100"/>
             </a:lvl9pPr>
           </a:lstStyle>
-          <a:p/>
+          <a:p>
+            <a:endParaRPr/>
+          </a:p>
         </p:txBody>
       </p:sp>
       <p:sp>
         <p:nvSpPr>
           <p:cNvPr id="38" name="Google Shape;38;p9"/>
-          <p:cNvSpPr txBox="1"/>
+          <p:cNvSpPr txBox="1">
+            <a:spLocks noGrp="1"/>
+          </p:cNvSpPr>
           <p:nvPr>
-            <p:ph idx="1" type="subTitle"/>
+            <p:ph type="subTitle" idx="1"/>
           </p:nvPr>
         </p:nvSpPr>
         <p:spPr>
@@ -6489,7 +6599,7 @@
           </a:ln>
         </p:spPr>
         <p:txBody>
-          <a:bodyPr anchorCtr="0" anchor="t" bIns="176925" lIns="176925" spcFirstLastPara="1" rIns="176925" wrap="square" tIns="176925">
+          <a:bodyPr spcFirstLastPara="1" wrap="square" lIns="176925" tIns="176925" rIns="176925" bIns="176925" anchor="t" anchorCtr="0">
             <a:normAutofit/>
           </a:bodyPr>
           <a:lstStyle>
@@ -6620,15 +6730,19 @@
               <a:defRPr sz="4100"/>
             </a:lvl9pPr>
           </a:lstStyle>
-          <a:p/>
+          <a:p>
+            <a:endParaRPr/>
+          </a:p>
         </p:txBody>
       </p:sp>
       <p:sp>
         <p:nvSpPr>
           <p:cNvPr id="39" name="Google Shape;39;p9"/>
-          <p:cNvSpPr txBox="1"/>
+          <p:cNvSpPr txBox="1">
+            <a:spLocks noGrp="1"/>
+          </p:cNvSpPr>
           <p:nvPr>
-            <p:ph idx="2" type="body"/>
+            <p:ph type="body" idx="2"/>
           </p:nvPr>
         </p:nvSpPr>
         <p:spPr>
@@ -6645,11 +6759,11 @@
           </a:ln>
         </p:spPr>
         <p:txBody>
-          <a:bodyPr anchorCtr="0" anchor="ctr" bIns="176925" lIns="176925" spcFirstLastPara="1" rIns="176925" wrap="square" tIns="176925">
+          <a:bodyPr spcFirstLastPara="1" wrap="square" lIns="176925" tIns="176925" rIns="176925" bIns="176925" anchor="ctr" anchorCtr="0">
             <a:normAutofit/>
           </a:bodyPr>
           <a:lstStyle>
-            <a:lvl1pPr indent="-450850" lvl="0" marL="457200" algn="l">
+            <a:lvl1pPr marL="457200" lvl="0" indent="-450850" algn="l">
               <a:lnSpc>
                 <a:spcPct val="115000"/>
               </a:lnSpc>
@@ -6663,7 +6777,7 @@
               <a:buChar char="●"/>
               <a:defRPr/>
             </a:lvl1pPr>
-            <a:lvl2pPr indent="-400050" lvl="1" marL="914400" algn="l">
+            <a:lvl2pPr marL="914400" lvl="1" indent="-400050" algn="l">
               <a:lnSpc>
                 <a:spcPct val="115000"/>
               </a:lnSpc>
@@ -6677,7 +6791,7 @@
               <a:buChar char="○"/>
               <a:defRPr/>
             </a:lvl2pPr>
-            <a:lvl3pPr indent="-400050" lvl="2" marL="1371600" algn="l">
+            <a:lvl3pPr marL="1371600" lvl="2" indent="-400050" algn="l">
               <a:lnSpc>
                 <a:spcPct val="115000"/>
               </a:lnSpc>
@@ -6691,7 +6805,7 @@
               <a:buChar char="■"/>
               <a:defRPr/>
             </a:lvl3pPr>
-            <a:lvl4pPr indent="-400050" lvl="3" marL="1828800" algn="l">
+            <a:lvl4pPr marL="1828800" lvl="3" indent="-400050" algn="l">
               <a:lnSpc>
                 <a:spcPct val="115000"/>
               </a:lnSpc>
@@ -6705,7 +6819,7 @@
               <a:buChar char="●"/>
               <a:defRPr/>
             </a:lvl4pPr>
-            <a:lvl5pPr indent="-400050" lvl="4" marL="2286000" algn="l">
+            <a:lvl5pPr marL="2286000" lvl="4" indent="-400050" algn="l">
               <a:lnSpc>
                 <a:spcPct val="115000"/>
               </a:lnSpc>
@@ -6719,7 +6833,7 @@
               <a:buChar char="○"/>
               <a:defRPr/>
             </a:lvl5pPr>
-            <a:lvl6pPr indent="-400050" lvl="5" marL="2743200" algn="l">
+            <a:lvl6pPr marL="2743200" lvl="5" indent="-400050" algn="l">
               <a:lnSpc>
                 <a:spcPct val="115000"/>
               </a:lnSpc>
@@ -6733,7 +6847,7 @@
               <a:buChar char="■"/>
               <a:defRPr/>
             </a:lvl6pPr>
-            <a:lvl7pPr indent="-400050" lvl="6" marL="3200400" algn="l">
+            <a:lvl7pPr marL="3200400" lvl="6" indent="-400050" algn="l">
               <a:lnSpc>
                 <a:spcPct val="115000"/>
               </a:lnSpc>
@@ -6747,7 +6861,7 @@
               <a:buChar char="●"/>
               <a:defRPr/>
             </a:lvl7pPr>
-            <a:lvl8pPr indent="-400050" lvl="7" marL="3657600" algn="l">
+            <a:lvl8pPr marL="3657600" lvl="7" indent="-400050" algn="l">
               <a:lnSpc>
                 <a:spcPct val="115000"/>
               </a:lnSpc>
@@ -6761,7 +6875,7 @@
               <a:buChar char="○"/>
               <a:defRPr/>
             </a:lvl8pPr>
-            <a:lvl9pPr indent="-400050" lvl="8" marL="4114800" algn="l">
+            <a:lvl9pPr marL="4114800" lvl="8" indent="-400050" algn="l">
               <a:lnSpc>
                 <a:spcPct val="115000"/>
               </a:lnSpc>
@@ -6776,15 +6890,19 @@
               <a:defRPr/>
             </a:lvl9pPr>
           </a:lstStyle>
-          <a:p/>
+          <a:p>
+            <a:endParaRPr/>
+          </a:p>
         </p:txBody>
       </p:sp>
       <p:sp>
         <p:nvSpPr>
           <p:cNvPr id="40" name="Google Shape;40;p9"/>
-          <p:cNvSpPr txBox="1"/>
+          <p:cNvSpPr txBox="1">
+            <a:spLocks noGrp="1"/>
+          </p:cNvSpPr>
           <p:nvPr>
-            <p:ph idx="12" type="sldNum"/>
+            <p:ph type="sldNum" idx="12"/>
           </p:nvPr>
         </p:nvSpPr>
         <p:spPr>
@@ -6801,27 +6919,27 @@
           </a:ln>
         </p:spPr>
         <p:txBody>
-          <a:bodyPr anchorCtr="0" anchor="ctr" bIns="176925" lIns="176925" spcFirstLastPara="1" rIns="176925" wrap="square" tIns="176925">
+          <a:bodyPr spcFirstLastPara="1" wrap="square" lIns="176925" tIns="176925" rIns="176925" bIns="176925" anchor="ctr" anchorCtr="0">
             <a:normAutofit/>
           </a:bodyPr>
           <a:lstStyle>
-            <a:lvl1pPr indent="0" lvl="0" marL="0" marR="0" algn="r">
-              <a:lnSpc>
-                <a:spcPct val="100000"/>
-              </a:lnSpc>
-              <a:spcBef>
-                <a:spcPts val="0"/>
-              </a:spcBef>
-              <a:spcAft>
-                <a:spcPts val="0"/>
-              </a:spcAft>
-              <a:buClr>
-                <a:srgbClr val="000000"/>
-              </a:buClr>
-              <a:buSzPts val="1900"/>
-              <a:buFont typeface="Arial"/>
-              <a:buNone/>
-              <a:defRPr b="0" i="0" sz="1900" u="none" cap="none" strike="noStrike">
+            <a:lvl1pPr marL="0" marR="0" lvl="0" indent="0" algn="r">
+              <a:lnSpc>
+                <a:spcPct val="100000"/>
+              </a:lnSpc>
+              <a:spcBef>
+                <a:spcPts val="0"/>
+              </a:spcBef>
+              <a:spcAft>
+                <a:spcPts val="0"/>
+              </a:spcAft>
+              <a:buClr>
+                <a:srgbClr val="000000"/>
+              </a:buClr>
+              <a:buSzPts val="1900"/>
+              <a:buFont typeface="Arial"/>
+              <a:buNone/>
+              <a:defRPr sz="1900" b="0" i="0" u="none" strike="noStrike" cap="none">
                 <a:solidFill>
                   <a:schemeClr val="dk2"/>
                 </a:solidFill>
@@ -6831,23 +6949,23 @@
                 <a:sym typeface="Arial"/>
               </a:defRPr>
             </a:lvl1pPr>
-            <a:lvl2pPr indent="0" lvl="1" marL="0" marR="0" algn="r">
-              <a:lnSpc>
-                <a:spcPct val="100000"/>
-              </a:lnSpc>
-              <a:spcBef>
-                <a:spcPts val="0"/>
-              </a:spcBef>
-              <a:spcAft>
-                <a:spcPts val="0"/>
-              </a:spcAft>
-              <a:buClr>
-                <a:srgbClr val="000000"/>
-              </a:buClr>
-              <a:buSzPts val="1900"/>
-              <a:buFont typeface="Arial"/>
-              <a:buNone/>
-              <a:defRPr b="0" i="0" sz="1900" u="none" cap="none" strike="noStrike">
+            <a:lvl2pPr marL="0" marR="0" lvl="1" indent="0" algn="r">
+              <a:lnSpc>
+                <a:spcPct val="100000"/>
+              </a:lnSpc>
+              <a:spcBef>
+                <a:spcPts val="0"/>
+              </a:spcBef>
+              <a:spcAft>
+                <a:spcPts val="0"/>
+              </a:spcAft>
+              <a:buClr>
+                <a:srgbClr val="000000"/>
+              </a:buClr>
+              <a:buSzPts val="1900"/>
+              <a:buFont typeface="Arial"/>
+              <a:buNone/>
+              <a:defRPr sz="1900" b="0" i="0" u="none" strike="noStrike" cap="none">
                 <a:solidFill>
                   <a:schemeClr val="dk2"/>
                 </a:solidFill>
@@ -6857,23 +6975,23 @@
                 <a:sym typeface="Arial"/>
               </a:defRPr>
             </a:lvl2pPr>
-            <a:lvl3pPr indent="0" lvl="2" marL="0" marR="0" algn="r">
-              <a:lnSpc>
-                <a:spcPct val="100000"/>
-              </a:lnSpc>
-              <a:spcBef>
-                <a:spcPts val="0"/>
-              </a:spcBef>
-              <a:spcAft>
-                <a:spcPts val="0"/>
-              </a:spcAft>
-              <a:buClr>
-                <a:srgbClr val="000000"/>
-              </a:buClr>
-              <a:buSzPts val="1900"/>
-              <a:buFont typeface="Arial"/>
-              <a:buNone/>
-              <a:defRPr b="0" i="0" sz="1900" u="none" cap="none" strike="noStrike">
+            <a:lvl3pPr marL="0" marR="0" lvl="2" indent="0" algn="r">
+              <a:lnSpc>
+                <a:spcPct val="100000"/>
+              </a:lnSpc>
+              <a:spcBef>
+                <a:spcPts val="0"/>
+              </a:spcBef>
+              <a:spcAft>
+                <a:spcPts val="0"/>
+              </a:spcAft>
+              <a:buClr>
+                <a:srgbClr val="000000"/>
+              </a:buClr>
+              <a:buSzPts val="1900"/>
+              <a:buFont typeface="Arial"/>
+              <a:buNone/>
+              <a:defRPr sz="1900" b="0" i="0" u="none" strike="noStrike" cap="none">
                 <a:solidFill>
                   <a:schemeClr val="dk2"/>
                 </a:solidFill>
@@ -6883,23 +7001,23 @@
                 <a:sym typeface="Arial"/>
               </a:defRPr>
             </a:lvl3pPr>
-            <a:lvl4pPr indent="0" lvl="3" marL="0" marR="0" algn="r">
-              <a:lnSpc>
-                <a:spcPct val="100000"/>
-              </a:lnSpc>
-              <a:spcBef>
-                <a:spcPts val="0"/>
-              </a:spcBef>
-              <a:spcAft>
-                <a:spcPts val="0"/>
-              </a:spcAft>
-              <a:buClr>
-                <a:srgbClr val="000000"/>
-              </a:buClr>
-              <a:buSzPts val="1900"/>
-              <a:buFont typeface="Arial"/>
-              <a:buNone/>
-              <a:defRPr b="0" i="0" sz="1900" u="none" cap="none" strike="noStrike">
+            <a:lvl4pPr marL="0" marR="0" lvl="3" indent="0" algn="r">
+              <a:lnSpc>
+                <a:spcPct val="100000"/>
+              </a:lnSpc>
+              <a:spcBef>
+                <a:spcPts val="0"/>
+              </a:spcBef>
+              <a:spcAft>
+                <a:spcPts val="0"/>
+              </a:spcAft>
+              <a:buClr>
+                <a:srgbClr val="000000"/>
+              </a:buClr>
+              <a:buSzPts val="1900"/>
+              <a:buFont typeface="Arial"/>
+              <a:buNone/>
+              <a:defRPr sz="1900" b="0" i="0" u="none" strike="noStrike" cap="none">
                 <a:solidFill>
                   <a:schemeClr val="dk2"/>
                 </a:solidFill>
@@ -6909,23 +7027,23 @@
                 <a:sym typeface="Arial"/>
               </a:defRPr>
             </a:lvl4pPr>
-            <a:lvl5pPr indent="0" lvl="4" marL="0" marR="0" algn="r">
-              <a:lnSpc>
-                <a:spcPct val="100000"/>
-              </a:lnSpc>
-              <a:spcBef>
-                <a:spcPts val="0"/>
-              </a:spcBef>
-              <a:spcAft>
-                <a:spcPts val="0"/>
-              </a:spcAft>
-              <a:buClr>
-                <a:srgbClr val="000000"/>
-              </a:buClr>
-              <a:buSzPts val="1900"/>
-              <a:buFont typeface="Arial"/>
-              <a:buNone/>
-              <a:defRPr b="0" i="0" sz="1900" u="none" cap="none" strike="noStrike">
+            <a:lvl5pPr marL="0" marR="0" lvl="4" indent="0" algn="r">
+              <a:lnSpc>
+                <a:spcPct val="100000"/>
+              </a:lnSpc>
+              <a:spcBef>
+                <a:spcPts val="0"/>
+              </a:spcBef>
+              <a:spcAft>
+                <a:spcPts val="0"/>
+              </a:spcAft>
+              <a:buClr>
+                <a:srgbClr val="000000"/>
+              </a:buClr>
+              <a:buSzPts val="1900"/>
+              <a:buFont typeface="Arial"/>
+              <a:buNone/>
+              <a:defRPr sz="1900" b="0" i="0" u="none" strike="noStrike" cap="none">
                 <a:solidFill>
                   <a:schemeClr val="dk2"/>
                 </a:solidFill>
@@ -6935,23 +7053,23 @@
                 <a:sym typeface="Arial"/>
               </a:defRPr>
             </a:lvl5pPr>
-            <a:lvl6pPr indent="0" lvl="5" marL="0" marR="0" algn="r">
-              <a:lnSpc>
-                <a:spcPct val="100000"/>
-              </a:lnSpc>
-              <a:spcBef>
-                <a:spcPts val="0"/>
-              </a:spcBef>
-              <a:spcAft>
-                <a:spcPts val="0"/>
-              </a:spcAft>
-              <a:buClr>
-                <a:srgbClr val="000000"/>
-              </a:buClr>
-              <a:buSzPts val="1900"/>
-              <a:buFont typeface="Arial"/>
-              <a:buNone/>
-              <a:defRPr b="0" i="0" sz="1900" u="none" cap="none" strike="noStrike">
+            <a:lvl6pPr marL="0" marR="0" lvl="5" indent="0" algn="r">
+              <a:lnSpc>
+                <a:spcPct val="100000"/>
+              </a:lnSpc>
+              <a:spcBef>
+                <a:spcPts val="0"/>
+              </a:spcBef>
+              <a:spcAft>
+                <a:spcPts val="0"/>
+              </a:spcAft>
+              <a:buClr>
+                <a:srgbClr val="000000"/>
+              </a:buClr>
+              <a:buSzPts val="1900"/>
+              <a:buFont typeface="Arial"/>
+              <a:buNone/>
+              <a:defRPr sz="1900" b="0" i="0" u="none" strike="noStrike" cap="none">
                 <a:solidFill>
                   <a:schemeClr val="dk2"/>
                 </a:solidFill>
@@ -6961,23 +7079,23 @@
                 <a:sym typeface="Arial"/>
               </a:defRPr>
             </a:lvl6pPr>
-            <a:lvl7pPr indent="0" lvl="6" marL="0" marR="0" algn="r">
-              <a:lnSpc>
-                <a:spcPct val="100000"/>
-              </a:lnSpc>
-              <a:spcBef>
-                <a:spcPts val="0"/>
-              </a:spcBef>
-              <a:spcAft>
-                <a:spcPts val="0"/>
-              </a:spcAft>
-              <a:buClr>
-                <a:srgbClr val="000000"/>
-              </a:buClr>
-              <a:buSzPts val="1900"/>
-              <a:buFont typeface="Arial"/>
-              <a:buNone/>
-              <a:defRPr b="0" i="0" sz="1900" u="none" cap="none" strike="noStrike">
+            <a:lvl7pPr marL="0" marR="0" lvl="6" indent="0" algn="r">
+              <a:lnSpc>
+                <a:spcPct val="100000"/>
+              </a:lnSpc>
+              <a:spcBef>
+                <a:spcPts val="0"/>
+              </a:spcBef>
+              <a:spcAft>
+                <a:spcPts val="0"/>
+              </a:spcAft>
+              <a:buClr>
+                <a:srgbClr val="000000"/>
+              </a:buClr>
+              <a:buSzPts val="1900"/>
+              <a:buFont typeface="Arial"/>
+              <a:buNone/>
+              <a:defRPr sz="1900" b="0" i="0" u="none" strike="noStrike" cap="none">
                 <a:solidFill>
                   <a:schemeClr val="dk2"/>
                 </a:solidFill>
@@ -6987,23 +7105,23 @@
                 <a:sym typeface="Arial"/>
               </a:defRPr>
             </a:lvl7pPr>
-            <a:lvl8pPr indent="0" lvl="7" marL="0" marR="0" algn="r">
-              <a:lnSpc>
-                <a:spcPct val="100000"/>
-              </a:lnSpc>
-              <a:spcBef>
-                <a:spcPts val="0"/>
-              </a:spcBef>
-              <a:spcAft>
-                <a:spcPts val="0"/>
-              </a:spcAft>
-              <a:buClr>
-                <a:srgbClr val="000000"/>
-              </a:buClr>
-              <a:buSzPts val="1900"/>
-              <a:buFont typeface="Arial"/>
-              <a:buNone/>
-              <a:defRPr b="0" i="0" sz="1900" u="none" cap="none" strike="noStrike">
+            <a:lvl8pPr marL="0" marR="0" lvl="7" indent="0" algn="r">
+              <a:lnSpc>
+                <a:spcPct val="100000"/>
+              </a:lnSpc>
+              <a:spcBef>
+                <a:spcPts val="0"/>
+              </a:spcBef>
+              <a:spcAft>
+                <a:spcPts val="0"/>
+              </a:spcAft>
+              <a:buClr>
+                <a:srgbClr val="000000"/>
+              </a:buClr>
+              <a:buSzPts val="1900"/>
+              <a:buFont typeface="Arial"/>
+              <a:buNone/>
+              <a:defRPr sz="1900" b="0" i="0" u="none" strike="noStrike" cap="none">
                 <a:solidFill>
                   <a:schemeClr val="dk2"/>
                 </a:solidFill>
@@ -7013,23 +7131,23 @@
                 <a:sym typeface="Arial"/>
               </a:defRPr>
             </a:lvl8pPr>
-            <a:lvl9pPr indent="0" lvl="8" marL="0" marR="0" algn="r">
-              <a:lnSpc>
-                <a:spcPct val="100000"/>
-              </a:lnSpc>
-              <a:spcBef>
-                <a:spcPts val="0"/>
-              </a:spcBef>
-              <a:spcAft>
-                <a:spcPts val="0"/>
-              </a:spcAft>
-              <a:buClr>
-                <a:srgbClr val="000000"/>
-              </a:buClr>
-              <a:buSzPts val="1900"/>
-              <a:buFont typeface="Arial"/>
-              <a:buNone/>
-              <a:defRPr b="0" i="0" sz="1900" u="none" cap="none" strike="noStrike">
+            <a:lvl9pPr marL="0" marR="0" lvl="8" indent="0" algn="r">
+              <a:lnSpc>
+                <a:spcPct val="100000"/>
+              </a:lnSpc>
+              <a:spcBef>
+                <a:spcPts val="0"/>
+              </a:spcBef>
+              <a:spcAft>
+                <a:spcPts val="0"/>
+              </a:spcAft>
+              <a:buClr>
+                <a:srgbClr val="000000"/>
+              </a:buClr>
+              <a:buSzPts val="1900"/>
+              <a:buFont typeface="Arial"/>
+              <a:buNone/>
+              <a:defRPr sz="1900" b="0" i="0" u="none" strike="noStrike" cap="none">
                 <a:solidFill>
                   <a:schemeClr val="dk2"/>
                 </a:solidFill>
@@ -7041,7 +7159,7 @@
             </a:lvl9pPr>
           </a:lstStyle>
           <a:p>
-            <a:pPr indent="0" lvl="0" marL="0" rtl="0" algn="r">
+            <a:pPr marL="0" lvl="0" indent="0" algn="r" rtl="0">
               <a:spcBef>
                 <a:spcPts val="0"/>
               </a:spcBef>
@@ -7067,11 +7185,11 @@
 </file>
 
 <file path=ppt/slideLayouts/slideLayout9.xml><?xml version="1.0" encoding="utf-8"?>
-<p:sldLayout xmlns:a="http://schemas.openxmlformats.org/drawingml/2006/main" xmlns:r="http://schemas.openxmlformats.org/officeDocument/2006/relationships" xmlns:mc="http://schemas.openxmlformats.org/markup-compatibility/2006" xmlns:mv="urn:schemas-microsoft-com:mac:vml" xmlns:p="http://schemas.openxmlformats.org/presentationml/2006/main" xmlns:c="http://schemas.openxmlformats.org/drawingml/2006/chart" xmlns:dgm="http://schemas.openxmlformats.org/drawingml/2006/diagram" xmlns:o="urn:schemas-microsoft-com:office:office" xmlns:v="urn:schemas-microsoft-com:vml" xmlns:pvml="urn:schemas-microsoft-com:office:powerpoint" xmlns:com="http://schemas.openxmlformats.org/drawingml/2006/compatibility" xmlns:p14="http://schemas.microsoft.com/office/powerpoint/2010/main" xmlns:p15="http://schemas.microsoft.com/office/powerpoint/2012/main" xmlns:ahyp="http://schemas.microsoft.com/office/drawing/2018/hyperlinkcolor" matchingName="Caption">
+<p:sldLayout xmlns:a="http://schemas.openxmlformats.org/drawingml/2006/main" xmlns:r="http://schemas.openxmlformats.org/officeDocument/2006/relationships" xmlns:p="http://schemas.openxmlformats.org/presentationml/2006/main" matchingName="Caption">
   <p:cSld name="CAPTION_ONLY">
     <p:spTree>
       <p:nvGrpSpPr>
-        <p:cNvPr id="41" name="Shape 41"/>
+        <p:cNvPr id="1" name="Shape 41"/>
         <p:cNvGrpSpPr/>
         <p:nvPr/>
       </p:nvGrpSpPr>
@@ -7086,9 +7204,11 @@
       <p:sp>
         <p:nvSpPr>
           <p:cNvPr id="42" name="Google Shape;42;p10"/>
-          <p:cNvSpPr txBox="1"/>
+          <p:cNvSpPr txBox="1">
+            <a:spLocks noGrp="1"/>
+          </p:cNvSpPr>
           <p:nvPr>
-            <p:ph idx="1" type="body"/>
+            <p:ph type="body" idx="1"/>
           </p:nvPr>
         </p:nvSpPr>
         <p:spPr>
@@ -7105,11 +7225,11 @@
           </a:ln>
         </p:spPr>
         <p:txBody>
-          <a:bodyPr anchorCtr="0" anchor="ctr" bIns="176925" lIns="176925" spcFirstLastPara="1" rIns="176925" wrap="square" tIns="176925">
+          <a:bodyPr spcFirstLastPara="1" wrap="square" lIns="176925" tIns="176925" rIns="176925" bIns="176925" anchor="ctr" anchorCtr="0">
             <a:normAutofit/>
           </a:bodyPr>
           <a:lstStyle>
-            <a:lvl1pPr indent="-228600" lvl="0" marL="457200" algn="l">
+            <a:lvl1pPr marL="457200" lvl="0" indent="-228600" algn="l">
               <a:lnSpc>
                 <a:spcPct val="100000"/>
               </a:lnSpc>
@@ -7124,15 +7244,19 @@
               <a:defRPr/>
             </a:lvl1pPr>
           </a:lstStyle>
-          <a:p/>
+          <a:p>
+            <a:endParaRPr/>
+          </a:p>
         </p:txBody>
       </p:sp>
       <p:sp>
         <p:nvSpPr>
           <p:cNvPr id="43" name="Google Shape;43;p10"/>
-          <p:cNvSpPr txBox="1"/>
+          <p:cNvSpPr txBox="1">
+            <a:spLocks noGrp="1"/>
+          </p:cNvSpPr>
           <p:nvPr>
-            <p:ph idx="12" type="sldNum"/>
+            <p:ph type="sldNum" idx="12"/>
           </p:nvPr>
         </p:nvSpPr>
         <p:spPr>
@@ -7149,27 +7273,27 @@
           </a:ln>
         </p:spPr>
         <p:txBody>
-          <a:bodyPr anchorCtr="0" anchor="ctr" bIns="176925" lIns="176925" spcFirstLastPara="1" rIns="176925" wrap="square" tIns="176925">
+          <a:bodyPr spcFirstLastPara="1" wrap="square" lIns="176925" tIns="176925" rIns="176925" bIns="176925" anchor="ctr" anchorCtr="0">
             <a:normAutofit/>
           </a:bodyPr>
           <a:lstStyle>
-            <a:lvl1pPr indent="0" lvl="0" marL="0" marR="0" algn="r">
-              <a:lnSpc>
-                <a:spcPct val="100000"/>
-              </a:lnSpc>
-              <a:spcBef>
-                <a:spcPts val="0"/>
-              </a:spcBef>
-              <a:spcAft>
-                <a:spcPts val="0"/>
-              </a:spcAft>
-              <a:buClr>
-                <a:srgbClr val="000000"/>
-              </a:buClr>
-              <a:buSzPts val="1900"/>
-              <a:buFont typeface="Arial"/>
-              <a:buNone/>
-              <a:defRPr b="0" i="0" sz="1900" u="none" cap="none" strike="noStrike">
+            <a:lvl1pPr marL="0" marR="0" lvl="0" indent="0" algn="r">
+              <a:lnSpc>
+                <a:spcPct val="100000"/>
+              </a:lnSpc>
+              <a:spcBef>
+                <a:spcPts val="0"/>
+              </a:spcBef>
+              <a:spcAft>
+                <a:spcPts val="0"/>
+              </a:spcAft>
+              <a:buClr>
+                <a:srgbClr val="000000"/>
+              </a:buClr>
+              <a:buSzPts val="1900"/>
+              <a:buFont typeface="Arial"/>
+              <a:buNone/>
+              <a:defRPr sz="1900" b="0" i="0" u="none" strike="noStrike" cap="none">
                 <a:solidFill>
                   <a:schemeClr val="dk2"/>
                 </a:solidFill>
@@ -7179,23 +7303,23 @@
                 <a:sym typeface="Arial"/>
               </a:defRPr>
             </a:lvl1pPr>
-            <a:lvl2pPr indent="0" lvl="1" marL="0" marR="0" algn="r">
-              <a:lnSpc>
-                <a:spcPct val="100000"/>
-              </a:lnSpc>
-              <a:spcBef>
-                <a:spcPts val="0"/>
-              </a:spcBef>
-              <a:spcAft>
-                <a:spcPts val="0"/>
-              </a:spcAft>
-              <a:buClr>
-                <a:srgbClr val="000000"/>
-              </a:buClr>
-              <a:buSzPts val="1900"/>
-              <a:buFont typeface="Arial"/>
-              <a:buNone/>
-              <a:defRPr b="0" i="0" sz="1900" u="none" cap="none" strike="noStrike">
+            <a:lvl2pPr marL="0" marR="0" lvl="1" indent="0" algn="r">
+              <a:lnSpc>
+                <a:spcPct val="100000"/>
+              </a:lnSpc>
+              <a:spcBef>
+                <a:spcPts val="0"/>
+              </a:spcBef>
+              <a:spcAft>
+                <a:spcPts val="0"/>
+              </a:spcAft>
+              <a:buClr>
+                <a:srgbClr val="000000"/>
+              </a:buClr>
+              <a:buSzPts val="1900"/>
+              <a:buFont typeface="Arial"/>
+              <a:buNone/>
+              <a:defRPr sz="1900" b="0" i="0" u="none" strike="noStrike" cap="none">
                 <a:solidFill>
                   <a:schemeClr val="dk2"/>
                 </a:solidFill>
@@ -7205,23 +7329,23 @@
                 <a:sym typeface="Arial"/>
               </a:defRPr>
             </a:lvl2pPr>
-            <a:lvl3pPr indent="0" lvl="2" marL="0" marR="0" algn="r">
-              <a:lnSpc>
-                <a:spcPct val="100000"/>
-              </a:lnSpc>
-              <a:spcBef>
-                <a:spcPts val="0"/>
-              </a:spcBef>
-              <a:spcAft>
-                <a:spcPts val="0"/>
-              </a:spcAft>
-              <a:buClr>
-                <a:srgbClr val="000000"/>
-              </a:buClr>
-              <a:buSzPts val="1900"/>
-              <a:buFont typeface="Arial"/>
-              <a:buNone/>
-              <a:defRPr b="0" i="0" sz="1900" u="none" cap="none" strike="noStrike">
+            <a:lvl3pPr marL="0" marR="0" lvl="2" indent="0" algn="r">
+              <a:lnSpc>
+                <a:spcPct val="100000"/>
+              </a:lnSpc>
+              <a:spcBef>
+                <a:spcPts val="0"/>
+              </a:spcBef>
+              <a:spcAft>
+                <a:spcPts val="0"/>
+              </a:spcAft>
+              <a:buClr>
+                <a:srgbClr val="000000"/>
+              </a:buClr>
+              <a:buSzPts val="1900"/>
+              <a:buFont typeface="Arial"/>
+              <a:buNone/>
+              <a:defRPr sz="1900" b="0" i="0" u="none" strike="noStrike" cap="none">
                 <a:solidFill>
                   <a:schemeClr val="dk2"/>
                 </a:solidFill>
@@ -7231,23 +7355,23 @@
                 <a:sym typeface="Arial"/>
               </a:defRPr>
             </a:lvl3pPr>
-            <a:lvl4pPr indent="0" lvl="3" marL="0" marR="0" algn="r">
-              <a:lnSpc>
-                <a:spcPct val="100000"/>
-              </a:lnSpc>
-              <a:spcBef>
-                <a:spcPts val="0"/>
-              </a:spcBef>
-              <a:spcAft>
-                <a:spcPts val="0"/>
-              </a:spcAft>
-              <a:buClr>
-                <a:srgbClr val="000000"/>
-              </a:buClr>
-              <a:buSzPts val="1900"/>
-              <a:buFont typeface="Arial"/>
-              <a:buNone/>
-              <a:defRPr b="0" i="0" sz="1900" u="none" cap="none" strike="noStrike">
+            <a:lvl4pPr marL="0" marR="0" lvl="3" indent="0" algn="r">
+              <a:lnSpc>
+                <a:spcPct val="100000"/>
+              </a:lnSpc>
+              <a:spcBef>
+                <a:spcPts val="0"/>
+              </a:spcBef>
+              <a:spcAft>
+                <a:spcPts val="0"/>
+              </a:spcAft>
+              <a:buClr>
+                <a:srgbClr val="000000"/>
+              </a:buClr>
+              <a:buSzPts val="1900"/>
+              <a:buFont typeface="Arial"/>
+              <a:buNone/>
+              <a:defRPr sz="1900" b="0" i="0" u="none" strike="noStrike" cap="none">
                 <a:solidFill>
                   <a:schemeClr val="dk2"/>
                 </a:solidFill>
@@ -7257,23 +7381,23 @@
                 <a:sym typeface="Arial"/>
               </a:defRPr>
             </a:lvl4pPr>
-            <a:lvl5pPr indent="0" lvl="4" marL="0" marR="0" algn="r">
-              <a:lnSpc>
-                <a:spcPct val="100000"/>
-              </a:lnSpc>
-              <a:spcBef>
-                <a:spcPts val="0"/>
-              </a:spcBef>
-              <a:spcAft>
-                <a:spcPts val="0"/>
-              </a:spcAft>
-              <a:buClr>
-                <a:srgbClr val="000000"/>
-              </a:buClr>
-              <a:buSzPts val="1900"/>
-              <a:buFont typeface="Arial"/>
-              <a:buNone/>
-              <a:defRPr b="0" i="0" sz="1900" u="none" cap="none" strike="noStrike">
+            <a:lvl5pPr marL="0" marR="0" lvl="4" indent="0" algn="r">
+              <a:lnSpc>
+                <a:spcPct val="100000"/>
+              </a:lnSpc>
+              <a:spcBef>
+                <a:spcPts val="0"/>
+              </a:spcBef>
+              <a:spcAft>
+                <a:spcPts val="0"/>
+              </a:spcAft>
+              <a:buClr>
+                <a:srgbClr val="000000"/>
+              </a:buClr>
+              <a:buSzPts val="1900"/>
+              <a:buFont typeface="Arial"/>
+              <a:buNone/>
+              <a:defRPr sz="1900" b="0" i="0" u="none" strike="noStrike" cap="none">
                 <a:solidFill>
                   <a:schemeClr val="dk2"/>
                 </a:solidFill>
@@ -7283,23 +7407,23 @@
                 <a:sym typeface="Arial"/>
               </a:defRPr>
             </a:lvl5pPr>
-            <a:lvl6pPr indent="0" lvl="5" marL="0" marR="0" algn="r">
-              <a:lnSpc>
-                <a:spcPct val="100000"/>
-              </a:lnSpc>
-              <a:spcBef>
-                <a:spcPts val="0"/>
-              </a:spcBef>
-              <a:spcAft>
-                <a:spcPts val="0"/>
-              </a:spcAft>
-              <a:buClr>
-                <a:srgbClr val="000000"/>
-              </a:buClr>
-              <a:buSzPts val="1900"/>
-              <a:buFont typeface="Arial"/>
-              <a:buNone/>
-              <a:defRPr b="0" i="0" sz="1900" u="none" cap="none" strike="noStrike">
+            <a:lvl6pPr marL="0" marR="0" lvl="5" indent="0" algn="r">
+              <a:lnSpc>
+                <a:spcPct val="100000"/>
+              </a:lnSpc>
+              <a:spcBef>
+                <a:spcPts val="0"/>
+              </a:spcBef>
+              <a:spcAft>
+                <a:spcPts val="0"/>
+              </a:spcAft>
+              <a:buClr>
+                <a:srgbClr val="000000"/>
+              </a:buClr>
+              <a:buSzPts val="1900"/>
+              <a:buFont typeface="Arial"/>
+              <a:buNone/>
+              <a:defRPr sz="1900" b="0" i="0" u="none" strike="noStrike" cap="none">
                 <a:solidFill>
                   <a:schemeClr val="dk2"/>
                 </a:solidFill>
@@ -7309,23 +7433,23 @@
                 <a:sym typeface="Arial"/>
               </a:defRPr>
             </a:lvl6pPr>
-            <a:lvl7pPr indent="0" lvl="6" marL="0" marR="0" algn="r">
-              <a:lnSpc>
-                <a:spcPct val="100000"/>
-              </a:lnSpc>
-              <a:spcBef>
-                <a:spcPts val="0"/>
-              </a:spcBef>
-              <a:spcAft>
-                <a:spcPts val="0"/>
-              </a:spcAft>
-              <a:buClr>
-                <a:srgbClr val="000000"/>
-              </a:buClr>
-              <a:buSzPts val="1900"/>
-              <a:buFont typeface="Arial"/>
-              <a:buNone/>
-              <a:defRPr b="0" i="0" sz="1900" u="none" cap="none" strike="noStrike">
+            <a:lvl7pPr marL="0" marR="0" lvl="6" indent="0" algn="r">
+              <a:lnSpc>
+                <a:spcPct val="100000"/>
+              </a:lnSpc>
+              <a:spcBef>
+                <a:spcPts val="0"/>
+              </a:spcBef>
+              <a:spcAft>
+                <a:spcPts val="0"/>
+              </a:spcAft>
+              <a:buClr>
+                <a:srgbClr val="000000"/>
+              </a:buClr>
+              <a:buSzPts val="1900"/>
+              <a:buFont typeface="Arial"/>
+              <a:buNone/>
+              <a:defRPr sz="1900" b="0" i="0" u="none" strike="noStrike" cap="none">
                 <a:solidFill>
                   <a:schemeClr val="dk2"/>
                 </a:solidFill>
@@ -7335,23 +7459,23 @@
                 <a:sym typeface="Arial"/>
               </a:defRPr>
             </a:lvl7pPr>
-            <a:lvl8pPr indent="0" lvl="7" marL="0" marR="0" algn="r">
-              <a:lnSpc>
-                <a:spcPct val="100000"/>
-              </a:lnSpc>
-              <a:spcBef>
-                <a:spcPts val="0"/>
-              </a:spcBef>
-              <a:spcAft>
-                <a:spcPts val="0"/>
-              </a:spcAft>
-              <a:buClr>
-                <a:srgbClr val="000000"/>
-              </a:buClr>
-              <a:buSzPts val="1900"/>
-              <a:buFont typeface="Arial"/>
-              <a:buNone/>
-              <a:defRPr b="0" i="0" sz="1900" u="none" cap="none" strike="noStrike">
+            <a:lvl8pPr marL="0" marR="0" lvl="7" indent="0" algn="r">
+              <a:lnSpc>
+                <a:spcPct val="100000"/>
+              </a:lnSpc>
+              <a:spcBef>
+                <a:spcPts val="0"/>
+              </a:spcBef>
+              <a:spcAft>
+                <a:spcPts val="0"/>
+              </a:spcAft>
+              <a:buClr>
+                <a:srgbClr val="000000"/>
+              </a:buClr>
+              <a:buSzPts val="1900"/>
+              <a:buFont typeface="Arial"/>
+              <a:buNone/>
+              <a:defRPr sz="1900" b="0" i="0" u="none" strike="noStrike" cap="none">
                 <a:solidFill>
                   <a:schemeClr val="dk2"/>
                 </a:solidFill>
@@ -7361,23 +7485,23 @@
                 <a:sym typeface="Arial"/>
               </a:defRPr>
             </a:lvl8pPr>
-            <a:lvl9pPr indent="0" lvl="8" marL="0" marR="0" algn="r">
-              <a:lnSpc>
-                <a:spcPct val="100000"/>
-              </a:lnSpc>
-              <a:spcBef>
-                <a:spcPts val="0"/>
-              </a:spcBef>
-              <a:spcAft>
-                <a:spcPts val="0"/>
-              </a:spcAft>
-              <a:buClr>
-                <a:srgbClr val="000000"/>
-              </a:buClr>
-              <a:buSzPts val="1900"/>
-              <a:buFont typeface="Arial"/>
-              <a:buNone/>
-              <a:defRPr b="0" i="0" sz="1900" u="none" cap="none" strike="noStrike">
+            <a:lvl9pPr marL="0" marR="0" lvl="8" indent="0" algn="r">
+              <a:lnSpc>
+                <a:spcPct val="100000"/>
+              </a:lnSpc>
+              <a:spcBef>
+                <a:spcPts val="0"/>
+              </a:spcBef>
+              <a:spcAft>
+                <a:spcPts val="0"/>
+              </a:spcAft>
+              <a:buClr>
+                <a:srgbClr val="000000"/>
+              </a:buClr>
+              <a:buSzPts val="1900"/>
+              <a:buFont typeface="Arial"/>
+              <a:buNone/>
+              <a:defRPr sz="1900" b="0" i="0" u="none" strike="noStrike" cap="none">
                 <a:solidFill>
                   <a:schemeClr val="dk2"/>
                 </a:solidFill>
@@ -7389,7 +7513,7 @@
             </a:lvl9pPr>
           </a:lstStyle>
           <a:p>
-            <a:pPr indent="0" lvl="0" marL="0" rtl="0" algn="r">
+            <a:pPr marL="0" lvl="0" indent="0" algn="r" rtl="0">
               <a:spcBef>
                 <a:spcPts val="0"/>
               </a:spcBef>
@@ -7415,18 +7539,19 @@
 </file>
 
 <file path=ppt/slideMasters/slideMaster1.xml><?xml version="1.0" encoding="utf-8"?>
-<p:sldMaster xmlns:a="http://schemas.openxmlformats.org/drawingml/2006/main" xmlns:r="http://schemas.openxmlformats.org/officeDocument/2006/relationships" xmlns:mc="http://schemas.openxmlformats.org/markup-compatibility/2006" xmlns:mv="urn:schemas-microsoft-com:mac:vml" xmlns:p="http://schemas.openxmlformats.org/presentationml/2006/main" xmlns:c="http://schemas.openxmlformats.org/drawingml/2006/chart" xmlns:dgm="http://schemas.openxmlformats.org/drawingml/2006/diagram" xmlns:o="urn:schemas-microsoft-com:office:office" xmlns:v="urn:schemas-microsoft-com:vml" xmlns:pvml="urn:schemas-microsoft-com:office:powerpoint" xmlns:com="http://schemas.openxmlformats.org/drawingml/2006/compatibility" xmlns:p14="http://schemas.microsoft.com/office/powerpoint/2010/main" xmlns:p15="http://schemas.microsoft.com/office/powerpoint/2012/main" xmlns:ahyp="http://schemas.microsoft.com/office/drawing/2018/hyperlinkcolor">
+<p:sldMaster xmlns:a="http://schemas.openxmlformats.org/drawingml/2006/main" xmlns:r="http://schemas.openxmlformats.org/officeDocument/2006/relationships" xmlns:p="http://schemas.openxmlformats.org/presentationml/2006/main">
   <p:cSld name="simple-light-2">
     <p:bg>
       <p:bgPr>
         <a:solidFill>
           <a:schemeClr val="lt1"/>
         </a:solidFill>
+        <a:effectLst/>
       </p:bgPr>
     </p:bg>
     <p:spTree>
       <p:nvGrpSpPr>
-        <p:cNvPr id="5" name="Shape 5"/>
+        <p:cNvPr id="1" name="Shape 5"/>
         <p:cNvGrpSpPr/>
         <p:nvPr/>
       </p:nvGrpSpPr>
@@ -7441,7 +7566,9 @@
       <p:sp>
         <p:nvSpPr>
           <p:cNvPr id="6" name="Google Shape;6;p1"/>
-          <p:cNvSpPr txBox="1"/>
+          <p:cNvSpPr txBox="1">
+            <a:spLocks noGrp="1"/>
+          </p:cNvSpPr>
           <p:nvPr>
             <p:ph type="title"/>
           </p:nvPr>
@@ -7460,11 +7587,11 @@
           </a:ln>
         </p:spPr>
         <p:txBody>
-          <a:bodyPr anchorCtr="0" anchor="t" bIns="176925" lIns="176925" spcFirstLastPara="1" rIns="176925" wrap="square" tIns="176925">
+          <a:bodyPr spcFirstLastPara="1" wrap="square" lIns="176925" tIns="176925" rIns="176925" bIns="176925" anchor="t" anchorCtr="0">
             <a:normAutofit/>
           </a:bodyPr>
           <a:lstStyle>
-            <a:lvl1pPr lvl="0" marR="0" rtl="0" algn="l">
+            <a:lvl1pPr marR="0" lvl="0" algn="l" rtl="0">
               <a:lnSpc>
                 <a:spcPct val="100000"/>
               </a:lnSpc>
@@ -7480,7 +7607,7 @@
               <a:buSzPts val="5400"/>
               <a:buFont typeface="Arial"/>
               <a:buNone/>
-              <a:defRPr b="0" i="0" sz="5400" u="none" cap="none" strike="noStrike">
+              <a:defRPr sz="5400" b="0" i="0" u="none" strike="noStrike" cap="none">
                 <a:solidFill>
                   <a:schemeClr val="dk1"/>
                 </a:solidFill>
@@ -7490,7 +7617,7 @@
                 <a:sym typeface="Arial"/>
               </a:defRPr>
             </a:lvl1pPr>
-            <a:lvl2pPr lvl="1" marR="0" rtl="0" algn="l">
+            <a:lvl2pPr marR="0" lvl="1" algn="l" rtl="0">
               <a:lnSpc>
                 <a:spcPct val="100000"/>
               </a:lnSpc>
@@ -7506,7 +7633,7 @@
               <a:buSzPts val="5400"/>
               <a:buFont typeface="Arial"/>
               <a:buNone/>
-              <a:defRPr b="0" i="0" sz="5400" u="none" cap="none" strike="noStrike">
+              <a:defRPr sz="5400" b="0" i="0" u="none" strike="noStrike" cap="none">
                 <a:solidFill>
                   <a:schemeClr val="dk1"/>
                 </a:solidFill>
@@ -7516,7 +7643,7 @@
                 <a:sym typeface="Arial"/>
               </a:defRPr>
             </a:lvl2pPr>
-            <a:lvl3pPr lvl="2" marR="0" rtl="0" algn="l">
+            <a:lvl3pPr marR="0" lvl="2" algn="l" rtl="0">
               <a:lnSpc>
                 <a:spcPct val="100000"/>
               </a:lnSpc>
@@ -7532,7 +7659,7 @@
               <a:buSzPts val="5400"/>
               <a:buFont typeface="Arial"/>
               <a:buNone/>
-              <a:defRPr b="0" i="0" sz="5400" u="none" cap="none" strike="noStrike">
+              <a:defRPr sz="5400" b="0" i="0" u="none" strike="noStrike" cap="none">
                 <a:solidFill>
                   <a:schemeClr val="dk1"/>
                 </a:solidFill>
@@ -7542,7 +7669,7 @@
                 <a:sym typeface="Arial"/>
               </a:defRPr>
             </a:lvl3pPr>
-            <a:lvl4pPr lvl="3" marR="0" rtl="0" algn="l">
+            <a:lvl4pPr marR="0" lvl="3" algn="l" rtl="0">
               <a:lnSpc>
                 <a:spcPct val="100000"/>
               </a:lnSpc>
@@ -7558,7 +7685,7 @@
               <a:buSzPts val="5400"/>
               <a:buFont typeface="Arial"/>
               <a:buNone/>
-              <a:defRPr b="0" i="0" sz="5400" u="none" cap="none" strike="noStrike">
+              <a:defRPr sz="5400" b="0" i="0" u="none" strike="noStrike" cap="none">
                 <a:solidFill>
                   <a:schemeClr val="dk1"/>
                 </a:solidFill>
@@ -7568,7 +7695,7 @@
                 <a:sym typeface="Arial"/>
               </a:defRPr>
             </a:lvl4pPr>
-            <a:lvl5pPr lvl="4" marR="0" rtl="0" algn="l">
+            <a:lvl5pPr marR="0" lvl="4" algn="l" rtl="0">
               <a:lnSpc>
                 <a:spcPct val="100000"/>
               </a:lnSpc>
@@ -7584,7 +7711,7 @@
               <a:buSzPts val="5400"/>
               <a:buFont typeface="Arial"/>
               <a:buNone/>
-              <a:defRPr b="0" i="0" sz="5400" u="none" cap="none" strike="noStrike">
+              <a:defRPr sz="5400" b="0" i="0" u="none" strike="noStrike" cap="none">
                 <a:solidFill>
                   <a:schemeClr val="dk1"/>
                 </a:solidFill>
@@ -7594,7 +7721,7 @@
                 <a:sym typeface="Arial"/>
               </a:defRPr>
             </a:lvl5pPr>
-            <a:lvl6pPr lvl="5" marR="0" rtl="0" algn="l">
+            <a:lvl6pPr marR="0" lvl="5" algn="l" rtl="0">
               <a:lnSpc>
                 <a:spcPct val="100000"/>
               </a:lnSpc>
@@ -7610,7 +7737,7 @@
               <a:buSzPts val="5400"/>
               <a:buFont typeface="Arial"/>
               <a:buNone/>
-              <a:defRPr b="0" i="0" sz="5400" u="none" cap="none" strike="noStrike">
+              <a:defRPr sz="5400" b="0" i="0" u="none" strike="noStrike" cap="none">
                 <a:solidFill>
                   <a:schemeClr val="dk1"/>
                 </a:solidFill>
@@ -7620,7 +7747,7 @@
                 <a:sym typeface="Arial"/>
               </a:defRPr>
             </a:lvl6pPr>
-            <a:lvl7pPr lvl="6" marR="0" rtl="0" algn="l">
+            <a:lvl7pPr marR="0" lvl="6" algn="l" rtl="0">
               <a:lnSpc>
                 <a:spcPct val="100000"/>
               </a:lnSpc>
@@ -7636,7 +7763,7 @@
               <a:buSzPts val="5400"/>
               <a:buFont typeface="Arial"/>
               <a:buNone/>
-              <a:defRPr b="0" i="0" sz="5400" u="none" cap="none" strike="noStrike">
+              <a:defRPr sz="5400" b="0" i="0" u="none" strike="noStrike" cap="none">
                 <a:solidFill>
                   <a:schemeClr val="dk1"/>
                 </a:solidFill>
@@ -7646,7 +7773,7 @@
                 <a:sym typeface="Arial"/>
               </a:defRPr>
             </a:lvl7pPr>
-            <a:lvl8pPr lvl="7" marR="0" rtl="0" algn="l">
+            <a:lvl8pPr marR="0" lvl="7" algn="l" rtl="0">
               <a:lnSpc>
                 <a:spcPct val="100000"/>
               </a:lnSpc>
@@ -7662,7 +7789,7 @@
               <a:buSzPts val="5400"/>
               <a:buFont typeface="Arial"/>
               <a:buNone/>
-              <a:defRPr b="0" i="0" sz="5400" u="none" cap="none" strike="noStrike">
+              <a:defRPr sz="5400" b="0" i="0" u="none" strike="noStrike" cap="none">
                 <a:solidFill>
                   <a:schemeClr val="dk1"/>
                 </a:solidFill>
@@ -7672,7 +7799,7 @@
                 <a:sym typeface="Arial"/>
               </a:defRPr>
             </a:lvl8pPr>
-            <a:lvl9pPr lvl="8" marR="0" rtl="0" algn="l">
+            <a:lvl9pPr marR="0" lvl="8" algn="l" rtl="0">
               <a:lnSpc>
                 <a:spcPct val="100000"/>
               </a:lnSpc>
@@ -7688,7 +7815,7 @@
               <a:buSzPts val="5400"/>
               <a:buFont typeface="Arial"/>
               <a:buNone/>
-              <a:defRPr b="0" i="0" sz="5400" u="none" cap="none" strike="noStrike">
+              <a:defRPr sz="5400" b="0" i="0" u="none" strike="noStrike" cap="none">
                 <a:solidFill>
                   <a:schemeClr val="dk1"/>
                 </a:solidFill>
@@ -7699,15 +7826,19 @@
               </a:defRPr>
             </a:lvl9pPr>
           </a:lstStyle>
-          <a:p/>
+          <a:p>
+            <a:endParaRPr/>
+          </a:p>
         </p:txBody>
       </p:sp>
       <p:sp>
         <p:nvSpPr>
           <p:cNvPr id="7" name="Google Shape;7;p1"/>
-          <p:cNvSpPr txBox="1"/>
+          <p:cNvSpPr txBox="1">
+            <a:spLocks noGrp="1"/>
+          </p:cNvSpPr>
           <p:nvPr>
-            <p:ph idx="1" type="body"/>
+            <p:ph type="body" idx="1"/>
           </p:nvPr>
         </p:nvSpPr>
         <p:spPr>
@@ -7724,11 +7855,11 @@
           </a:ln>
         </p:spPr>
         <p:txBody>
-          <a:bodyPr anchorCtr="0" anchor="t" bIns="176925" lIns="176925" spcFirstLastPara="1" rIns="176925" wrap="square" tIns="176925">
+          <a:bodyPr spcFirstLastPara="1" wrap="square" lIns="176925" tIns="176925" rIns="176925" bIns="176925" anchor="t" anchorCtr="0">
             <a:normAutofit/>
           </a:bodyPr>
           <a:lstStyle>
-            <a:lvl1pPr indent="-450850" lvl="0" marL="457200" marR="0" rtl="0" algn="l">
+            <a:lvl1pPr marL="457200" marR="0" lvl="0" indent="-450850" algn="l" rtl="0">
               <a:lnSpc>
                 <a:spcPct val="115000"/>
               </a:lnSpc>
@@ -7744,7 +7875,7 @@
               <a:buSzPts val="3500"/>
               <a:buFont typeface="Arial"/>
               <a:buChar char="●"/>
-              <a:defRPr b="0" i="0" sz="3500" u="none" cap="none" strike="noStrike">
+              <a:defRPr sz="3500" b="0" i="0" u="none" strike="noStrike" cap="none">
                 <a:solidFill>
                   <a:schemeClr val="dk2"/>
                 </a:solidFill>
@@ -7754,7 +7885,7 @@
                 <a:sym typeface="Arial"/>
               </a:defRPr>
             </a:lvl1pPr>
-            <a:lvl2pPr indent="-400050" lvl="1" marL="914400" marR="0" rtl="0" algn="l">
+            <a:lvl2pPr marL="914400" marR="0" lvl="1" indent="-400050" algn="l" rtl="0">
               <a:lnSpc>
                 <a:spcPct val="115000"/>
               </a:lnSpc>
@@ -7770,7 +7901,7 @@
               <a:buSzPts val="2700"/>
               <a:buFont typeface="Arial"/>
               <a:buChar char="○"/>
-              <a:defRPr b="0" i="0" sz="2700" u="none" cap="none" strike="noStrike">
+              <a:defRPr sz="2700" b="0" i="0" u="none" strike="noStrike" cap="none">
                 <a:solidFill>
                   <a:schemeClr val="dk2"/>
                 </a:solidFill>
@@ -7780,7 +7911,7 @@
                 <a:sym typeface="Arial"/>
               </a:defRPr>
             </a:lvl2pPr>
-            <a:lvl3pPr indent="-400050" lvl="2" marL="1371600" marR="0" rtl="0" algn="l">
+            <a:lvl3pPr marL="1371600" marR="0" lvl="2" indent="-400050" algn="l" rtl="0">
               <a:lnSpc>
                 <a:spcPct val="115000"/>
               </a:lnSpc>
@@ -7796,7 +7927,7 @@
               <a:buSzPts val="2700"/>
               <a:buFont typeface="Arial"/>
               <a:buChar char="■"/>
-              <a:defRPr b="0" i="0" sz="2700" u="none" cap="none" strike="noStrike">
+              <a:defRPr sz="2700" b="0" i="0" u="none" strike="noStrike" cap="none">
                 <a:solidFill>
                   <a:schemeClr val="dk2"/>
                 </a:solidFill>
@@ -7806,7 +7937,7 @@
                 <a:sym typeface="Arial"/>
               </a:defRPr>
             </a:lvl3pPr>
-            <a:lvl4pPr indent="-400050" lvl="3" marL="1828800" marR="0" rtl="0" algn="l">
+            <a:lvl4pPr marL="1828800" marR="0" lvl="3" indent="-400050" algn="l" rtl="0">
               <a:lnSpc>
                 <a:spcPct val="115000"/>
               </a:lnSpc>
@@ -7822,7 +7953,7 @@
               <a:buSzPts val="2700"/>
               <a:buFont typeface="Arial"/>
               <a:buChar char="●"/>
-              <a:defRPr b="0" i="0" sz="2700" u="none" cap="none" strike="noStrike">
+              <a:defRPr sz="2700" b="0" i="0" u="none" strike="noStrike" cap="none">
                 <a:solidFill>
                   <a:schemeClr val="dk2"/>
                 </a:solidFill>
@@ -7832,7 +7963,7 @@
                 <a:sym typeface="Arial"/>
               </a:defRPr>
             </a:lvl4pPr>
-            <a:lvl5pPr indent="-400050" lvl="4" marL="2286000" marR="0" rtl="0" algn="l">
+            <a:lvl5pPr marL="2286000" marR="0" lvl="4" indent="-400050" algn="l" rtl="0">
               <a:lnSpc>
                 <a:spcPct val="115000"/>
               </a:lnSpc>
@@ -7848,7 +7979,7 @@
               <a:buSzPts val="2700"/>
               <a:buFont typeface="Arial"/>
               <a:buChar char="○"/>
-              <a:defRPr b="0" i="0" sz="2700" u="none" cap="none" strike="noStrike">
+              <a:defRPr sz="2700" b="0" i="0" u="none" strike="noStrike" cap="none">
                 <a:solidFill>
                   <a:schemeClr val="dk2"/>
                 </a:solidFill>
@@ -7858,7 +7989,7 @@
                 <a:sym typeface="Arial"/>
               </a:defRPr>
             </a:lvl5pPr>
-            <a:lvl6pPr indent="-400050" lvl="5" marL="2743200" marR="0" rtl="0" algn="l">
+            <a:lvl6pPr marL="2743200" marR="0" lvl="5" indent="-400050" algn="l" rtl="0">
               <a:lnSpc>
                 <a:spcPct val="115000"/>
               </a:lnSpc>
@@ -7874,7 +8005,7 @@
               <a:buSzPts val="2700"/>
               <a:buFont typeface="Arial"/>
               <a:buChar char="■"/>
-              <a:defRPr b="0" i="0" sz="2700" u="none" cap="none" strike="noStrike">
+              <a:defRPr sz="2700" b="0" i="0" u="none" strike="noStrike" cap="none">
                 <a:solidFill>
                   <a:schemeClr val="dk2"/>
                 </a:solidFill>
@@ -7884,7 +8015,7 @@
                 <a:sym typeface="Arial"/>
               </a:defRPr>
             </a:lvl6pPr>
-            <a:lvl7pPr indent="-400050" lvl="6" marL="3200400" marR="0" rtl="0" algn="l">
+            <a:lvl7pPr marL="3200400" marR="0" lvl="6" indent="-400050" algn="l" rtl="0">
               <a:lnSpc>
                 <a:spcPct val="115000"/>
               </a:lnSpc>
@@ -7900,7 +8031,7 @@
               <a:buSzPts val="2700"/>
               <a:buFont typeface="Arial"/>
               <a:buChar char="●"/>
-              <a:defRPr b="0" i="0" sz="2700" u="none" cap="none" strike="noStrike">
+              <a:defRPr sz="2700" b="0" i="0" u="none" strike="noStrike" cap="none">
                 <a:solidFill>
                   <a:schemeClr val="dk2"/>
                 </a:solidFill>
@@ -7910,7 +8041,7 @@
                 <a:sym typeface="Arial"/>
               </a:defRPr>
             </a:lvl7pPr>
-            <a:lvl8pPr indent="-400050" lvl="7" marL="3657600" marR="0" rtl="0" algn="l">
+            <a:lvl8pPr marL="3657600" marR="0" lvl="7" indent="-400050" algn="l" rtl="0">
               <a:lnSpc>
                 <a:spcPct val="115000"/>
               </a:lnSpc>
@@ -7926,7 +8057,7 @@
               <a:buSzPts val="2700"/>
               <a:buFont typeface="Arial"/>
               <a:buChar char="○"/>
-              <a:defRPr b="0" i="0" sz="2700" u="none" cap="none" strike="noStrike">
+              <a:defRPr sz="2700" b="0" i="0" u="none" strike="noStrike" cap="none">
                 <a:solidFill>
                   <a:schemeClr val="dk2"/>
                 </a:solidFill>
@@ -7936,7 +8067,7 @@
                 <a:sym typeface="Arial"/>
               </a:defRPr>
             </a:lvl8pPr>
-            <a:lvl9pPr indent="-400050" lvl="8" marL="4114800" marR="0" rtl="0" algn="l">
+            <a:lvl9pPr marL="4114800" marR="0" lvl="8" indent="-400050" algn="l" rtl="0">
               <a:lnSpc>
                 <a:spcPct val="115000"/>
               </a:lnSpc>
@@ -7952,7 +8083,7 @@
               <a:buSzPts val="2700"/>
               <a:buFont typeface="Arial"/>
               <a:buChar char="■"/>
-              <a:defRPr b="0" i="0" sz="2700" u="none" cap="none" strike="noStrike">
+              <a:defRPr sz="2700" b="0" i="0" u="none" strike="noStrike" cap="none">
                 <a:solidFill>
                   <a:schemeClr val="dk2"/>
                 </a:solidFill>
@@ -7963,15 +8094,19 @@
               </a:defRPr>
             </a:lvl9pPr>
           </a:lstStyle>
-          <a:p/>
+          <a:p>
+            <a:endParaRPr/>
+          </a:p>
         </p:txBody>
       </p:sp>
       <p:sp>
         <p:nvSpPr>
           <p:cNvPr id="8" name="Google Shape;8;p1"/>
-          <p:cNvSpPr txBox="1"/>
+          <p:cNvSpPr txBox="1">
+            <a:spLocks noGrp="1"/>
+          </p:cNvSpPr>
           <p:nvPr>
-            <p:ph idx="12" type="sldNum"/>
+            <p:ph type="sldNum" idx="12"/>
           </p:nvPr>
         </p:nvSpPr>
         <p:spPr>
@@ -7988,27 +8123,27 @@
           </a:ln>
         </p:spPr>
         <p:txBody>
-          <a:bodyPr anchorCtr="0" anchor="ctr" bIns="176925" lIns="176925" spcFirstLastPara="1" rIns="176925" wrap="square" tIns="176925">
+          <a:bodyPr spcFirstLastPara="1" wrap="square" lIns="176925" tIns="176925" rIns="176925" bIns="176925" anchor="ctr" anchorCtr="0">
             <a:normAutofit/>
           </a:bodyPr>
           <a:lstStyle>
-            <a:lvl1pPr indent="0" lvl="0" marL="0" marR="0" rtl="0" algn="r">
-              <a:lnSpc>
-                <a:spcPct val="100000"/>
-              </a:lnSpc>
-              <a:spcBef>
-                <a:spcPts val="0"/>
-              </a:spcBef>
-              <a:spcAft>
-                <a:spcPts val="0"/>
-              </a:spcAft>
-              <a:buClr>
-                <a:srgbClr val="000000"/>
-              </a:buClr>
-              <a:buSzPts val="1900"/>
-              <a:buFont typeface="Arial"/>
-              <a:buNone/>
-              <a:defRPr b="0" i="0" sz="1900" u="none" cap="none" strike="noStrike">
+            <a:lvl1pPr marL="0" marR="0" lvl="0" indent="0" algn="r" rtl="0">
+              <a:lnSpc>
+                <a:spcPct val="100000"/>
+              </a:lnSpc>
+              <a:spcBef>
+                <a:spcPts val="0"/>
+              </a:spcBef>
+              <a:spcAft>
+                <a:spcPts val="0"/>
+              </a:spcAft>
+              <a:buClr>
+                <a:srgbClr val="000000"/>
+              </a:buClr>
+              <a:buSzPts val="1900"/>
+              <a:buFont typeface="Arial"/>
+              <a:buNone/>
+              <a:defRPr sz="1900" b="0" i="0" u="none" strike="noStrike" cap="none">
                 <a:solidFill>
                   <a:schemeClr val="dk2"/>
                 </a:solidFill>
@@ -8018,23 +8153,23 @@
                 <a:sym typeface="Arial"/>
               </a:defRPr>
             </a:lvl1pPr>
-            <a:lvl2pPr indent="0" lvl="1" marL="0" marR="0" rtl="0" algn="r">
-              <a:lnSpc>
-                <a:spcPct val="100000"/>
-              </a:lnSpc>
-              <a:spcBef>
-                <a:spcPts val="0"/>
-              </a:spcBef>
-              <a:spcAft>
-                <a:spcPts val="0"/>
-              </a:spcAft>
-              <a:buClr>
-                <a:srgbClr val="000000"/>
-              </a:buClr>
-              <a:buSzPts val="1900"/>
-              <a:buFont typeface="Arial"/>
-              <a:buNone/>
-              <a:defRPr b="0" i="0" sz="1900" u="none" cap="none" strike="noStrike">
+            <a:lvl2pPr marL="0" marR="0" lvl="1" indent="0" algn="r" rtl="0">
+              <a:lnSpc>
+                <a:spcPct val="100000"/>
+              </a:lnSpc>
+              <a:spcBef>
+                <a:spcPts val="0"/>
+              </a:spcBef>
+              <a:spcAft>
+                <a:spcPts val="0"/>
+              </a:spcAft>
+              <a:buClr>
+                <a:srgbClr val="000000"/>
+              </a:buClr>
+              <a:buSzPts val="1900"/>
+              <a:buFont typeface="Arial"/>
+              <a:buNone/>
+              <a:defRPr sz="1900" b="0" i="0" u="none" strike="noStrike" cap="none">
                 <a:solidFill>
                   <a:schemeClr val="dk2"/>
                 </a:solidFill>
@@ -8044,23 +8179,23 @@
                 <a:sym typeface="Arial"/>
               </a:defRPr>
             </a:lvl2pPr>
-            <a:lvl3pPr indent="0" lvl="2" marL="0" marR="0" rtl="0" algn="r">
-              <a:lnSpc>
-                <a:spcPct val="100000"/>
-              </a:lnSpc>
-              <a:spcBef>
-                <a:spcPts val="0"/>
-              </a:spcBef>
-              <a:spcAft>
-                <a:spcPts val="0"/>
-              </a:spcAft>
-              <a:buClr>
-                <a:srgbClr val="000000"/>
-              </a:buClr>
-              <a:buSzPts val="1900"/>
-              <a:buFont typeface="Arial"/>
-              <a:buNone/>
-              <a:defRPr b="0" i="0" sz="1900" u="none" cap="none" strike="noStrike">
+            <a:lvl3pPr marL="0" marR="0" lvl="2" indent="0" algn="r" rtl="0">
+              <a:lnSpc>
+                <a:spcPct val="100000"/>
+              </a:lnSpc>
+              <a:spcBef>
+                <a:spcPts val="0"/>
+              </a:spcBef>
+              <a:spcAft>
+                <a:spcPts val="0"/>
+              </a:spcAft>
+              <a:buClr>
+                <a:srgbClr val="000000"/>
+              </a:buClr>
+              <a:buSzPts val="1900"/>
+              <a:buFont typeface="Arial"/>
+              <a:buNone/>
+              <a:defRPr sz="1900" b="0" i="0" u="none" strike="noStrike" cap="none">
                 <a:solidFill>
                   <a:schemeClr val="dk2"/>
                 </a:solidFill>
@@ -8070,23 +8205,23 @@
                 <a:sym typeface="Arial"/>
               </a:defRPr>
             </a:lvl3pPr>
-            <a:lvl4pPr indent="0" lvl="3" marL="0" marR="0" rtl="0" algn="r">
-              <a:lnSpc>
-                <a:spcPct val="100000"/>
-              </a:lnSpc>
-              <a:spcBef>
-                <a:spcPts val="0"/>
-              </a:spcBef>
-              <a:spcAft>
-                <a:spcPts val="0"/>
-              </a:spcAft>
-              <a:buClr>
-                <a:srgbClr val="000000"/>
-              </a:buClr>
-              <a:buSzPts val="1900"/>
-              <a:buFont typeface="Arial"/>
-              <a:buNone/>
-              <a:defRPr b="0" i="0" sz="1900" u="none" cap="none" strike="noStrike">
+            <a:lvl4pPr marL="0" marR="0" lvl="3" indent="0" algn="r" rtl="0">
+              <a:lnSpc>
+                <a:spcPct val="100000"/>
+              </a:lnSpc>
+              <a:spcBef>
+                <a:spcPts val="0"/>
+              </a:spcBef>
+              <a:spcAft>
+                <a:spcPts val="0"/>
+              </a:spcAft>
+              <a:buClr>
+                <a:srgbClr val="000000"/>
+              </a:buClr>
+              <a:buSzPts val="1900"/>
+              <a:buFont typeface="Arial"/>
+              <a:buNone/>
+              <a:defRPr sz="1900" b="0" i="0" u="none" strike="noStrike" cap="none">
                 <a:solidFill>
                   <a:schemeClr val="dk2"/>
                 </a:solidFill>
@@ -8096,23 +8231,23 @@
                 <a:sym typeface="Arial"/>
               </a:defRPr>
             </a:lvl4pPr>
-            <a:lvl5pPr indent="0" lvl="4" marL="0" marR="0" rtl="0" algn="r">
-              <a:lnSpc>
-                <a:spcPct val="100000"/>
-              </a:lnSpc>
-              <a:spcBef>
-                <a:spcPts val="0"/>
-              </a:spcBef>
-              <a:spcAft>
-                <a:spcPts val="0"/>
-              </a:spcAft>
-              <a:buClr>
-                <a:srgbClr val="000000"/>
-              </a:buClr>
-              <a:buSzPts val="1900"/>
-              <a:buFont typeface="Arial"/>
-              <a:buNone/>
-              <a:defRPr b="0" i="0" sz="1900" u="none" cap="none" strike="noStrike">
+            <a:lvl5pPr marL="0" marR="0" lvl="4" indent="0" algn="r" rtl="0">
+              <a:lnSpc>
+                <a:spcPct val="100000"/>
+              </a:lnSpc>
+              <a:spcBef>
+                <a:spcPts val="0"/>
+              </a:spcBef>
+              <a:spcAft>
+                <a:spcPts val="0"/>
+              </a:spcAft>
+              <a:buClr>
+                <a:srgbClr val="000000"/>
+              </a:buClr>
+              <a:buSzPts val="1900"/>
+              <a:buFont typeface="Arial"/>
+              <a:buNone/>
+              <a:defRPr sz="1900" b="0" i="0" u="none" strike="noStrike" cap="none">
                 <a:solidFill>
                   <a:schemeClr val="dk2"/>
                 </a:solidFill>
@@ -8122,23 +8257,23 @@
                 <a:sym typeface="Arial"/>
               </a:defRPr>
             </a:lvl5pPr>
-            <a:lvl6pPr indent="0" lvl="5" marL="0" marR="0" rtl="0" algn="r">
-              <a:lnSpc>
-                <a:spcPct val="100000"/>
-              </a:lnSpc>
-              <a:spcBef>
-                <a:spcPts val="0"/>
-              </a:spcBef>
-              <a:spcAft>
-                <a:spcPts val="0"/>
-              </a:spcAft>
-              <a:buClr>
-                <a:srgbClr val="000000"/>
-              </a:buClr>
-              <a:buSzPts val="1900"/>
-              <a:buFont typeface="Arial"/>
-              <a:buNone/>
-              <a:defRPr b="0" i="0" sz="1900" u="none" cap="none" strike="noStrike">
+            <a:lvl6pPr marL="0" marR="0" lvl="5" indent="0" algn="r" rtl="0">
+              <a:lnSpc>
+                <a:spcPct val="100000"/>
+              </a:lnSpc>
+              <a:spcBef>
+                <a:spcPts val="0"/>
+              </a:spcBef>
+              <a:spcAft>
+                <a:spcPts val="0"/>
+              </a:spcAft>
+              <a:buClr>
+                <a:srgbClr val="000000"/>
+              </a:buClr>
+              <a:buSzPts val="1900"/>
+              <a:buFont typeface="Arial"/>
+              <a:buNone/>
+              <a:defRPr sz="1900" b="0" i="0" u="none" strike="noStrike" cap="none">
                 <a:solidFill>
                   <a:schemeClr val="dk2"/>
                 </a:solidFill>
@@ -8148,23 +8283,23 @@
                 <a:sym typeface="Arial"/>
               </a:defRPr>
             </a:lvl6pPr>
-            <a:lvl7pPr indent="0" lvl="6" marL="0" marR="0" rtl="0" algn="r">
-              <a:lnSpc>
-                <a:spcPct val="100000"/>
-              </a:lnSpc>
-              <a:spcBef>
-                <a:spcPts val="0"/>
-              </a:spcBef>
-              <a:spcAft>
-                <a:spcPts val="0"/>
-              </a:spcAft>
-              <a:buClr>
-                <a:srgbClr val="000000"/>
-              </a:buClr>
-              <a:buSzPts val="1900"/>
-              <a:buFont typeface="Arial"/>
-              <a:buNone/>
-              <a:defRPr b="0" i="0" sz="1900" u="none" cap="none" strike="noStrike">
+            <a:lvl7pPr marL="0" marR="0" lvl="6" indent="0" algn="r" rtl="0">
+              <a:lnSpc>
+                <a:spcPct val="100000"/>
+              </a:lnSpc>
+              <a:spcBef>
+                <a:spcPts val="0"/>
+              </a:spcBef>
+              <a:spcAft>
+                <a:spcPts val="0"/>
+              </a:spcAft>
+              <a:buClr>
+                <a:srgbClr val="000000"/>
+              </a:buClr>
+              <a:buSzPts val="1900"/>
+              <a:buFont typeface="Arial"/>
+              <a:buNone/>
+              <a:defRPr sz="1900" b="0" i="0" u="none" strike="noStrike" cap="none">
                 <a:solidFill>
                   <a:schemeClr val="dk2"/>
                 </a:solidFill>
@@ -8174,23 +8309,23 @@
                 <a:sym typeface="Arial"/>
               </a:defRPr>
             </a:lvl7pPr>
-            <a:lvl8pPr indent="0" lvl="7" marL="0" marR="0" rtl="0" algn="r">
-              <a:lnSpc>
-                <a:spcPct val="100000"/>
-              </a:lnSpc>
-              <a:spcBef>
-                <a:spcPts val="0"/>
-              </a:spcBef>
-              <a:spcAft>
-                <a:spcPts val="0"/>
-              </a:spcAft>
-              <a:buClr>
-                <a:srgbClr val="000000"/>
-              </a:buClr>
-              <a:buSzPts val="1900"/>
-              <a:buFont typeface="Arial"/>
-              <a:buNone/>
-              <a:defRPr b="0" i="0" sz="1900" u="none" cap="none" strike="noStrike">
+            <a:lvl8pPr marL="0" marR="0" lvl="7" indent="0" algn="r" rtl="0">
+              <a:lnSpc>
+                <a:spcPct val="100000"/>
+              </a:lnSpc>
+              <a:spcBef>
+                <a:spcPts val="0"/>
+              </a:spcBef>
+              <a:spcAft>
+                <a:spcPts val="0"/>
+              </a:spcAft>
+              <a:buClr>
+                <a:srgbClr val="000000"/>
+              </a:buClr>
+              <a:buSzPts val="1900"/>
+              <a:buFont typeface="Arial"/>
+              <a:buNone/>
+              <a:defRPr sz="1900" b="0" i="0" u="none" strike="noStrike" cap="none">
                 <a:solidFill>
                   <a:schemeClr val="dk2"/>
                 </a:solidFill>
@@ -8200,23 +8335,23 @@
                 <a:sym typeface="Arial"/>
               </a:defRPr>
             </a:lvl8pPr>
-            <a:lvl9pPr indent="0" lvl="8" marL="0" marR="0" rtl="0" algn="r">
-              <a:lnSpc>
-                <a:spcPct val="100000"/>
-              </a:lnSpc>
-              <a:spcBef>
-                <a:spcPts val="0"/>
-              </a:spcBef>
-              <a:spcAft>
-                <a:spcPts val="0"/>
-              </a:spcAft>
-              <a:buClr>
-                <a:srgbClr val="000000"/>
-              </a:buClr>
-              <a:buSzPts val="1900"/>
-              <a:buFont typeface="Arial"/>
-              <a:buNone/>
-              <a:defRPr b="0" i="0" sz="1900" u="none" cap="none" strike="noStrike">
+            <a:lvl9pPr marL="0" marR="0" lvl="8" indent="0" algn="r" rtl="0">
+              <a:lnSpc>
+                <a:spcPct val="100000"/>
+              </a:lnSpc>
+              <a:spcBef>
+                <a:spcPts val="0"/>
+              </a:spcBef>
+              <a:spcAft>
+                <a:spcPts val="0"/>
+              </a:spcAft>
+              <a:buClr>
+                <a:srgbClr val="000000"/>
+              </a:buClr>
+              <a:buSzPts val="1900"/>
+              <a:buFont typeface="Arial"/>
+              <a:buNone/>
+              <a:defRPr sz="1900" b="0" i="0" u="none" strike="noStrike" cap="none">
                 <a:solidFill>
                   <a:schemeClr val="dk2"/>
                 </a:solidFill>
@@ -8228,7 +8363,7 @@
             </a:lvl9pPr>
           </a:lstStyle>
           <a:p>
-            <a:pPr indent="0" lvl="0" marL="0" rtl="0" algn="r">
+            <a:pPr marL="0" lvl="0" indent="0" algn="r" rtl="0">
               <a:spcBef>
                 <a:spcPts val="0"/>
               </a:spcBef>
@@ -8247,7 +8382,7 @@
       </p:sp>
     </p:spTree>
   </p:cSld>
-  <p:clrMap accent1="accent1" accent2="accent2" accent3="accent3" accent4="accent4" accent5="accent5" accent6="accent6" bg1="lt1" bg2="dk2" tx1="dk1" tx2="lt2" folHlink="folHlink" hlink="hlink"/>
+  <p:clrMap bg1="lt1" tx1="dk1" bg2="dk2" tx2="lt2" accent1="accent1" accent2="accent2" accent3="accent3" accent4="accent4" accent5="accent5" accent6="accent6" hlink="hlink" folHlink="folHlink"/>
   <p:sldLayoutIdLst>
     <p:sldLayoutId id="2147483648" r:id="rId1"/>
     <p:sldLayoutId id="2147483649" r:id="rId2"/>
@@ -8261,10 +8396,10 @@
     <p:sldLayoutId id="2147483657" r:id="rId10"/>
     <p:sldLayoutId id="2147483658" r:id="rId11"/>
   </p:sldLayoutIdLst>
-  <p:hf dt="0" ftr="0" hdr="0" sldNum="0"/>
+  <p:hf sldNum="0" hdr="0" ftr="0" dt="0"/>
   <p:txStyles>
     <p:titleStyle>
-      <a:defPPr lvl="0" marR="0" rtl="0" algn="l">
+      <a:defPPr marR="0" lvl="0" algn="l" rtl="0">
         <a:lnSpc>
           <a:spcPct val="100000"/>
         </a:lnSpc>
@@ -8275,7 +8410,7 @@
           <a:spcPts val="0"/>
         </a:spcAft>
       </a:defPPr>
-      <a:lvl1pPr lvl="0" marR="0" rtl="0" algn="l">
+      <a:lvl1pPr marR="0" lvl="0" algn="l" rtl="0">
         <a:lnSpc>
           <a:spcPct val="100000"/>
         </a:lnSpc>
@@ -8289,7 +8424,7 @@
           <a:srgbClr val="000000"/>
         </a:buClr>
         <a:buFont typeface="Arial"/>
-        <a:defRPr b="0" i="0" spc="0" sz="1400" u="none" cap="none" strike="noStrike">
+        <a:defRPr sz="1400" b="0" i="0" u="none" strike="noStrike" cap="none" spc="0">
           <a:solidFill>
             <a:srgbClr val="000000"/>
           </a:solidFill>
@@ -8299,7 +8434,7 @@
           <a:sym typeface="Arial"/>
         </a:defRPr>
       </a:lvl1pPr>
-      <a:lvl2pPr lvl="1" marR="0" rtl="0" algn="l">
+      <a:lvl2pPr marR="0" lvl="1" algn="l" rtl="0">
         <a:lnSpc>
           <a:spcPct val="100000"/>
         </a:lnSpc>
@@ -8313,7 +8448,7 @@
           <a:srgbClr val="000000"/>
         </a:buClr>
         <a:buFont typeface="Arial"/>
-        <a:defRPr b="0" i="0" spc="0" sz="1400" u="none" cap="none" strike="noStrike">
+        <a:defRPr sz="1400" b="0" i="0" u="none" strike="noStrike" cap="none" spc="0">
           <a:solidFill>
             <a:srgbClr val="000000"/>
           </a:solidFill>
@@ -8323,7 +8458,7 @@
           <a:sym typeface="Arial"/>
         </a:defRPr>
       </a:lvl2pPr>
-      <a:lvl3pPr lvl="2" marR="0" rtl="0" algn="l">
+      <a:lvl3pPr marR="0" lvl="2" algn="l" rtl="0">
         <a:lnSpc>
           <a:spcPct val="100000"/>
         </a:lnSpc>
@@ -8337,7 +8472,7 @@
           <a:srgbClr val="000000"/>
         </a:buClr>
         <a:buFont typeface="Arial"/>
-        <a:defRPr b="0" i="0" spc="0" sz="1400" u="none" cap="none" strike="noStrike">
+        <a:defRPr sz="1400" b="0" i="0" u="none" strike="noStrike" cap="none" spc="0">
           <a:solidFill>
             <a:srgbClr val="000000"/>
           </a:solidFill>
@@ -8347,7 +8482,7 @@
           <a:sym typeface="Arial"/>
         </a:defRPr>
       </a:lvl3pPr>
-      <a:lvl4pPr lvl="3" marR="0" rtl="0" algn="l">
+      <a:lvl4pPr marR="0" lvl="3" algn="l" rtl="0">
         <a:lnSpc>
           <a:spcPct val="100000"/>
         </a:lnSpc>
@@ -8361,7 +8496,7 @@
           <a:srgbClr val="000000"/>
         </a:buClr>
         <a:buFont typeface="Arial"/>
-        <a:defRPr b="0" i="0" spc="0" sz="1400" u="none" cap="none" strike="noStrike">
+        <a:defRPr sz="1400" b="0" i="0" u="none" strike="noStrike" cap="none" spc="0">
           <a:solidFill>
             <a:srgbClr val="000000"/>
           </a:solidFill>
@@ -8371,7 +8506,7 @@
           <a:sym typeface="Arial"/>
         </a:defRPr>
       </a:lvl4pPr>
-      <a:lvl5pPr lvl="4" marR="0" rtl="0" algn="l">
+      <a:lvl5pPr marR="0" lvl="4" algn="l" rtl="0">
         <a:lnSpc>
           <a:spcPct val="100000"/>
         </a:lnSpc>
@@ -8385,7 +8520,7 @@
           <a:srgbClr val="000000"/>
         </a:buClr>
         <a:buFont typeface="Arial"/>
-        <a:defRPr b="0" i="0" spc="0" sz="1400" u="none" cap="none" strike="noStrike">
+        <a:defRPr sz="1400" b="0" i="0" u="none" strike="noStrike" cap="none" spc="0">
           <a:solidFill>
             <a:srgbClr val="000000"/>
           </a:solidFill>
@@ -8395,7 +8530,7 @@
           <a:sym typeface="Arial"/>
         </a:defRPr>
       </a:lvl5pPr>
-      <a:lvl6pPr lvl="5" marR="0" rtl="0" algn="l">
+      <a:lvl6pPr marR="0" lvl="5" algn="l" rtl="0">
         <a:lnSpc>
           <a:spcPct val="100000"/>
         </a:lnSpc>
@@ -8409,7 +8544,7 @@
           <a:srgbClr val="000000"/>
         </a:buClr>
         <a:buFont typeface="Arial"/>
-        <a:defRPr b="0" i="0" spc="0" sz="1400" u="none" cap="none" strike="noStrike">
+        <a:defRPr sz="1400" b="0" i="0" u="none" strike="noStrike" cap="none" spc="0">
           <a:solidFill>
             <a:srgbClr val="000000"/>
           </a:solidFill>
@@ -8419,7 +8554,7 @@
           <a:sym typeface="Arial"/>
         </a:defRPr>
       </a:lvl6pPr>
-      <a:lvl7pPr lvl="6" marR="0" rtl="0" algn="l">
+      <a:lvl7pPr marR="0" lvl="6" algn="l" rtl="0">
         <a:lnSpc>
           <a:spcPct val="100000"/>
         </a:lnSpc>
@@ -8433,7 +8568,7 @@
           <a:srgbClr val="000000"/>
         </a:buClr>
         <a:buFont typeface="Arial"/>
-        <a:defRPr b="0" i="0" spc="0" sz="1400" u="none" cap="none" strike="noStrike">
+        <a:defRPr sz="1400" b="0" i="0" u="none" strike="noStrike" cap="none" spc="0">
           <a:solidFill>
             <a:srgbClr val="000000"/>
           </a:solidFill>
@@ -8443,7 +8578,7 @@
           <a:sym typeface="Arial"/>
         </a:defRPr>
       </a:lvl7pPr>
-      <a:lvl8pPr lvl="7" marR="0" rtl="0" algn="l">
+      <a:lvl8pPr marR="0" lvl="7" algn="l" rtl="0">
         <a:lnSpc>
           <a:spcPct val="100000"/>
         </a:lnSpc>
@@ -8457,7 +8592,7 @@
           <a:srgbClr val="000000"/>
         </a:buClr>
         <a:buFont typeface="Arial"/>
-        <a:defRPr b="0" i="0" spc="0" sz="1400" u="none" cap="none" strike="noStrike">
+        <a:defRPr sz="1400" b="0" i="0" u="none" strike="noStrike" cap="none" spc="0">
           <a:solidFill>
             <a:srgbClr val="000000"/>
           </a:solidFill>
@@ -8467,7 +8602,7 @@
           <a:sym typeface="Arial"/>
         </a:defRPr>
       </a:lvl8pPr>
-      <a:lvl9pPr lvl="8" marR="0" rtl="0" algn="l">
+      <a:lvl9pPr marR="0" lvl="8" algn="l" rtl="0">
         <a:lnSpc>
           <a:spcPct val="100000"/>
         </a:lnSpc>
@@ -8481,7 +8616,7 @@
           <a:srgbClr val="000000"/>
         </a:buClr>
         <a:buFont typeface="Arial"/>
-        <a:defRPr b="0" i="0" spc="0" sz="1400" u="none" cap="none" strike="noStrike">
+        <a:defRPr sz="1400" b="0" i="0" u="none" strike="noStrike" cap="none" spc="0">
           <a:solidFill>
             <a:srgbClr val="000000"/>
           </a:solidFill>
@@ -8493,7 +8628,7 @@
       </a:lvl9pPr>
     </p:titleStyle>
     <p:bodyStyle>
-      <a:defPPr lvl="0" marR="0" rtl="0" algn="l">
+      <a:defPPr marR="0" lvl="0" algn="l" rtl="0">
         <a:lnSpc>
           <a:spcPct val="100000"/>
         </a:lnSpc>
@@ -8504,7 +8639,7 @@
           <a:spcPts val="0"/>
         </a:spcAft>
       </a:defPPr>
-      <a:lvl1pPr lvl="0" marR="0" rtl="0" algn="l">
+      <a:lvl1pPr marR="0" lvl="0" algn="l" rtl="0">
         <a:lnSpc>
           <a:spcPct val="100000"/>
         </a:lnSpc>
@@ -8518,7 +8653,7 @@
           <a:srgbClr val="000000"/>
         </a:buClr>
         <a:buFont typeface="Arial"/>
-        <a:defRPr b="0" i="0" spc="0" sz="1400" u="none" cap="none" strike="noStrike">
+        <a:defRPr sz="1400" b="0" i="0" u="none" strike="noStrike" cap="none" spc="0">
           <a:solidFill>
             <a:srgbClr val="000000"/>
           </a:solidFill>
@@ -8528,7 +8663,7 @@
           <a:sym typeface="Arial"/>
         </a:defRPr>
       </a:lvl1pPr>
-      <a:lvl2pPr lvl="1" marR="0" rtl="0" algn="l">
+      <a:lvl2pPr marR="0" lvl="1" algn="l" rtl="0">
         <a:lnSpc>
           <a:spcPct val="100000"/>
         </a:lnSpc>
@@ -8542,7 +8677,7 @@
           <a:srgbClr val="000000"/>
         </a:buClr>
         <a:buFont typeface="Arial"/>
-        <a:defRPr b="0" i="0" spc="0" sz="1400" u="none" cap="none" strike="noStrike">
+        <a:defRPr sz="1400" b="0" i="0" u="none" strike="noStrike" cap="none" spc="0">
           <a:solidFill>
             <a:srgbClr val="000000"/>
           </a:solidFill>
@@ -8552,7 +8687,7 @@
           <a:sym typeface="Arial"/>
         </a:defRPr>
       </a:lvl2pPr>
-      <a:lvl3pPr lvl="2" marR="0" rtl="0" algn="l">
+      <a:lvl3pPr marR="0" lvl="2" algn="l" rtl="0">
         <a:lnSpc>
           <a:spcPct val="100000"/>
         </a:lnSpc>
@@ -8566,7 +8701,7 @@
           <a:srgbClr val="000000"/>
         </a:buClr>
         <a:buFont typeface="Arial"/>
-        <a:defRPr b="0" i="0" spc="0" sz="1400" u="none" cap="none" strike="noStrike">
+        <a:defRPr sz="1400" b="0" i="0" u="none" strike="noStrike" cap="none" spc="0">
           <a:solidFill>
             <a:srgbClr val="000000"/>
           </a:solidFill>
@@ -8576,7 +8711,7 @@
           <a:sym typeface="Arial"/>
         </a:defRPr>
       </a:lvl3pPr>
-      <a:lvl4pPr lvl="3" marR="0" rtl="0" algn="l">
+      <a:lvl4pPr marR="0" lvl="3" algn="l" rtl="0">
         <a:lnSpc>
           <a:spcPct val="100000"/>
         </a:lnSpc>
@@ -8590,7 +8725,7 @@
           <a:srgbClr val="000000"/>
         </a:buClr>
         <a:buFont typeface="Arial"/>
-        <a:defRPr b="0" i="0" spc="0" sz="1400" u="none" cap="none" strike="noStrike">
+        <a:defRPr sz="1400" b="0" i="0" u="none" strike="noStrike" cap="none" spc="0">
           <a:solidFill>
             <a:srgbClr val="000000"/>
           </a:solidFill>
@@ -8600,7 +8735,7 @@
           <a:sym typeface="Arial"/>
         </a:defRPr>
       </a:lvl4pPr>
-      <a:lvl5pPr lvl="4" marR="0" rtl="0" algn="l">
+      <a:lvl5pPr marR="0" lvl="4" algn="l" rtl="0">
         <a:lnSpc>
           <a:spcPct val="100000"/>
         </a:lnSpc>
@@ -8614,7 +8749,7 @@
           <a:srgbClr val="000000"/>
         </a:buClr>
         <a:buFont typeface="Arial"/>
-        <a:defRPr b="0" i="0" spc="0" sz="1400" u="none" cap="none" strike="noStrike">
+        <a:defRPr sz="1400" b="0" i="0" u="none" strike="noStrike" cap="none" spc="0">
           <a:solidFill>
             <a:srgbClr val="000000"/>
           </a:solidFill>
@@ -8624,7 +8759,7 @@
           <a:sym typeface="Arial"/>
         </a:defRPr>
       </a:lvl5pPr>
-      <a:lvl6pPr lvl="5" marR="0" rtl="0" algn="l">
+      <a:lvl6pPr marR="0" lvl="5" algn="l" rtl="0">
         <a:lnSpc>
           <a:spcPct val="100000"/>
         </a:lnSpc>
@@ -8638,7 +8773,7 @@
           <a:srgbClr val="000000"/>
         </a:buClr>
         <a:buFont typeface="Arial"/>
-        <a:defRPr b="0" i="0" spc="0" sz="1400" u="none" cap="none" strike="noStrike">
+        <a:defRPr sz="1400" b="0" i="0" u="none" strike="noStrike" cap="none" spc="0">
           <a:solidFill>
             <a:srgbClr val="000000"/>
           </a:solidFill>
@@ -8648,7 +8783,7 @@
           <a:sym typeface="Arial"/>
         </a:defRPr>
       </a:lvl6pPr>
-      <a:lvl7pPr lvl="6" marR="0" rtl="0" algn="l">
+      <a:lvl7pPr marR="0" lvl="6" algn="l" rtl="0">
         <a:lnSpc>
           <a:spcPct val="100000"/>
         </a:lnSpc>
@@ -8662,7 +8797,7 @@
           <a:srgbClr val="000000"/>
         </a:buClr>
         <a:buFont typeface="Arial"/>
-        <a:defRPr b="0" i="0" spc="0" sz="1400" u="none" cap="none" strike="noStrike">
+        <a:defRPr sz="1400" b="0" i="0" u="none" strike="noStrike" cap="none" spc="0">
           <a:solidFill>
             <a:srgbClr val="000000"/>
           </a:solidFill>
@@ -8672,7 +8807,7 @@
           <a:sym typeface="Arial"/>
         </a:defRPr>
       </a:lvl7pPr>
-      <a:lvl8pPr lvl="7" marR="0" rtl="0" algn="l">
+      <a:lvl8pPr marR="0" lvl="7" algn="l" rtl="0">
         <a:lnSpc>
           <a:spcPct val="100000"/>
         </a:lnSpc>
@@ -8686,7 +8821,7 @@
           <a:srgbClr val="000000"/>
         </a:buClr>
         <a:buFont typeface="Arial"/>
-        <a:defRPr b="0" i="0" spc="0" sz="1400" u="none" cap="none" strike="noStrike">
+        <a:defRPr sz="1400" b="0" i="0" u="none" strike="noStrike" cap="none" spc="0">
           <a:solidFill>
             <a:srgbClr val="000000"/>
           </a:solidFill>
@@ -8696,7 +8831,7 @@
           <a:sym typeface="Arial"/>
         </a:defRPr>
       </a:lvl8pPr>
-      <a:lvl9pPr lvl="8" marR="0" rtl="0" algn="l">
+      <a:lvl9pPr marR="0" lvl="8" algn="l" rtl="0">
         <a:lnSpc>
           <a:spcPct val="100000"/>
         </a:lnSpc>
@@ -8710,7 +8845,7 @@
           <a:srgbClr val="000000"/>
         </a:buClr>
         <a:buFont typeface="Arial"/>
-        <a:defRPr b="0" i="0" spc="0" sz="1400" u="none" cap="none" strike="noStrike">
+        <a:defRPr sz="1400" b="0" i="0" u="none" strike="noStrike" cap="none" spc="0">
           <a:solidFill>
             <a:srgbClr val="000000"/>
           </a:solidFill>
@@ -8722,7 +8857,7 @@
       </a:lvl9pPr>
     </p:bodyStyle>
     <p:otherStyle>
-      <a:defPPr lvl="0" marR="0" rtl="0" algn="l">
+      <a:defPPr marR="0" lvl="0" algn="l" rtl="0">
         <a:lnSpc>
           <a:spcPct val="100000"/>
         </a:lnSpc>
@@ -8733,7 +8868,7 @@
           <a:spcPts val="0"/>
         </a:spcAft>
       </a:defPPr>
-      <a:lvl1pPr lvl="0" marR="0" rtl="0" algn="l">
+      <a:lvl1pPr marR="0" lvl="0" algn="l" rtl="0">
         <a:lnSpc>
           <a:spcPct val="100000"/>
         </a:lnSpc>
@@ -8747,7 +8882,7 @@
           <a:srgbClr val="000000"/>
         </a:buClr>
         <a:buFont typeface="Arial"/>
-        <a:defRPr b="0" i="0" spc="0" sz="1400" u="none" cap="none" strike="noStrike">
+        <a:defRPr sz="1400" b="0" i="0" u="none" strike="noStrike" cap="none" spc="0">
           <a:solidFill>
             <a:srgbClr val="000000"/>
           </a:solidFill>
@@ -8757,7 +8892,7 @@
           <a:sym typeface="Arial"/>
         </a:defRPr>
       </a:lvl1pPr>
-      <a:lvl2pPr lvl="1" marR="0" rtl="0" algn="l">
+      <a:lvl2pPr marR="0" lvl="1" algn="l" rtl="0">
         <a:lnSpc>
           <a:spcPct val="100000"/>
         </a:lnSpc>
@@ -8771,7 +8906,7 @@
           <a:srgbClr val="000000"/>
         </a:buClr>
         <a:buFont typeface="Arial"/>
-        <a:defRPr b="0" i="0" spc="0" sz="1400" u="none" cap="none" strike="noStrike">
+        <a:defRPr sz="1400" b="0" i="0" u="none" strike="noStrike" cap="none" spc="0">
           <a:solidFill>
             <a:srgbClr val="000000"/>
           </a:solidFill>
@@ -8781,7 +8916,7 @@
           <a:sym typeface="Arial"/>
         </a:defRPr>
       </a:lvl2pPr>
-      <a:lvl3pPr lvl="2" marR="0" rtl="0" algn="l">
+      <a:lvl3pPr marR="0" lvl="2" algn="l" rtl="0">
         <a:lnSpc>
           <a:spcPct val="100000"/>
         </a:lnSpc>
@@ -8795,7 +8930,7 @@
           <a:srgbClr val="000000"/>
         </a:buClr>
         <a:buFont typeface="Arial"/>
-        <a:defRPr b="0" i="0" spc="0" sz="1400" u="none" cap="none" strike="noStrike">
+        <a:defRPr sz="1400" b="0" i="0" u="none" strike="noStrike" cap="none" spc="0">
           <a:solidFill>
             <a:srgbClr val="000000"/>
           </a:solidFill>
@@ -8805,7 +8940,7 @@
           <a:sym typeface="Arial"/>
         </a:defRPr>
       </a:lvl3pPr>
-      <a:lvl4pPr lvl="3" marR="0" rtl="0" algn="l">
+      <a:lvl4pPr marR="0" lvl="3" algn="l" rtl="0">
         <a:lnSpc>
           <a:spcPct val="100000"/>
         </a:lnSpc>
@@ -8819,7 +8954,7 @@
           <a:srgbClr val="000000"/>
         </a:buClr>
         <a:buFont typeface="Arial"/>
-        <a:defRPr b="0" i="0" spc="0" sz="1400" u="none" cap="none" strike="noStrike">
+        <a:defRPr sz="1400" b="0" i="0" u="none" strike="noStrike" cap="none" spc="0">
           <a:solidFill>
             <a:srgbClr val="000000"/>
           </a:solidFill>
@@ -8829,7 +8964,7 @@
           <a:sym typeface="Arial"/>
         </a:defRPr>
       </a:lvl4pPr>
-      <a:lvl5pPr lvl="4" marR="0" rtl="0" algn="l">
+      <a:lvl5pPr marR="0" lvl="4" algn="l" rtl="0">
         <a:lnSpc>
           <a:spcPct val="100000"/>
         </a:lnSpc>
@@ -8843,7 +8978,7 @@
           <a:srgbClr val="000000"/>
         </a:buClr>
         <a:buFont typeface="Arial"/>
-        <a:defRPr b="0" i="0" spc="0" sz="1400" u="none" cap="none" strike="noStrike">
+        <a:defRPr sz="1400" b="0" i="0" u="none" strike="noStrike" cap="none" spc="0">
           <a:solidFill>
             <a:srgbClr val="000000"/>
           </a:solidFill>
@@ -8853,7 +8988,7 @@
           <a:sym typeface="Arial"/>
         </a:defRPr>
       </a:lvl5pPr>
-      <a:lvl6pPr lvl="5" marR="0" rtl="0" algn="l">
+      <a:lvl6pPr marR="0" lvl="5" algn="l" rtl="0">
         <a:lnSpc>
           <a:spcPct val="100000"/>
         </a:lnSpc>
@@ -8867,7 +9002,7 @@
           <a:srgbClr val="000000"/>
         </a:buClr>
         <a:buFont typeface="Arial"/>
-        <a:defRPr b="0" i="0" spc="0" sz="1400" u="none" cap="none" strike="noStrike">
+        <a:defRPr sz="1400" b="0" i="0" u="none" strike="noStrike" cap="none" spc="0">
           <a:solidFill>
             <a:srgbClr val="000000"/>
           </a:solidFill>
@@ -8877,7 +9012,7 @@
           <a:sym typeface="Arial"/>
         </a:defRPr>
       </a:lvl6pPr>
-      <a:lvl7pPr lvl="6" marR="0" rtl="0" algn="l">
+      <a:lvl7pPr marR="0" lvl="6" algn="l" rtl="0">
         <a:lnSpc>
           <a:spcPct val="100000"/>
         </a:lnSpc>
@@ -8891,7 +9026,7 @@
           <a:srgbClr val="000000"/>
         </a:buClr>
         <a:buFont typeface="Arial"/>
-        <a:defRPr b="0" i="0" spc="0" sz="1400" u="none" cap="none" strike="noStrike">
+        <a:defRPr sz="1400" b="0" i="0" u="none" strike="noStrike" cap="none" spc="0">
           <a:solidFill>
             <a:srgbClr val="000000"/>
           </a:solidFill>
@@ -8901,7 +9036,7 @@
           <a:sym typeface="Arial"/>
         </a:defRPr>
       </a:lvl7pPr>
-      <a:lvl8pPr lvl="7" marR="0" rtl="0" algn="l">
+      <a:lvl8pPr marR="0" lvl="7" algn="l" rtl="0">
         <a:lnSpc>
           <a:spcPct val="100000"/>
         </a:lnSpc>
@@ -8915,7 +9050,7 @@
           <a:srgbClr val="000000"/>
         </a:buClr>
         <a:buFont typeface="Arial"/>
-        <a:defRPr b="0" i="0" spc="0" sz="1400" u="none" cap="none" strike="noStrike">
+        <a:defRPr sz="1400" b="0" i="0" u="none" strike="noStrike" cap="none" spc="0">
           <a:solidFill>
             <a:srgbClr val="000000"/>
           </a:solidFill>
@@ -8925,7 +9060,7 @@
           <a:sym typeface="Arial"/>
         </a:defRPr>
       </a:lvl8pPr>
-      <a:lvl9pPr lvl="8" marR="0" rtl="0" algn="l">
+      <a:lvl9pPr marR="0" lvl="8" algn="l" rtl="0">
         <a:lnSpc>
           <a:spcPct val="100000"/>
         </a:lnSpc>
@@ -8939,7 +9074,7 @@
           <a:srgbClr val="000000"/>
         </a:buClr>
         <a:buFont typeface="Arial"/>
-        <a:defRPr b="0" i="0" spc="0" sz="1400" u="none" cap="none" strike="noStrike">
+        <a:defRPr sz="1400" b="0" i="0" u="none" strike="noStrike" cap="none" spc="0">
           <a:solidFill>
             <a:srgbClr val="000000"/>
           </a:solidFill>
@@ -8955,7 +9090,7 @@
 </file>
 
 <file path=ppt/slides/slide1.xml><?xml version="1.0" encoding="utf-8"?>
-<p:sld xmlns:a="http://schemas.openxmlformats.org/drawingml/2006/main" xmlns:r="http://schemas.openxmlformats.org/officeDocument/2006/relationships" xmlns:mc="http://schemas.openxmlformats.org/markup-compatibility/2006" xmlns:mv="urn:schemas-microsoft-com:mac:vml" xmlns:p="http://schemas.openxmlformats.org/presentationml/2006/main" xmlns:c="http://schemas.openxmlformats.org/drawingml/2006/chart" xmlns:dgm="http://schemas.openxmlformats.org/drawingml/2006/diagram" xmlns:o="urn:schemas-microsoft-com:office:office" xmlns:v="urn:schemas-microsoft-com:vml" xmlns:pvml="urn:schemas-microsoft-com:office:powerpoint" xmlns:com="http://schemas.openxmlformats.org/drawingml/2006/compatibility" xmlns:p14="http://schemas.microsoft.com/office/powerpoint/2010/main" xmlns:p15="http://schemas.microsoft.com/office/powerpoint/2012/main" xmlns:ahyp="http://schemas.microsoft.com/office/drawing/2018/hyperlinkcolor">
+<p:sld xmlns:a="http://schemas.openxmlformats.org/drawingml/2006/main" xmlns:r="http://schemas.openxmlformats.org/officeDocument/2006/relationships" xmlns:p="http://schemas.openxmlformats.org/presentationml/2006/main">
   <p:cSld>
     <p:bg>
       <p:bgPr>
@@ -8967,11 +9102,12 @@
             <a:fillRect/>
           </a:stretch>
         </a:blipFill>
+        <a:effectLst/>
       </p:bgPr>
     </p:bg>
     <p:spTree>
       <p:nvGrpSpPr>
-        <p:cNvPr id="53" name="Shape 53"/>
+        <p:cNvPr id="1" name="Shape 53"/>
         <p:cNvGrpSpPr/>
         <p:nvPr/>
       </p:nvGrpSpPr>
@@ -9003,12 +9139,12 @@
           </a:ln>
         </p:spPr>
         <p:txBody>
-          <a:bodyPr anchorCtr="0" anchor="t" bIns="91425" lIns="91425" spcFirstLastPara="1" rIns="91425" wrap="square" tIns="91425">
+          <a:bodyPr spcFirstLastPara="1" wrap="square" lIns="91425" tIns="91425" rIns="91425" bIns="91425" anchor="t" anchorCtr="0">
             <a:noAutofit/>
           </a:bodyPr>
           <a:lstStyle/>
           <a:p>
-            <a:pPr indent="0" lvl="0" marL="0" rtl="0" algn="l">
+            <a:pPr marL="0" lvl="0" indent="0" algn="l" rtl="0">
               <a:spcBef>
                 <a:spcPts val="0"/>
               </a:spcBef>
@@ -9018,7 +9154,7 @@
               <a:buNone/>
             </a:pPr>
             <a:r>
-              <a:rPr b="1" lang="es" sz="2800">
+              <a:rPr lang="es" sz="2800" b="1" dirty="0">
                 <a:solidFill>
                   <a:srgbClr val="FAFAFC"/>
                 </a:solidFill>
@@ -9027,9 +9163,9 @@
                 <a:cs typeface="Archivo"/>
                 <a:sym typeface="Archivo"/>
               </a:rPr>
-              <a:t>&lt;&lt;Nombre Completo&gt;&gt;</a:t>
+              <a:t>&lt;&lt;Nombre y Apellido&gt;&gt;</a:t>
             </a:r>
-            <a:endParaRPr sz="3500">
+            <a:endParaRPr sz="3500" dirty="0">
               <a:solidFill>
                 <a:srgbClr val="FAFAFC"/>
               </a:solidFill>
@@ -9046,7 +9182,7 @@
 </file>
 
 <file path=ppt/slides/slide2.xml><?xml version="1.0" encoding="utf-8"?>
-<p:sld xmlns:a="http://schemas.openxmlformats.org/drawingml/2006/main" xmlns:r="http://schemas.openxmlformats.org/officeDocument/2006/relationships" xmlns:mc="http://schemas.openxmlformats.org/markup-compatibility/2006" xmlns:mv="urn:schemas-microsoft-com:mac:vml" xmlns:p="http://schemas.openxmlformats.org/presentationml/2006/main" xmlns:c="http://schemas.openxmlformats.org/drawingml/2006/chart" xmlns:dgm="http://schemas.openxmlformats.org/drawingml/2006/diagram" xmlns:o="urn:schemas-microsoft-com:office:office" xmlns:v="urn:schemas-microsoft-com:vml" xmlns:pvml="urn:schemas-microsoft-com:office:powerpoint" xmlns:com="http://schemas.openxmlformats.org/drawingml/2006/compatibility" xmlns:p14="http://schemas.microsoft.com/office/powerpoint/2010/main" xmlns:p15="http://schemas.microsoft.com/office/powerpoint/2012/main" xmlns:ahyp="http://schemas.microsoft.com/office/drawing/2018/hyperlinkcolor">
+<p:sld xmlns:a="http://schemas.openxmlformats.org/drawingml/2006/main" xmlns:r="http://schemas.openxmlformats.org/officeDocument/2006/relationships" xmlns:p="http://schemas.openxmlformats.org/presentationml/2006/main">
   <p:cSld>
     <p:bg>
       <p:bgPr>
@@ -9058,11 +9194,12 @@
             <a:fillRect/>
           </a:stretch>
         </a:blipFill>
+        <a:effectLst/>
       </p:bgPr>
     </p:bg>
     <p:spTree>
       <p:nvGrpSpPr>
-        <p:cNvPr id="58" name="Shape 58"/>
+        <p:cNvPr id="1" name="Shape 58"/>
         <p:cNvGrpSpPr/>
         <p:nvPr/>
       </p:nvGrpSpPr>
@@ -9094,12 +9231,12 @@
           </a:ln>
         </p:spPr>
         <p:txBody>
-          <a:bodyPr anchorCtr="0" anchor="t" bIns="91425" lIns="91425" spcFirstLastPara="1" rIns="91425" wrap="square" tIns="91425">
+          <a:bodyPr spcFirstLastPara="1" wrap="square" lIns="91425" tIns="91425" rIns="91425" bIns="91425" anchor="t" anchorCtr="0">
             <a:spAutoFit/>
           </a:bodyPr>
           <a:lstStyle/>
           <a:p>
-            <a:pPr indent="0" lvl="0" marL="0" rtl="0" algn="ctr">
+            <a:pPr marL="0" lvl="0" indent="0" algn="ctr" rtl="0">
               <a:spcBef>
                 <a:spcPts val="0"/>
               </a:spcBef>
@@ -9109,7 +9246,7 @@
               <a:buNone/>
             </a:pPr>
             <a:r>
-              <a:rPr b="1" lang="es" sz="2100">
+              <a:rPr lang="es" sz="2100" b="1" dirty="0">
                 <a:solidFill>
                   <a:schemeClr val="lt1"/>
                 </a:solidFill>
@@ -9118,9 +9255,9 @@
                 <a:cs typeface="Archivo"/>
                 <a:sym typeface="Archivo"/>
               </a:rPr>
-              <a:t>&lt;&lt;Nombre Completo&gt;&gt;</a:t>
+              <a:t>&lt;&lt;Nombre y Apellido&gt;&gt;</a:t>
             </a:r>
-            <a:endParaRPr sz="2800">
+            <a:endParaRPr sz="2800" dirty="0">
               <a:solidFill>
                 <a:schemeClr val="lt1"/>
               </a:solidFill>
@@ -9145,23 +9282,23 @@
           <a:solidFill>
             <a:schemeClr val="lt2"/>
           </a:solidFill>
-          <a:ln cap="flat" cmpd="sng" w="9525">
+          <a:ln w="9525" cap="flat" cmpd="sng">
             <a:solidFill>
               <a:schemeClr val="dk2"/>
             </a:solidFill>
             <a:prstDash val="solid"/>
             <a:round/>
-            <a:headEnd len="sm" w="sm" type="none"/>
-            <a:tailEnd len="sm" w="sm" type="none"/>
+            <a:headEnd type="none" w="sm" len="sm"/>
+            <a:tailEnd type="none" w="sm" len="sm"/>
           </a:ln>
         </p:spPr>
         <p:txBody>
-          <a:bodyPr anchorCtr="0" anchor="ctr" bIns="91425" lIns="91425" spcFirstLastPara="1" rIns="91425" wrap="square" tIns="91425">
+          <a:bodyPr spcFirstLastPara="1" wrap="square" lIns="91425" tIns="91425" rIns="91425" bIns="91425" anchor="ctr" anchorCtr="0">
             <a:noAutofit/>
           </a:bodyPr>
           <a:lstStyle/>
           <a:p>
-            <a:pPr indent="0" lvl="0" marL="0" rtl="0" algn="ctr">
+            <a:pPr marL="0" lvl="0" indent="0" algn="ctr" rtl="0">
               <a:spcBef>
                 <a:spcPts val="0"/>
               </a:spcBef>
@@ -9195,23 +9332,23 @@
           <a:solidFill>
             <a:schemeClr val="lt2"/>
           </a:solidFill>
-          <a:ln cap="flat" cmpd="sng" w="9525">
+          <a:ln w="9525" cap="flat" cmpd="sng">
             <a:solidFill>
               <a:schemeClr val="dk2"/>
             </a:solidFill>
             <a:prstDash val="solid"/>
             <a:round/>
-            <a:headEnd len="sm" w="sm" type="none"/>
-            <a:tailEnd len="sm" w="sm" type="none"/>
+            <a:headEnd type="none" w="sm" len="sm"/>
+            <a:tailEnd type="none" w="sm" len="sm"/>
           </a:ln>
         </p:spPr>
         <p:txBody>
-          <a:bodyPr anchorCtr="0" anchor="ctr" bIns="91425" lIns="91425" spcFirstLastPara="1" rIns="91425" wrap="square" tIns="91425">
+          <a:bodyPr spcFirstLastPara="1" wrap="square" lIns="91425" tIns="91425" rIns="91425" bIns="91425" anchor="ctr" anchorCtr="0">
             <a:noAutofit/>
           </a:bodyPr>
           <a:lstStyle/>
           <a:p>
-            <a:pPr indent="0" lvl="0" marL="0" rtl="0" algn="ctr">
+            <a:pPr marL="0" lvl="0" indent="0" algn="ctr" rtl="0">
               <a:spcBef>
                 <a:spcPts val="0"/>
               </a:spcBef>
@@ -9245,23 +9382,23 @@
           <a:solidFill>
             <a:schemeClr val="lt2"/>
           </a:solidFill>
-          <a:ln cap="flat" cmpd="sng" w="9525">
+          <a:ln w="9525" cap="flat" cmpd="sng">
             <a:solidFill>
               <a:schemeClr val="dk2"/>
             </a:solidFill>
             <a:prstDash val="solid"/>
             <a:round/>
-            <a:headEnd len="sm" w="sm" type="none"/>
-            <a:tailEnd len="sm" w="sm" type="none"/>
+            <a:headEnd type="none" w="sm" len="sm"/>
+            <a:tailEnd type="none" w="sm" len="sm"/>
           </a:ln>
         </p:spPr>
         <p:txBody>
-          <a:bodyPr anchorCtr="0" anchor="ctr" bIns="91425" lIns="91425" spcFirstLastPara="1" rIns="91425" wrap="square" tIns="91425">
+          <a:bodyPr spcFirstLastPara="1" wrap="square" lIns="91425" tIns="91425" rIns="91425" bIns="91425" anchor="ctr" anchorCtr="0">
             <a:noAutofit/>
           </a:bodyPr>
           <a:lstStyle/>
           <a:p>
-            <a:pPr indent="0" lvl="0" marL="0" rtl="0" algn="ctr">
+            <a:pPr marL="0" lvl="0" indent="0" algn="ctr" rtl="0">
               <a:spcBef>
                 <a:spcPts val="0"/>
               </a:spcBef>
@@ -9295,23 +9432,23 @@
           <a:solidFill>
             <a:schemeClr val="lt2"/>
           </a:solidFill>
-          <a:ln cap="flat" cmpd="sng" w="9525">
+          <a:ln w="9525" cap="flat" cmpd="sng">
             <a:solidFill>
               <a:schemeClr val="dk2"/>
             </a:solidFill>
             <a:prstDash val="solid"/>
             <a:round/>
-            <a:headEnd len="sm" w="sm" type="none"/>
-            <a:tailEnd len="sm" w="sm" type="none"/>
+            <a:headEnd type="none" w="sm" len="sm"/>
+            <a:tailEnd type="none" w="sm" len="sm"/>
           </a:ln>
         </p:spPr>
         <p:txBody>
-          <a:bodyPr anchorCtr="0" anchor="ctr" bIns="91425" lIns="91425" spcFirstLastPara="1" rIns="91425" wrap="square" tIns="91425">
+          <a:bodyPr spcFirstLastPara="1" wrap="square" lIns="91425" tIns="91425" rIns="91425" bIns="91425" anchor="ctr" anchorCtr="0">
             <a:noAutofit/>
           </a:bodyPr>
           <a:lstStyle/>
           <a:p>
-            <a:pPr indent="0" lvl="0" marL="0" rtl="0" algn="ctr">
+            <a:pPr marL="0" lvl="0" indent="0" algn="ctr" rtl="0">
               <a:spcBef>
                 <a:spcPts val="0"/>
               </a:spcBef>
@@ -9345,23 +9482,23 @@
           <a:solidFill>
             <a:schemeClr val="lt2"/>
           </a:solidFill>
-          <a:ln cap="flat" cmpd="sng" w="9525">
+          <a:ln w="9525" cap="flat" cmpd="sng">
             <a:solidFill>
               <a:schemeClr val="dk2"/>
             </a:solidFill>
             <a:prstDash val="solid"/>
             <a:round/>
-            <a:headEnd len="sm" w="sm" type="none"/>
-            <a:tailEnd len="sm" w="sm" type="none"/>
+            <a:headEnd type="none" w="sm" len="sm"/>
+            <a:tailEnd type="none" w="sm" len="sm"/>
           </a:ln>
         </p:spPr>
         <p:txBody>
-          <a:bodyPr anchorCtr="0" anchor="ctr" bIns="91425" lIns="91425" spcFirstLastPara="1" rIns="91425" wrap="square" tIns="91425">
+          <a:bodyPr spcFirstLastPara="1" wrap="square" lIns="91425" tIns="91425" rIns="91425" bIns="91425" anchor="ctr" anchorCtr="0">
             <a:noAutofit/>
           </a:bodyPr>
           <a:lstStyle/>
           <a:p>
-            <a:pPr indent="0" lvl="0" marL="0" rtl="0" algn="ctr">
+            <a:pPr marL="0" lvl="0" indent="0" algn="ctr" rtl="0">
               <a:spcBef>
                 <a:spcPts val="0"/>
               </a:spcBef>
@@ -9395,23 +9532,23 @@
           <a:solidFill>
             <a:schemeClr val="lt2"/>
           </a:solidFill>
-          <a:ln cap="flat" cmpd="sng" w="9525">
+          <a:ln w="9525" cap="flat" cmpd="sng">
             <a:solidFill>
               <a:schemeClr val="dk2"/>
             </a:solidFill>
             <a:prstDash val="solid"/>
             <a:round/>
-            <a:headEnd len="sm" w="sm" type="none"/>
-            <a:tailEnd len="sm" w="sm" type="none"/>
+            <a:headEnd type="none" w="sm" len="sm"/>
+            <a:tailEnd type="none" w="sm" len="sm"/>
           </a:ln>
         </p:spPr>
         <p:txBody>
-          <a:bodyPr anchorCtr="0" anchor="ctr" bIns="91425" lIns="91425" spcFirstLastPara="1" rIns="91425" wrap="square" tIns="91425">
+          <a:bodyPr spcFirstLastPara="1" wrap="square" lIns="91425" tIns="91425" rIns="91425" bIns="91425" anchor="ctr" anchorCtr="0">
             <a:noAutofit/>
           </a:bodyPr>
           <a:lstStyle/>
           <a:p>
-            <a:pPr indent="0" lvl="0" marL="0" rtl="0" algn="ctr">
+            <a:pPr marL="0" lvl="0" indent="0" algn="ctr" rtl="0">
               <a:spcBef>
                 <a:spcPts val="0"/>
               </a:spcBef>
@@ -9437,7 +9574,7 @@
 </file>
 
 <file path=ppt/slides/slide3.xml><?xml version="1.0" encoding="utf-8"?>
-<p:sld xmlns:a="http://schemas.openxmlformats.org/drawingml/2006/main" xmlns:r="http://schemas.openxmlformats.org/officeDocument/2006/relationships" xmlns:mc="http://schemas.openxmlformats.org/markup-compatibility/2006" xmlns:mv="urn:schemas-microsoft-com:mac:vml" xmlns:p="http://schemas.openxmlformats.org/presentationml/2006/main" xmlns:c="http://schemas.openxmlformats.org/drawingml/2006/chart" xmlns:dgm="http://schemas.openxmlformats.org/drawingml/2006/diagram" xmlns:o="urn:schemas-microsoft-com:office:office" xmlns:v="urn:schemas-microsoft-com:vml" xmlns:pvml="urn:schemas-microsoft-com:office:powerpoint" xmlns:com="http://schemas.openxmlformats.org/drawingml/2006/compatibility" xmlns:p14="http://schemas.microsoft.com/office/powerpoint/2010/main" xmlns:p15="http://schemas.microsoft.com/office/powerpoint/2012/main" xmlns:ahyp="http://schemas.microsoft.com/office/drawing/2018/hyperlinkcolor">
+<p:sld xmlns:a="http://schemas.openxmlformats.org/drawingml/2006/main" xmlns:r="http://schemas.openxmlformats.org/officeDocument/2006/relationships" xmlns:p="http://schemas.openxmlformats.org/presentationml/2006/main">
   <p:cSld>
     <p:bg>
       <p:bgPr>
@@ -9449,11 +9586,12 @@
             <a:fillRect/>
           </a:stretch>
         </a:blipFill>
+        <a:effectLst/>
       </p:bgPr>
     </p:bg>
     <p:spTree>
       <p:nvGrpSpPr>
-        <p:cNvPr id="69" name="Shape 69"/>
+        <p:cNvPr id="1" name="Shape 69"/>
         <p:cNvGrpSpPr/>
         <p:nvPr/>
       </p:nvGrpSpPr>
@@ -9474,7 +9612,7 @@
 </file>
 
 <file path=ppt/slides/slide4.xml><?xml version="1.0" encoding="utf-8"?>
-<p:sld xmlns:a="http://schemas.openxmlformats.org/drawingml/2006/main" xmlns:r="http://schemas.openxmlformats.org/officeDocument/2006/relationships" xmlns:mc="http://schemas.openxmlformats.org/markup-compatibility/2006" xmlns:mv="urn:schemas-microsoft-com:mac:vml" xmlns:p="http://schemas.openxmlformats.org/presentationml/2006/main" xmlns:c="http://schemas.openxmlformats.org/drawingml/2006/chart" xmlns:dgm="http://schemas.openxmlformats.org/drawingml/2006/diagram" xmlns:o="urn:schemas-microsoft-com:office:office" xmlns:v="urn:schemas-microsoft-com:vml" xmlns:pvml="urn:schemas-microsoft-com:office:powerpoint" xmlns:com="http://schemas.openxmlformats.org/drawingml/2006/compatibility" xmlns:p14="http://schemas.microsoft.com/office/powerpoint/2010/main" xmlns:p15="http://schemas.microsoft.com/office/powerpoint/2012/main" xmlns:ahyp="http://schemas.microsoft.com/office/drawing/2018/hyperlinkcolor">
+<p:sld xmlns:a="http://schemas.openxmlformats.org/drawingml/2006/main" xmlns:r="http://schemas.openxmlformats.org/officeDocument/2006/relationships" xmlns:p="http://schemas.openxmlformats.org/presentationml/2006/main">
   <p:cSld>
     <p:bg>
       <p:bgPr>
@@ -9486,11 +9624,12 @@
             <a:fillRect/>
           </a:stretch>
         </a:blipFill>
+        <a:effectLst/>
       </p:bgPr>
     </p:bg>
     <p:spTree>
       <p:nvGrpSpPr>
-        <p:cNvPr id="73" name="Shape 73"/>
+        <p:cNvPr id="1" name="Shape 73"/>
         <p:cNvGrpSpPr/>
         <p:nvPr/>
       </p:nvGrpSpPr>
@@ -9511,7 +9650,7 @@
 </file>
 
 <file path=ppt/theme/theme1.xml><?xml version="1.0" encoding="utf-8"?>
-<a:theme xmlns:a="http://schemas.openxmlformats.org/drawingml/2006/main" xmlns:r="http://schemas.openxmlformats.org/officeDocument/2006/relationships" name="Simple Light">
+<a:theme xmlns:a="http://schemas.openxmlformats.org/drawingml/2006/main" name="Simple Light">
   <a:themeElements>
     <a:clrScheme name="Simple Light">
       <a:dk1>
@@ -9786,11 +9925,13 @@
       </a:bgFillStyleLst>
     </a:fmtScheme>
   </a:themeElements>
+  <a:objectDefaults/>
+  <a:extraClrSchemeLst/>
 </a:theme>
 </file>
 
 <file path=ppt/theme/theme2.xml><?xml version="1.0" encoding="utf-8"?>
-<a:theme xmlns:a="http://schemas.openxmlformats.org/drawingml/2006/main" xmlns:r="http://schemas.openxmlformats.org/officeDocument/2006/relationships">
+<a:theme xmlns:a="http://schemas.openxmlformats.org/drawingml/2006/main">
   <a:themeElements>
     <a:clrScheme name="Default">
       <a:dk1>
@@ -10065,5 +10206,7 @@
       </a:bgFillStyleLst>
     </a:fmtScheme>
   </a:themeElements>
+  <a:objectDefaults/>
+  <a:extraClrSchemeLst/>
 </a:theme>
 </file>